--- a/doc/Gebrauchsanweisung(Deutsch).pptx
+++ b/doc/Gebrauchsanweisung(Deutsch).pptx
@@ -5,19 +5,22 @@
     <p:sldMasterId id="2147483661" r:id="rId1"/>
   </p:sldMasterIdLst>
   <p:notesMasterIdLst>
-    <p:notesMasterId r:id="rId12"/>
+    <p:notesMasterId r:id="rId15"/>
   </p:notesMasterIdLst>
   <p:sldIdLst>
     <p:sldId id="320" r:id="rId2"/>
-    <p:sldId id="2147375043" r:id="rId3"/>
-    <p:sldId id="2147375044" r:id="rId4"/>
-    <p:sldId id="2147375045" r:id="rId5"/>
-    <p:sldId id="2147375047" r:id="rId6"/>
-    <p:sldId id="2147375046" r:id="rId7"/>
-    <p:sldId id="2147375054" r:id="rId8"/>
-    <p:sldId id="2147375048" r:id="rId9"/>
-    <p:sldId id="2147375055" r:id="rId10"/>
-    <p:sldId id="3019" r:id="rId11"/>
+    <p:sldId id="2147375059" r:id="rId3"/>
+    <p:sldId id="2147375057" r:id="rId4"/>
+    <p:sldId id="2147375058" r:id="rId5"/>
+    <p:sldId id="2147375060" r:id="rId6"/>
+    <p:sldId id="2147375061" r:id="rId7"/>
+    <p:sldId id="2147375062" r:id="rId8"/>
+    <p:sldId id="2147375046" r:id="rId9"/>
+    <p:sldId id="2147375056" r:id="rId10"/>
+    <p:sldId id="2147375054" r:id="rId11"/>
+    <p:sldId id="2147375063" r:id="rId12"/>
+    <p:sldId id="2147375064" r:id="rId13"/>
+    <p:sldId id="3019" r:id="rId14"/>
   </p:sldIdLst>
   <p:sldSz cx="12192000" cy="6858000"/>
   <p:notesSz cx="6858000" cy="9144000"/>
@@ -218,7 +221,7 @@
           <a:p>
             <a:fld id="{2297D84D-3581-4C3F-BAAF-6FA71816E76E}" type="datetimeFigureOut">
               <a:rPr lang="zh-TW" altLang="en-US" smtClean="0"/>
-              <a:t>2026/3/12</a:t>
+              <a:t>2026/3/17</a:t>
             </a:fld>
             <a:endParaRPr lang="zh-TW" altLang="en-US"/>
           </a:p>
@@ -636,7 +639,707 @@
 </p:notes>
 </file>
 
+<file path=ppt/notesSlides/notesSlide10.xml><?xml version="1.0" encoding="utf-8"?>
+<p:notes xmlns:a="http://schemas.openxmlformats.org/drawingml/2006/main" xmlns:r="http://schemas.openxmlformats.org/officeDocument/2006/relationships" xmlns:p="http://schemas.openxmlformats.org/presentationml/2006/main">
+  <p:cSld>
+    <p:spTree>
+      <p:nvGrpSpPr>
+        <p:cNvPr id="1" name="">
+          <a:extLst>
+            <a:ext uri="{FF2B5EF4-FFF2-40B4-BE49-F238E27FC236}">
+              <a16:creationId xmlns:a16="http://schemas.microsoft.com/office/drawing/2014/main" id="{7411B0E2-9DAD-B6EE-90DC-405AE9E420E8}"/>
+            </a:ext>
+          </a:extLst>
+        </p:cNvPr>
+        <p:cNvGrpSpPr/>
+        <p:nvPr/>
+      </p:nvGrpSpPr>
+      <p:grpSpPr>
+        <a:xfrm>
+          <a:off x="0" y="0"/>
+          <a:ext cx="0" cy="0"/>
+          <a:chOff x="0" y="0"/>
+          <a:chExt cx="0" cy="0"/>
+        </a:xfrm>
+      </p:grpSpPr>
+      <p:sp>
+        <p:nvSpPr>
+          <p:cNvPr id="2" name="投影片圖像版面配置區 1">
+            <a:extLst>
+              <a:ext uri="{FF2B5EF4-FFF2-40B4-BE49-F238E27FC236}">
+                <a16:creationId xmlns:a16="http://schemas.microsoft.com/office/drawing/2014/main" id="{9B198BAC-021C-C0B8-F7CE-57CC31AD206B}"/>
+              </a:ext>
+            </a:extLst>
+          </p:cNvPr>
+          <p:cNvSpPr>
+            <a:spLocks noGrp="1" noRot="1" noChangeAspect="1"/>
+          </p:cNvSpPr>
+          <p:nvPr>
+            <p:ph type="sldImg"/>
+          </p:nvPr>
+        </p:nvSpPr>
+        <p:spPr/>
+      </p:sp>
+      <p:sp>
+        <p:nvSpPr>
+          <p:cNvPr id="3" name="備忘稿版面配置區 2">
+            <a:extLst>
+              <a:ext uri="{FF2B5EF4-FFF2-40B4-BE49-F238E27FC236}">
+                <a16:creationId xmlns:a16="http://schemas.microsoft.com/office/drawing/2014/main" id="{BD6B908B-EB18-6544-A5D3-A637663E432D}"/>
+              </a:ext>
+            </a:extLst>
+          </p:cNvPr>
+          <p:cNvSpPr>
+            <a:spLocks noGrp="1"/>
+          </p:cNvSpPr>
+          <p:nvPr>
+            <p:ph type="body" idx="1"/>
+          </p:nvPr>
+        </p:nvSpPr>
+        <p:spPr/>
+        <p:txBody>
+          <a:bodyPr/>
+          <a:lstStyle/>
+          <a:p>
+            <a:r>
+              <a:rPr lang="en-US" altLang="zh-TW" dirty="0"/>
+              <a:t>30</a:t>
+            </a:r>
+            <a:r>
+              <a:rPr lang="zh-TW" altLang="en-US" dirty="0"/>
+              <a:t>項</a:t>
+            </a:r>
+          </a:p>
+        </p:txBody>
+      </p:sp>
+      <p:sp>
+        <p:nvSpPr>
+          <p:cNvPr id="4" name="投影片編號版面配置區 3">
+            <a:extLst>
+              <a:ext uri="{FF2B5EF4-FFF2-40B4-BE49-F238E27FC236}">
+                <a16:creationId xmlns:a16="http://schemas.microsoft.com/office/drawing/2014/main" id="{A22293A4-C3DA-4124-0C26-385BD6ED7EC0}"/>
+              </a:ext>
+            </a:extLst>
+          </p:cNvPr>
+          <p:cNvSpPr>
+            <a:spLocks noGrp="1"/>
+          </p:cNvSpPr>
+          <p:nvPr>
+            <p:ph type="sldNum" sz="quarter" idx="10"/>
+          </p:nvPr>
+        </p:nvSpPr>
+        <p:spPr/>
+        <p:txBody>
+          <a:bodyPr/>
+          <a:lstStyle/>
+          <a:p>
+            <a:pPr marL="0" marR="0" lvl="0" indent="0" algn="r" defTabSz="1219170" rtl="0" eaLnBrk="1" fontAlgn="auto" latinLnBrk="0" hangingPunct="1">
+              <a:lnSpc>
+                <a:spcPct val="100000"/>
+              </a:lnSpc>
+              <a:spcBef>
+                <a:spcPts val="0"/>
+              </a:spcBef>
+              <a:spcAft>
+                <a:spcPts val="0"/>
+              </a:spcAft>
+              <a:buClrTx/>
+              <a:buSzTx/>
+              <a:buFontTx/>
+              <a:buNone/>
+              <a:tabLst/>
+              <a:defRPr/>
+            </a:pPr>
+            <a:fld id="{BFF380C3-7D2B-43B9-A2FF-0551F6D200CF}" type="slidenum">
+              <a:rPr kumimoji="0" lang="en-US" sz="1200" b="0" i="0" u="none" strike="noStrike" kern="1200" cap="none" spc="0" normalizeH="0" baseline="0" noProof="0" smtClean="0">
+                <a:ln>
+                  <a:noFill/>
+                </a:ln>
+                <a:solidFill>
+                  <a:prstClr val="black"/>
+                </a:solidFill>
+                <a:effectLst/>
+                <a:uLnTx/>
+                <a:uFillTx/>
+                <a:latin typeface="Calibri" panose="020F0502020204030204"/>
+                <a:ea typeface="+mn-ea"/>
+                <a:cs typeface="+mn-cs"/>
+              </a:rPr>
+              <a:pPr marL="0" marR="0" lvl="0" indent="0" algn="r" defTabSz="1219170" rtl="0" eaLnBrk="1" fontAlgn="auto" latinLnBrk="0" hangingPunct="1">
+                <a:lnSpc>
+                  <a:spcPct val="100000"/>
+                </a:lnSpc>
+                <a:spcBef>
+                  <a:spcPts val="0"/>
+                </a:spcBef>
+                <a:spcAft>
+                  <a:spcPts val="0"/>
+                </a:spcAft>
+                <a:buClrTx/>
+                <a:buSzTx/>
+                <a:buFontTx/>
+                <a:buNone/>
+                <a:tabLst/>
+                <a:defRPr/>
+              </a:pPr>
+              <a:t>11</a:t>
+            </a:fld>
+            <a:endParaRPr kumimoji="0" lang="en-US" sz="1200" b="0" i="0" u="none" strike="noStrike" kern="1200" cap="none" spc="0" normalizeH="0" baseline="0" noProof="0">
+              <a:ln>
+                <a:noFill/>
+              </a:ln>
+              <a:solidFill>
+                <a:prstClr val="black"/>
+              </a:solidFill>
+              <a:effectLst/>
+              <a:uLnTx/>
+              <a:uFillTx/>
+              <a:latin typeface="Calibri" panose="020F0502020204030204"/>
+              <a:ea typeface="+mn-ea"/>
+              <a:cs typeface="+mn-cs"/>
+            </a:endParaRPr>
+          </a:p>
+        </p:txBody>
+      </p:sp>
+    </p:spTree>
+    <p:extLst>
+      <p:ext uri="{BB962C8B-B14F-4D97-AF65-F5344CB8AC3E}">
+        <p14:creationId xmlns:p14="http://schemas.microsoft.com/office/powerpoint/2010/main" val="1244657598"/>
+      </p:ext>
+    </p:extLst>
+  </p:cSld>
+  <p:clrMapOvr>
+    <a:masterClrMapping/>
+  </p:clrMapOvr>
+</p:notes>
+</file>
+
+<file path=ppt/notesSlides/notesSlide11.xml><?xml version="1.0" encoding="utf-8"?>
+<p:notes xmlns:a="http://schemas.openxmlformats.org/drawingml/2006/main" xmlns:r="http://schemas.openxmlformats.org/officeDocument/2006/relationships" xmlns:p="http://schemas.openxmlformats.org/presentationml/2006/main">
+  <p:cSld>
+    <p:spTree>
+      <p:nvGrpSpPr>
+        <p:cNvPr id="1" name="">
+          <a:extLst>
+            <a:ext uri="{FF2B5EF4-FFF2-40B4-BE49-F238E27FC236}">
+              <a16:creationId xmlns:a16="http://schemas.microsoft.com/office/drawing/2014/main" id="{948BE4CF-676B-A695-B6E5-994869753393}"/>
+            </a:ext>
+          </a:extLst>
+        </p:cNvPr>
+        <p:cNvGrpSpPr/>
+        <p:nvPr/>
+      </p:nvGrpSpPr>
+      <p:grpSpPr>
+        <a:xfrm>
+          <a:off x="0" y="0"/>
+          <a:ext cx="0" cy="0"/>
+          <a:chOff x="0" y="0"/>
+          <a:chExt cx="0" cy="0"/>
+        </a:xfrm>
+      </p:grpSpPr>
+      <p:sp>
+        <p:nvSpPr>
+          <p:cNvPr id="2" name="投影片圖像版面配置區 1">
+            <a:extLst>
+              <a:ext uri="{FF2B5EF4-FFF2-40B4-BE49-F238E27FC236}">
+                <a16:creationId xmlns:a16="http://schemas.microsoft.com/office/drawing/2014/main" id="{4A148959-A56A-B121-9AAC-8FE302D1F875}"/>
+              </a:ext>
+            </a:extLst>
+          </p:cNvPr>
+          <p:cNvSpPr>
+            <a:spLocks noGrp="1" noRot="1" noChangeAspect="1"/>
+          </p:cNvSpPr>
+          <p:nvPr>
+            <p:ph type="sldImg"/>
+          </p:nvPr>
+        </p:nvSpPr>
+        <p:spPr/>
+      </p:sp>
+      <p:sp>
+        <p:nvSpPr>
+          <p:cNvPr id="3" name="備忘稿版面配置區 2">
+            <a:extLst>
+              <a:ext uri="{FF2B5EF4-FFF2-40B4-BE49-F238E27FC236}">
+                <a16:creationId xmlns:a16="http://schemas.microsoft.com/office/drawing/2014/main" id="{63944723-52DC-7FD4-7D5D-68A52C4E51E6}"/>
+              </a:ext>
+            </a:extLst>
+          </p:cNvPr>
+          <p:cNvSpPr>
+            <a:spLocks noGrp="1"/>
+          </p:cNvSpPr>
+          <p:nvPr>
+            <p:ph type="body" idx="1"/>
+          </p:nvPr>
+        </p:nvSpPr>
+        <p:spPr/>
+        <p:txBody>
+          <a:bodyPr/>
+          <a:lstStyle/>
+          <a:p>
+            <a:r>
+              <a:rPr lang="en-US" altLang="zh-TW" dirty="0"/>
+              <a:t>30</a:t>
+            </a:r>
+            <a:r>
+              <a:rPr lang="zh-TW" altLang="en-US" dirty="0"/>
+              <a:t>項</a:t>
+            </a:r>
+          </a:p>
+        </p:txBody>
+      </p:sp>
+      <p:sp>
+        <p:nvSpPr>
+          <p:cNvPr id="4" name="投影片編號版面配置區 3">
+            <a:extLst>
+              <a:ext uri="{FF2B5EF4-FFF2-40B4-BE49-F238E27FC236}">
+                <a16:creationId xmlns:a16="http://schemas.microsoft.com/office/drawing/2014/main" id="{EA68918A-705E-C659-ED2E-9591C6709212}"/>
+              </a:ext>
+            </a:extLst>
+          </p:cNvPr>
+          <p:cNvSpPr>
+            <a:spLocks noGrp="1"/>
+          </p:cNvSpPr>
+          <p:nvPr>
+            <p:ph type="sldNum" sz="quarter" idx="10"/>
+          </p:nvPr>
+        </p:nvSpPr>
+        <p:spPr/>
+        <p:txBody>
+          <a:bodyPr/>
+          <a:lstStyle/>
+          <a:p>
+            <a:pPr marL="0" marR="0" lvl="0" indent="0" algn="r" defTabSz="1219170" rtl="0" eaLnBrk="1" fontAlgn="auto" latinLnBrk="0" hangingPunct="1">
+              <a:lnSpc>
+                <a:spcPct val="100000"/>
+              </a:lnSpc>
+              <a:spcBef>
+                <a:spcPts val="0"/>
+              </a:spcBef>
+              <a:spcAft>
+                <a:spcPts val="0"/>
+              </a:spcAft>
+              <a:buClrTx/>
+              <a:buSzTx/>
+              <a:buFontTx/>
+              <a:buNone/>
+              <a:tabLst/>
+              <a:defRPr/>
+            </a:pPr>
+            <a:fld id="{BFF380C3-7D2B-43B9-A2FF-0551F6D200CF}" type="slidenum">
+              <a:rPr kumimoji="0" lang="en-US" sz="1200" b="0" i="0" u="none" strike="noStrike" kern="1200" cap="none" spc="0" normalizeH="0" baseline="0" noProof="0" smtClean="0">
+                <a:ln>
+                  <a:noFill/>
+                </a:ln>
+                <a:solidFill>
+                  <a:prstClr val="black"/>
+                </a:solidFill>
+                <a:effectLst/>
+                <a:uLnTx/>
+                <a:uFillTx/>
+                <a:latin typeface="Calibri" panose="020F0502020204030204"/>
+                <a:ea typeface="+mn-ea"/>
+                <a:cs typeface="+mn-cs"/>
+              </a:rPr>
+              <a:pPr marL="0" marR="0" lvl="0" indent="0" algn="r" defTabSz="1219170" rtl="0" eaLnBrk="1" fontAlgn="auto" latinLnBrk="0" hangingPunct="1">
+                <a:lnSpc>
+                  <a:spcPct val="100000"/>
+                </a:lnSpc>
+                <a:spcBef>
+                  <a:spcPts val="0"/>
+                </a:spcBef>
+                <a:spcAft>
+                  <a:spcPts val="0"/>
+                </a:spcAft>
+                <a:buClrTx/>
+                <a:buSzTx/>
+                <a:buFontTx/>
+                <a:buNone/>
+                <a:tabLst/>
+                <a:defRPr/>
+              </a:pPr>
+              <a:t>12</a:t>
+            </a:fld>
+            <a:endParaRPr kumimoji="0" lang="en-US" sz="1200" b="0" i="0" u="none" strike="noStrike" kern="1200" cap="none" spc="0" normalizeH="0" baseline="0" noProof="0">
+              <a:ln>
+                <a:noFill/>
+              </a:ln>
+              <a:solidFill>
+                <a:prstClr val="black"/>
+              </a:solidFill>
+              <a:effectLst/>
+              <a:uLnTx/>
+              <a:uFillTx/>
+              <a:latin typeface="Calibri" panose="020F0502020204030204"/>
+              <a:ea typeface="+mn-ea"/>
+              <a:cs typeface="+mn-cs"/>
+            </a:endParaRPr>
+          </a:p>
+        </p:txBody>
+      </p:sp>
+    </p:spTree>
+    <p:extLst>
+      <p:ext uri="{BB962C8B-B14F-4D97-AF65-F5344CB8AC3E}">
+        <p14:creationId xmlns:p14="http://schemas.microsoft.com/office/powerpoint/2010/main" val="1638200618"/>
+      </p:ext>
+    </p:extLst>
+  </p:cSld>
+  <p:clrMapOvr>
+    <a:masterClrMapping/>
+  </p:clrMapOvr>
+</p:notes>
+</file>
+
 <file path=ppt/notesSlides/notesSlide2.xml><?xml version="1.0" encoding="utf-8"?>
+<p:notes xmlns:a="http://schemas.openxmlformats.org/drawingml/2006/main" xmlns:r="http://schemas.openxmlformats.org/officeDocument/2006/relationships" xmlns:p="http://schemas.openxmlformats.org/presentationml/2006/main">
+  <p:cSld>
+    <p:spTree>
+      <p:nvGrpSpPr>
+        <p:cNvPr id="1" name="">
+          <a:extLst>
+            <a:ext uri="{FF2B5EF4-FFF2-40B4-BE49-F238E27FC236}">
+              <a16:creationId xmlns:a16="http://schemas.microsoft.com/office/drawing/2014/main" id="{25918218-28F1-27B7-DAD0-03EF08EFD3E9}"/>
+            </a:ext>
+          </a:extLst>
+        </p:cNvPr>
+        <p:cNvGrpSpPr/>
+        <p:nvPr/>
+      </p:nvGrpSpPr>
+      <p:grpSpPr>
+        <a:xfrm>
+          <a:off x="0" y="0"/>
+          <a:ext cx="0" cy="0"/>
+          <a:chOff x="0" y="0"/>
+          <a:chExt cx="0" cy="0"/>
+        </a:xfrm>
+      </p:grpSpPr>
+      <p:sp>
+        <p:nvSpPr>
+          <p:cNvPr id="2" name="投影片圖像版面配置區 1">
+            <a:extLst>
+              <a:ext uri="{FF2B5EF4-FFF2-40B4-BE49-F238E27FC236}">
+                <a16:creationId xmlns:a16="http://schemas.microsoft.com/office/drawing/2014/main" id="{E0CBEACC-FA69-563F-C6D0-60BFE927B4C0}"/>
+              </a:ext>
+            </a:extLst>
+          </p:cNvPr>
+          <p:cNvSpPr>
+            <a:spLocks noGrp="1" noRot="1" noChangeAspect="1"/>
+          </p:cNvSpPr>
+          <p:nvPr>
+            <p:ph type="sldImg"/>
+          </p:nvPr>
+        </p:nvSpPr>
+        <p:spPr/>
+      </p:sp>
+      <p:sp>
+        <p:nvSpPr>
+          <p:cNvPr id="3" name="備忘稿版面配置區 2">
+            <a:extLst>
+              <a:ext uri="{FF2B5EF4-FFF2-40B4-BE49-F238E27FC236}">
+                <a16:creationId xmlns:a16="http://schemas.microsoft.com/office/drawing/2014/main" id="{4A605115-A566-ED99-2EDE-AF2D3C651498}"/>
+              </a:ext>
+            </a:extLst>
+          </p:cNvPr>
+          <p:cNvSpPr>
+            <a:spLocks noGrp="1"/>
+          </p:cNvSpPr>
+          <p:nvPr>
+            <p:ph type="body" idx="1"/>
+          </p:nvPr>
+        </p:nvSpPr>
+        <p:spPr/>
+        <p:txBody>
+          <a:bodyPr/>
+          <a:lstStyle/>
+          <a:p>
+            <a:r>
+              <a:rPr lang="en-US" altLang="zh-TW" dirty="0"/>
+              <a:t>30</a:t>
+            </a:r>
+            <a:r>
+              <a:rPr lang="zh-TW" altLang="en-US" dirty="0"/>
+              <a:t>項</a:t>
+            </a:r>
+          </a:p>
+        </p:txBody>
+      </p:sp>
+      <p:sp>
+        <p:nvSpPr>
+          <p:cNvPr id="4" name="投影片編號版面配置區 3">
+            <a:extLst>
+              <a:ext uri="{FF2B5EF4-FFF2-40B4-BE49-F238E27FC236}">
+                <a16:creationId xmlns:a16="http://schemas.microsoft.com/office/drawing/2014/main" id="{DD161119-6187-CAE1-2261-D54E160E9C6C}"/>
+              </a:ext>
+            </a:extLst>
+          </p:cNvPr>
+          <p:cNvSpPr>
+            <a:spLocks noGrp="1"/>
+          </p:cNvSpPr>
+          <p:nvPr>
+            <p:ph type="sldNum" sz="quarter" idx="10"/>
+          </p:nvPr>
+        </p:nvSpPr>
+        <p:spPr/>
+        <p:txBody>
+          <a:bodyPr/>
+          <a:lstStyle/>
+          <a:p>
+            <a:pPr marL="0" marR="0" lvl="0" indent="0" algn="r" defTabSz="1219170" rtl="0" eaLnBrk="1" fontAlgn="auto" latinLnBrk="0" hangingPunct="1">
+              <a:lnSpc>
+                <a:spcPct val="100000"/>
+              </a:lnSpc>
+              <a:spcBef>
+                <a:spcPts val="0"/>
+              </a:spcBef>
+              <a:spcAft>
+                <a:spcPts val="0"/>
+              </a:spcAft>
+              <a:buClrTx/>
+              <a:buSzTx/>
+              <a:buFontTx/>
+              <a:buNone/>
+              <a:tabLst/>
+              <a:defRPr/>
+            </a:pPr>
+            <a:fld id="{BFF380C3-7D2B-43B9-A2FF-0551F6D200CF}" type="slidenum">
+              <a:rPr kumimoji="0" lang="en-US" sz="1200" b="0" i="0" u="none" strike="noStrike" kern="1200" cap="none" spc="0" normalizeH="0" baseline="0" noProof="0" smtClean="0">
+                <a:ln>
+                  <a:noFill/>
+                </a:ln>
+                <a:solidFill>
+                  <a:prstClr val="black"/>
+                </a:solidFill>
+                <a:effectLst/>
+                <a:uLnTx/>
+                <a:uFillTx/>
+                <a:latin typeface="Calibri" panose="020F0502020204030204"/>
+                <a:ea typeface="+mn-ea"/>
+                <a:cs typeface="+mn-cs"/>
+              </a:rPr>
+              <a:pPr marL="0" marR="0" lvl="0" indent="0" algn="r" defTabSz="1219170" rtl="0" eaLnBrk="1" fontAlgn="auto" latinLnBrk="0" hangingPunct="1">
+                <a:lnSpc>
+                  <a:spcPct val="100000"/>
+                </a:lnSpc>
+                <a:spcBef>
+                  <a:spcPts val="0"/>
+                </a:spcBef>
+                <a:spcAft>
+                  <a:spcPts val="0"/>
+                </a:spcAft>
+                <a:buClrTx/>
+                <a:buSzTx/>
+                <a:buFontTx/>
+                <a:buNone/>
+                <a:tabLst/>
+                <a:defRPr/>
+              </a:pPr>
+              <a:t>3</a:t>
+            </a:fld>
+            <a:endParaRPr kumimoji="0" lang="en-US" sz="1200" b="0" i="0" u="none" strike="noStrike" kern="1200" cap="none" spc="0" normalizeH="0" baseline="0" noProof="0">
+              <a:ln>
+                <a:noFill/>
+              </a:ln>
+              <a:solidFill>
+                <a:prstClr val="black"/>
+              </a:solidFill>
+              <a:effectLst/>
+              <a:uLnTx/>
+              <a:uFillTx/>
+              <a:latin typeface="Calibri" panose="020F0502020204030204"/>
+              <a:ea typeface="+mn-ea"/>
+              <a:cs typeface="+mn-cs"/>
+            </a:endParaRPr>
+          </a:p>
+        </p:txBody>
+      </p:sp>
+    </p:spTree>
+    <p:extLst>
+      <p:ext uri="{BB962C8B-B14F-4D97-AF65-F5344CB8AC3E}">
+        <p14:creationId xmlns:p14="http://schemas.microsoft.com/office/powerpoint/2010/main" val="2075328792"/>
+      </p:ext>
+    </p:extLst>
+  </p:cSld>
+  <p:clrMapOvr>
+    <a:masterClrMapping/>
+  </p:clrMapOvr>
+</p:notes>
+</file>
+
+<file path=ppt/notesSlides/notesSlide3.xml><?xml version="1.0" encoding="utf-8"?>
+<p:notes xmlns:a="http://schemas.openxmlformats.org/drawingml/2006/main" xmlns:r="http://schemas.openxmlformats.org/officeDocument/2006/relationships" xmlns:p="http://schemas.openxmlformats.org/presentationml/2006/main">
+  <p:cSld>
+    <p:spTree>
+      <p:nvGrpSpPr>
+        <p:cNvPr id="1" name="">
+          <a:extLst>
+            <a:ext uri="{FF2B5EF4-FFF2-40B4-BE49-F238E27FC236}">
+              <a16:creationId xmlns:a16="http://schemas.microsoft.com/office/drawing/2014/main" id="{224F4BF4-010C-68D3-9ECF-1A9D8B3B850E}"/>
+            </a:ext>
+          </a:extLst>
+        </p:cNvPr>
+        <p:cNvGrpSpPr/>
+        <p:nvPr/>
+      </p:nvGrpSpPr>
+      <p:grpSpPr>
+        <a:xfrm>
+          <a:off x="0" y="0"/>
+          <a:ext cx="0" cy="0"/>
+          <a:chOff x="0" y="0"/>
+          <a:chExt cx="0" cy="0"/>
+        </a:xfrm>
+      </p:grpSpPr>
+      <p:sp>
+        <p:nvSpPr>
+          <p:cNvPr id="2" name="投影片圖像版面配置區 1">
+            <a:extLst>
+              <a:ext uri="{FF2B5EF4-FFF2-40B4-BE49-F238E27FC236}">
+                <a16:creationId xmlns:a16="http://schemas.microsoft.com/office/drawing/2014/main" id="{402525D6-D95F-B138-3001-69784120169A}"/>
+              </a:ext>
+            </a:extLst>
+          </p:cNvPr>
+          <p:cNvSpPr>
+            <a:spLocks noGrp="1" noRot="1" noChangeAspect="1"/>
+          </p:cNvSpPr>
+          <p:nvPr>
+            <p:ph type="sldImg"/>
+          </p:nvPr>
+        </p:nvSpPr>
+        <p:spPr/>
+      </p:sp>
+      <p:sp>
+        <p:nvSpPr>
+          <p:cNvPr id="3" name="備忘稿版面配置區 2">
+            <a:extLst>
+              <a:ext uri="{FF2B5EF4-FFF2-40B4-BE49-F238E27FC236}">
+                <a16:creationId xmlns:a16="http://schemas.microsoft.com/office/drawing/2014/main" id="{3CDAD268-9BD0-29F2-EB4D-A213D9303F27}"/>
+              </a:ext>
+            </a:extLst>
+          </p:cNvPr>
+          <p:cNvSpPr>
+            <a:spLocks noGrp="1"/>
+          </p:cNvSpPr>
+          <p:nvPr>
+            <p:ph type="body" idx="1"/>
+          </p:nvPr>
+        </p:nvSpPr>
+        <p:spPr/>
+        <p:txBody>
+          <a:bodyPr/>
+          <a:lstStyle/>
+          <a:p>
+            <a:r>
+              <a:rPr lang="en-US" altLang="zh-TW" dirty="0"/>
+              <a:t>30</a:t>
+            </a:r>
+            <a:r>
+              <a:rPr lang="zh-TW" altLang="en-US" dirty="0"/>
+              <a:t>項</a:t>
+            </a:r>
+          </a:p>
+        </p:txBody>
+      </p:sp>
+      <p:sp>
+        <p:nvSpPr>
+          <p:cNvPr id="4" name="投影片編號版面配置區 3">
+            <a:extLst>
+              <a:ext uri="{FF2B5EF4-FFF2-40B4-BE49-F238E27FC236}">
+                <a16:creationId xmlns:a16="http://schemas.microsoft.com/office/drawing/2014/main" id="{6B817C10-A040-AE67-5F3D-4B18DD095926}"/>
+              </a:ext>
+            </a:extLst>
+          </p:cNvPr>
+          <p:cNvSpPr>
+            <a:spLocks noGrp="1"/>
+          </p:cNvSpPr>
+          <p:nvPr>
+            <p:ph type="sldNum" sz="quarter" idx="10"/>
+          </p:nvPr>
+        </p:nvSpPr>
+        <p:spPr/>
+        <p:txBody>
+          <a:bodyPr/>
+          <a:lstStyle/>
+          <a:p>
+            <a:pPr marL="0" marR="0" lvl="0" indent="0" algn="r" defTabSz="1219170" rtl="0" eaLnBrk="1" fontAlgn="auto" latinLnBrk="0" hangingPunct="1">
+              <a:lnSpc>
+                <a:spcPct val="100000"/>
+              </a:lnSpc>
+              <a:spcBef>
+                <a:spcPts val="0"/>
+              </a:spcBef>
+              <a:spcAft>
+                <a:spcPts val="0"/>
+              </a:spcAft>
+              <a:buClrTx/>
+              <a:buSzTx/>
+              <a:buFontTx/>
+              <a:buNone/>
+              <a:tabLst/>
+              <a:defRPr/>
+            </a:pPr>
+            <a:fld id="{BFF380C3-7D2B-43B9-A2FF-0551F6D200CF}" type="slidenum">
+              <a:rPr kumimoji="0" lang="en-US" sz="1200" b="0" i="0" u="none" strike="noStrike" kern="1200" cap="none" spc="0" normalizeH="0" baseline="0" noProof="0" smtClean="0">
+                <a:ln>
+                  <a:noFill/>
+                </a:ln>
+                <a:solidFill>
+                  <a:prstClr val="black"/>
+                </a:solidFill>
+                <a:effectLst/>
+                <a:uLnTx/>
+                <a:uFillTx/>
+                <a:latin typeface="Calibri" panose="020F0502020204030204"/>
+                <a:ea typeface="+mn-ea"/>
+                <a:cs typeface="+mn-cs"/>
+              </a:rPr>
+              <a:pPr marL="0" marR="0" lvl="0" indent="0" algn="r" defTabSz="1219170" rtl="0" eaLnBrk="1" fontAlgn="auto" latinLnBrk="0" hangingPunct="1">
+                <a:lnSpc>
+                  <a:spcPct val="100000"/>
+                </a:lnSpc>
+                <a:spcBef>
+                  <a:spcPts val="0"/>
+                </a:spcBef>
+                <a:spcAft>
+                  <a:spcPts val="0"/>
+                </a:spcAft>
+                <a:buClrTx/>
+                <a:buSzTx/>
+                <a:buFontTx/>
+                <a:buNone/>
+                <a:tabLst/>
+                <a:defRPr/>
+              </a:pPr>
+              <a:t>4</a:t>
+            </a:fld>
+            <a:endParaRPr kumimoji="0" lang="en-US" sz="1200" b="0" i="0" u="none" strike="noStrike" kern="1200" cap="none" spc="0" normalizeH="0" baseline="0" noProof="0">
+              <a:ln>
+                <a:noFill/>
+              </a:ln>
+              <a:solidFill>
+                <a:prstClr val="black"/>
+              </a:solidFill>
+              <a:effectLst/>
+              <a:uLnTx/>
+              <a:uFillTx/>
+              <a:latin typeface="Calibri" panose="020F0502020204030204"/>
+              <a:ea typeface="+mn-ea"/>
+              <a:cs typeface="+mn-cs"/>
+            </a:endParaRPr>
+          </a:p>
+        </p:txBody>
+      </p:sp>
+    </p:spTree>
+    <p:extLst>
+      <p:ext uri="{BB962C8B-B14F-4D97-AF65-F5344CB8AC3E}">
+        <p14:creationId xmlns:p14="http://schemas.microsoft.com/office/powerpoint/2010/main" val="2666374322"/>
+      </p:ext>
+    </p:extLst>
+  </p:cSld>
+  <p:clrMapOvr>
+    <a:masterClrMapping/>
+  </p:clrMapOvr>
+</p:notes>
+</file>
+
+<file path=ppt/notesSlides/notesSlide4.xml><?xml version="1.0" encoding="utf-8"?>
 <p:notes xmlns:a="http://schemas.openxmlformats.org/drawingml/2006/main" xmlns:r="http://schemas.openxmlformats.org/officeDocument/2006/relationships" xmlns:p="http://schemas.openxmlformats.org/presentationml/2006/main">
   <p:cSld>
     <p:spTree>
@@ -779,7 +1482,7 @@
                 <a:tabLst/>
                 <a:defRPr/>
               </a:pPr>
-              <a:t>3</a:t>
+              <a:t>5</a:t>
             </a:fld>
             <a:endParaRPr kumimoji="0" lang="en-US" sz="1200" b="0" i="0" u="none" strike="noStrike" kern="1200" cap="none" spc="0" normalizeH="0" baseline="0" noProof="0">
               <a:ln>
@@ -811,7 +1514,7 @@
 </p:notes>
 </file>
 
-<file path=ppt/notesSlides/notesSlide3.xml><?xml version="1.0" encoding="utf-8"?>
+<file path=ppt/notesSlides/notesSlide5.xml><?xml version="1.0" encoding="utf-8"?>
 <p:notes xmlns:a="http://schemas.openxmlformats.org/drawingml/2006/main" xmlns:r="http://schemas.openxmlformats.org/officeDocument/2006/relationships" xmlns:p="http://schemas.openxmlformats.org/presentationml/2006/main">
   <p:cSld>
     <p:spTree>
@@ -954,7 +1657,7 @@
                 <a:tabLst/>
                 <a:defRPr/>
               </a:pPr>
-              <a:t>4</a:t>
+              <a:t>6</a:t>
             </a:fld>
             <a:endParaRPr kumimoji="0" lang="en-US" sz="1200" b="0" i="0" u="none" strike="noStrike" kern="1200" cap="none" spc="0" normalizeH="0" baseline="0" noProof="0">
               <a:ln>
@@ -986,7 +1689,7 @@
 </p:notes>
 </file>
 
-<file path=ppt/notesSlides/notesSlide4.xml><?xml version="1.0" encoding="utf-8"?>
+<file path=ppt/notesSlides/notesSlide6.xml><?xml version="1.0" encoding="utf-8"?>
 <p:notes xmlns:a="http://schemas.openxmlformats.org/drawingml/2006/main" xmlns:r="http://schemas.openxmlformats.org/officeDocument/2006/relationships" xmlns:p="http://schemas.openxmlformats.org/presentationml/2006/main">
   <p:cSld>
     <p:spTree>
@@ -1129,7 +1832,7 @@
                 <a:tabLst/>
                 <a:defRPr/>
               </a:pPr>
-              <a:t>5</a:t>
+              <a:t>7</a:t>
             </a:fld>
             <a:endParaRPr kumimoji="0" lang="en-US" sz="1200" b="0" i="0" u="none" strike="noStrike" kern="1200" cap="none" spc="0" normalizeH="0" baseline="0" noProof="0">
               <a:ln>
@@ -1161,7 +1864,7 @@
 </p:notes>
 </file>
 
-<file path=ppt/notesSlides/notesSlide5.xml><?xml version="1.0" encoding="utf-8"?>
+<file path=ppt/notesSlides/notesSlide7.xml><?xml version="1.0" encoding="utf-8"?>
 <p:notes xmlns:a="http://schemas.openxmlformats.org/drawingml/2006/main" xmlns:r="http://schemas.openxmlformats.org/officeDocument/2006/relationships" xmlns:p="http://schemas.openxmlformats.org/presentationml/2006/main">
   <p:cSld>
     <p:spTree>
@@ -1304,7 +2007,7 @@
                 <a:tabLst/>
                 <a:defRPr/>
               </a:pPr>
-              <a:t>6</a:t>
+              <a:t>8</a:t>
             </a:fld>
             <a:endParaRPr kumimoji="0" lang="en-US" sz="1200" b="0" i="0" u="none" strike="noStrike" kern="1200" cap="none" spc="0" normalizeH="0" baseline="0" noProof="0">
               <a:ln>
@@ -1336,7 +2039,182 @@
 </p:notes>
 </file>
 
-<file path=ppt/notesSlides/notesSlide6.xml><?xml version="1.0" encoding="utf-8"?>
+<file path=ppt/notesSlides/notesSlide8.xml><?xml version="1.0" encoding="utf-8"?>
+<p:notes xmlns:a="http://schemas.openxmlformats.org/drawingml/2006/main" xmlns:r="http://schemas.openxmlformats.org/officeDocument/2006/relationships" xmlns:p="http://schemas.openxmlformats.org/presentationml/2006/main">
+  <p:cSld>
+    <p:spTree>
+      <p:nvGrpSpPr>
+        <p:cNvPr id="1" name="">
+          <a:extLst>
+            <a:ext uri="{FF2B5EF4-FFF2-40B4-BE49-F238E27FC236}">
+              <a16:creationId xmlns:a16="http://schemas.microsoft.com/office/drawing/2014/main" id="{914306BC-2CE5-80CA-3E11-A65B34D5C336}"/>
+            </a:ext>
+          </a:extLst>
+        </p:cNvPr>
+        <p:cNvGrpSpPr/>
+        <p:nvPr/>
+      </p:nvGrpSpPr>
+      <p:grpSpPr>
+        <a:xfrm>
+          <a:off x="0" y="0"/>
+          <a:ext cx="0" cy="0"/>
+          <a:chOff x="0" y="0"/>
+          <a:chExt cx="0" cy="0"/>
+        </a:xfrm>
+      </p:grpSpPr>
+      <p:sp>
+        <p:nvSpPr>
+          <p:cNvPr id="2" name="投影片圖像版面配置區 1">
+            <a:extLst>
+              <a:ext uri="{FF2B5EF4-FFF2-40B4-BE49-F238E27FC236}">
+                <a16:creationId xmlns:a16="http://schemas.microsoft.com/office/drawing/2014/main" id="{4E92581C-2ADB-20AD-CAC6-F6B14C80167B}"/>
+              </a:ext>
+            </a:extLst>
+          </p:cNvPr>
+          <p:cNvSpPr>
+            <a:spLocks noGrp="1" noRot="1" noChangeAspect="1"/>
+          </p:cNvSpPr>
+          <p:nvPr>
+            <p:ph type="sldImg"/>
+          </p:nvPr>
+        </p:nvSpPr>
+        <p:spPr/>
+      </p:sp>
+      <p:sp>
+        <p:nvSpPr>
+          <p:cNvPr id="3" name="備忘稿版面配置區 2">
+            <a:extLst>
+              <a:ext uri="{FF2B5EF4-FFF2-40B4-BE49-F238E27FC236}">
+                <a16:creationId xmlns:a16="http://schemas.microsoft.com/office/drawing/2014/main" id="{E73DB2EA-7503-A1CD-B4DF-3772867DC22B}"/>
+              </a:ext>
+            </a:extLst>
+          </p:cNvPr>
+          <p:cNvSpPr>
+            <a:spLocks noGrp="1"/>
+          </p:cNvSpPr>
+          <p:nvPr>
+            <p:ph type="body" idx="1"/>
+          </p:nvPr>
+        </p:nvSpPr>
+        <p:spPr/>
+        <p:txBody>
+          <a:bodyPr/>
+          <a:lstStyle/>
+          <a:p>
+            <a:r>
+              <a:rPr lang="en-US" altLang="zh-TW" dirty="0"/>
+              <a:t>30</a:t>
+            </a:r>
+            <a:r>
+              <a:rPr lang="zh-TW" altLang="en-US" dirty="0"/>
+              <a:t>項</a:t>
+            </a:r>
+          </a:p>
+        </p:txBody>
+      </p:sp>
+      <p:sp>
+        <p:nvSpPr>
+          <p:cNvPr id="4" name="投影片編號版面配置區 3">
+            <a:extLst>
+              <a:ext uri="{FF2B5EF4-FFF2-40B4-BE49-F238E27FC236}">
+                <a16:creationId xmlns:a16="http://schemas.microsoft.com/office/drawing/2014/main" id="{3450EF08-B09F-292E-FFAB-BDEB4A27979A}"/>
+              </a:ext>
+            </a:extLst>
+          </p:cNvPr>
+          <p:cNvSpPr>
+            <a:spLocks noGrp="1"/>
+          </p:cNvSpPr>
+          <p:nvPr>
+            <p:ph type="sldNum" sz="quarter" idx="10"/>
+          </p:nvPr>
+        </p:nvSpPr>
+        <p:spPr/>
+        <p:txBody>
+          <a:bodyPr/>
+          <a:lstStyle/>
+          <a:p>
+            <a:pPr marL="0" marR="0" lvl="0" indent="0" algn="r" defTabSz="1219170" rtl="0" eaLnBrk="1" fontAlgn="auto" latinLnBrk="0" hangingPunct="1">
+              <a:lnSpc>
+                <a:spcPct val="100000"/>
+              </a:lnSpc>
+              <a:spcBef>
+                <a:spcPts val="0"/>
+              </a:spcBef>
+              <a:spcAft>
+                <a:spcPts val="0"/>
+              </a:spcAft>
+              <a:buClrTx/>
+              <a:buSzTx/>
+              <a:buFontTx/>
+              <a:buNone/>
+              <a:tabLst/>
+              <a:defRPr/>
+            </a:pPr>
+            <a:fld id="{BFF380C3-7D2B-43B9-A2FF-0551F6D200CF}" type="slidenum">
+              <a:rPr kumimoji="0" lang="en-US" sz="1200" b="0" i="0" u="none" strike="noStrike" kern="1200" cap="none" spc="0" normalizeH="0" baseline="0" noProof="0" smtClean="0">
+                <a:ln>
+                  <a:noFill/>
+                </a:ln>
+                <a:solidFill>
+                  <a:prstClr val="black"/>
+                </a:solidFill>
+                <a:effectLst/>
+                <a:uLnTx/>
+                <a:uFillTx/>
+                <a:latin typeface="Calibri" panose="020F0502020204030204"/>
+                <a:ea typeface="+mn-ea"/>
+                <a:cs typeface="+mn-cs"/>
+              </a:rPr>
+              <a:pPr marL="0" marR="0" lvl="0" indent="0" algn="r" defTabSz="1219170" rtl="0" eaLnBrk="1" fontAlgn="auto" latinLnBrk="0" hangingPunct="1">
+                <a:lnSpc>
+                  <a:spcPct val="100000"/>
+                </a:lnSpc>
+                <a:spcBef>
+                  <a:spcPts val="0"/>
+                </a:spcBef>
+                <a:spcAft>
+                  <a:spcPts val="0"/>
+                </a:spcAft>
+                <a:buClrTx/>
+                <a:buSzTx/>
+                <a:buFontTx/>
+                <a:buNone/>
+                <a:tabLst/>
+                <a:defRPr/>
+              </a:pPr>
+              <a:t>9</a:t>
+            </a:fld>
+            <a:endParaRPr kumimoji="0" lang="en-US" sz="1200" b="0" i="0" u="none" strike="noStrike" kern="1200" cap="none" spc="0" normalizeH="0" baseline="0" noProof="0">
+              <a:ln>
+                <a:noFill/>
+              </a:ln>
+              <a:solidFill>
+                <a:prstClr val="black"/>
+              </a:solidFill>
+              <a:effectLst/>
+              <a:uLnTx/>
+              <a:uFillTx/>
+              <a:latin typeface="Calibri" panose="020F0502020204030204"/>
+              <a:ea typeface="+mn-ea"/>
+              <a:cs typeface="+mn-cs"/>
+            </a:endParaRPr>
+          </a:p>
+        </p:txBody>
+      </p:sp>
+    </p:spTree>
+    <p:extLst>
+      <p:ext uri="{BB962C8B-B14F-4D97-AF65-F5344CB8AC3E}">
+        <p14:creationId xmlns:p14="http://schemas.microsoft.com/office/powerpoint/2010/main" val="2257298792"/>
+      </p:ext>
+    </p:extLst>
+  </p:cSld>
+  <p:clrMapOvr>
+    <a:masterClrMapping/>
+  </p:clrMapOvr>
+</p:notes>
+</file>
+
+<file path=ppt/notesSlides/notesSlide9.xml><?xml version="1.0" encoding="utf-8"?>
 <p:notes xmlns:a="http://schemas.openxmlformats.org/drawingml/2006/main" xmlns:r="http://schemas.openxmlformats.org/officeDocument/2006/relationships" xmlns:p="http://schemas.openxmlformats.org/presentationml/2006/main">
   <p:cSld>
     <p:spTree>
@@ -1479,7 +2357,7 @@
                 <a:tabLst/>
                 <a:defRPr/>
               </a:pPr>
-              <a:t>7</a:t>
+              <a:t>10</a:t>
             </a:fld>
             <a:endParaRPr kumimoji="0" lang="en-US" sz="1200" b="0" i="0" u="none" strike="noStrike" kern="1200" cap="none" spc="0" normalizeH="0" baseline="0" noProof="0">
               <a:ln>
@@ -1502,356 +2380,6 @@
     <p:extLst>
       <p:ext uri="{BB962C8B-B14F-4D97-AF65-F5344CB8AC3E}">
         <p14:creationId xmlns:p14="http://schemas.microsoft.com/office/powerpoint/2010/main" val="3968230283"/>
-      </p:ext>
-    </p:extLst>
-  </p:cSld>
-  <p:clrMapOvr>
-    <a:masterClrMapping/>
-  </p:clrMapOvr>
-</p:notes>
-</file>
-
-<file path=ppt/notesSlides/notesSlide7.xml><?xml version="1.0" encoding="utf-8"?>
-<p:notes xmlns:a="http://schemas.openxmlformats.org/drawingml/2006/main" xmlns:r="http://schemas.openxmlformats.org/officeDocument/2006/relationships" xmlns:p="http://schemas.openxmlformats.org/presentationml/2006/main">
-  <p:cSld>
-    <p:spTree>
-      <p:nvGrpSpPr>
-        <p:cNvPr id="1" name="">
-          <a:extLst>
-            <a:ext uri="{FF2B5EF4-FFF2-40B4-BE49-F238E27FC236}">
-              <a16:creationId xmlns:a16="http://schemas.microsoft.com/office/drawing/2014/main" id="{7411B0E2-9DAD-B6EE-90DC-405AE9E420E8}"/>
-            </a:ext>
-          </a:extLst>
-        </p:cNvPr>
-        <p:cNvGrpSpPr/>
-        <p:nvPr/>
-      </p:nvGrpSpPr>
-      <p:grpSpPr>
-        <a:xfrm>
-          <a:off x="0" y="0"/>
-          <a:ext cx="0" cy="0"/>
-          <a:chOff x="0" y="0"/>
-          <a:chExt cx="0" cy="0"/>
-        </a:xfrm>
-      </p:grpSpPr>
-      <p:sp>
-        <p:nvSpPr>
-          <p:cNvPr id="2" name="投影片圖像版面配置區 1">
-            <a:extLst>
-              <a:ext uri="{FF2B5EF4-FFF2-40B4-BE49-F238E27FC236}">
-                <a16:creationId xmlns:a16="http://schemas.microsoft.com/office/drawing/2014/main" id="{9B198BAC-021C-C0B8-F7CE-57CC31AD206B}"/>
-              </a:ext>
-            </a:extLst>
-          </p:cNvPr>
-          <p:cNvSpPr>
-            <a:spLocks noGrp="1" noRot="1" noChangeAspect="1"/>
-          </p:cNvSpPr>
-          <p:nvPr>
-            <p:ph type="sldImg"/>
-          </p:nvPr>
-        </p:nvSpPr>
-        <p:spPr/>
-      </p:sp>
-      <p:sp>
-        <p:nvSpPr>
-          <p:cNvPr id="3" name="備忘稿版面配置區 2">
-            <a:extLst>
-              <a:ext uri="{FF2B5EF4-FFF2-40B4-BE49-F238E27FC236}">
-                <a16:creationId xmlns:a16="http://schemas.microsoft.com/office/drawing/2014/main" id="{BD6B908B-EB18-6544-A5D3-A637663E432D}"/>
-              </a:ext>
-            </a:extLst>
-          </p:cNvPr>
-          <p:cNvSpPr>
-            <a:spLocks noGrp="1"/>
-          </p:cNvSpPr>
-          <p:nvPr>
-            <p:ph type="body" idx="1"/>
-          </p:nvPr>
-        </p:nvSpPr>
-        <p:spPr/>
-        <p:txBody>
-          <a:bodyPr/>
-          <a:lstStyle/>
-          <a:p>
-            <a:r>
-              <a:rPr lang="en-US" altLang="zh-TW" dirty="0"/>
-              <a:t>30</a:t>
-            </a:r>
-            <a:r>
-              <a:rPr lang="zh-TW" altLang="en-US" dirty="0"/>
-              <a:t>項</a:t>
-            </a:r>
-          </a:p>
-        </p:txBody>
-      </p:sp>
-      <p:sp>
-        <p:nvSpPr>
-          <p:cNvPr id="4" name="投影片編號版面配置區 3">
-            <a:extLst>
-              <a:ext uri="{FF2B5EF4-FFF2-40B4-BE49-F238E27FC236}">
-                <a16:creationId xmlns:a16="http://schemas.microsoft.com/office/drawing/2014/main" id="{A22293A4-C3DA-4124-0C26-385BD6ED7EC0}"/>
-              </a:ext>
-            </a:extLst>
-          </p:cNvPr>
-          <p:cNvSpPr>
-            <a:spLocks noGrp="1"/>
-          </p:cNvSpPr>
-          <p:nvPr>
-            <p:ph type="sldNum" sz="quarter" idx="10"/>
-          </p:nvPr>
-        </p:nvSpPr>
-        <p:spPr/>
-        <p:txBody>
-          <a:bodyPr/>
-          <a:lstStyle/>
-          <a:p>
-            <a:pPr marL="0" marR="0" lvl="0" indent="0" algn="r" defTabSz="1219170" rtl="0" eaLnBrk="1" fontAlgn="auto" latinLnBrk="0" hangingPunct="1">
-              <a:lnSpc>
-                <a:spcPct val="100000"/>
-              </a:lnSpc>
-              <a:spcBef>
-                <a:spcPts val="0"/>
-              </a:spcBef>
-              <a:spcAft>
-                <a:spcPts val="0"/>
-              </a:spcAft>
-              <a:buClrTx/>
-              <a:buSzTx/>
-              <a:buFontTx/>
-              <a:buNone/>
-              <a:tabLst/>
-              <a:defRPr/>
-            </a:pPr>
-            <a:fld id="{BFF380C3-7D2B-43B9-A2FF-0551F6D200CF}" type="slidenum">
-              <a:rPr kumimoji="0" lang="en-US" sz="1200" b="0" i="0" u="none" strike="noStrike" kern="1200" cap="none" spc="0" normalizeH="0" baseline="0" noProof="0" smtClean="0">
-                <a:ln>
-                  <a:noFill/>
-                </a:ln>
-                <a:solidFill>
-                  <a:prstClr val="black"/>
-                </a:solidFill>
-                <a:effectLst/>
-                <a:uLnTx/>
-                <a:uFillTx/>
-                <a:latin typeface="Calibri" panose="020F0502020204030204"/>
-                <a:ea typeface="+mn-ea"/>
-                <a:cs typeface="+mn-cs"/>
-              </a:rPr>
-              <a:pPr marL="0" marR="0" lvl="0" indent="0" algn="r" defTabSz="1219170" rtl="0" eaLnBrk="1" fontAlgn="auto" latinLnBrk="0" hangingPunct="1">
-                <a:lnSpc>
-                  <a:spcPct val="100000"/>
-                </a:lnSpc>
-                <a:spcBef>
-                  <a:spcPts val="0"/>
-                </a:spcBef>
-                <a:spcAft>
-                  <a:spcPts val="0"/>
-                </a:spcAft>
-                <a:buClrTx/>
-                <a:buSzTx/>
-                <a:buFontTx/>
-                <a:buNone/>
-                <a:tabLst/>
-                <a:defRPr/>
-              </a:pPr>
-              <a:t>8</a:t>
-            </a:fld>
-            <a:endParaRPr kumimoji="0" lang="en-US" sz="1200" b="0" i="0" u="none" strike="noStrike" kern="1200" cap="none" spc="0" normalizeH="0" baseline="0" noProof="0">
-              <a:ln>
-                <a:noFill/>
-              </a:ln>
-              <a:solidFill>
-                <a:prstClr val="black"/>
-              </a:solidFill>
-              <a:effectLst/>
-              <a:uLnTx/>
-              <a:uFillTx/>
-              <a:latin typeface="Calibri" panose="020F0502020204030204"/>
-              <a:ea typeface="+mn-ea"/>
-              <a:cs typeface="+mn-cs"/>
-            </a:endParaRPr>
-          </a:p>
-        </p:txBody>
-      </p:sp>
-    </p:spTree>
-    <p:extLst>
-      <p:ext uri="{BB962C8B-B14F-4D97-AF65-F5344CB8AC3E}">
-        <p14:creationId xmlns:p14="http://schemas.microsoft.com/office/powerpoint/2010/main" val="1244657598"/>
-      </p:ext>
-    </p:extLst>
-  </p:cSld>
-  <p:clrMapOvr>
-    <a:masterClrMapping/>
-  </p:clrMapOvr>
-</p:notes>
-</file>
-
-<file path=ppt/notesSlides/notesSlide8.xml><?xml version="1.0" encoding="utf-8"?>
-<p:notes xmlns:a="http://schemas.openxmlformats.org/drawingml/2006/main" xmlns:r="http://schemas.openxmlformats.org/officeDocument/2006/relationships" xmlns:p="http://schemas.openxmlformats.org/presentationml/2006/main">
-  <p:cSld>
-    <p:spTree>
-      <p:nvGrpSpPr>
-        <p:cNvPr id="1" name="">
-          <a:extLst>
-            <a:ext uri="{FF2B5EF4-FFF2-40B4-BE49-F238E27FC236}">
-              <a16:creationId xmlns:a16="http://schemas.microsoft.com/office/drawing/2014/main" id="{948BE4CF-676B-A695-B6E5-994869753393}"/>
-            </a:ext>
-          </a:extLst>
-        </p:cNvPr>
-        <p:cNvGrpSpPr/>
-        <p:nvPr/>
-      </p:nvGrpSpPr>
-      <p:grpSpPr>
-        <a:xfrm>
-          <a:off x="0" y="0"/>
-          <a:ext cx="0" cy="0"/>
-          <a:chOff x="0" y="0"/>
-          <a:chExt cx="0" cy="0"/>
-        </a:xfrm>
-      </p:grpSpPr>
-      <p:sp>
-        <p:nvSpPr>
-          <p:cNvPr id="2" name="投影片圖像版面配置區 1">
-            <a:extLst>
-              <a:ext uri="{FF2B5EF4-FFF2-40B4-BE49-F238E27FC236}">
-                <a16:creationId xmlns:a16="http://schemas.microsoft.com/office/drawing/2014/main" id="{4A148959-A56A-B121-9AAC-8FE302D1F875}"/>
-              </a:ext>
-            </a:extLst>
-          </p:cNvPr>
-          <p:cNvSpPr>
-            <a:spLocks noGrp="1" noRot="1" noChangeAspect="1"/>
-          </p:cNvSpPr>
-          <p:nvPr>
-            <p:ph type="sldImg"/>
-          </p:nvPr>
-        </p:nvSpPr>
-        <p:spPr/>
-      </p:sp>
-      <p:sp>
-        <p:nvSpPr>
-          <p:cNvPr id="3" name="備忘稿版面配置區 2">
-            <a:extLst>
-              <a:ext uri="{FF2B5EF4-FFF2-40B4-BE49-F238E27FC236}">
-                <a16:creationId xmlns:a16="http://schemas.microsoft.com/office/drawing/2014/main" id="{63944723-52DC-7FD4-7D5D-68A52C4E51E6}"/>
-              </a:ext>
-            </a:extLst>
-          </p:cNvPr>
-          <p:cNvSpPr>
-            <a:spLocks noGrp="1"/>
-          </p:cNvSpPr>
-          <p:nvPr>
-            <p:ph type="body" idx="1"/>
-          </p:nvPr>
-        </p:nvSpPr>
-        <p:spPr/>
-        <p:txBody>
-          <a:bodyPr/>
-          <a:lstStyle/>
-          <a:p>
-            <a:r>
-              <a:rPr lang="en-US" altLang="zh-TW" dirty="0"/>
-              <a:t>30</a:t>
-            </a:r>
-            <a:r>
-              <a:rPr lang="zh-TW" altLang="en-US" dirty="0"/>
-              <a:t>項</a:t>
-            </a:r>
-          </a:p>
-        </p:txBody>
-      </p:sp>
-      <p:sp>
-        <p:nvSpPr>
-          <p:cNvPr id="4" name="投影片編號版面配置區 3">
-            <a:extLst>
-              <a:ext uri="{FF2B5EF4-FFF2-40B4-BE49-F238E27FC236}">
-                <a16:creationId xmlns:a16="http://schemas.microsoft.com/office/drawing/2014/main" id="{EA68918A-705E-C659-ED2E-9591C6709212}"/>
-              </a:ext>
-            </a:extLst>
-          </p:cNvPr>
-          <p:cNvSpPr>
-            <a:spLocks noGrp="1"/>
-          </p:cNvSpPr>
-          <p:nvPr>
-            <p:ph type="sldNum" sz="quarter" idx="10"/>
-          </p:nvPr>
-        </p:nvSpPr>
-        <p:spPr/>
-        <p:txBody>
-          <a:bodyPr/>
-          <a:lstStyle/>
-          <a:p>
-            <a:pPr marL="0" marR="0" lvl="0" indent="0" algn="r" defTabSz="1219170" rtl="0" eaLnBrk="1" fontAlgn="auto" latinLnBrk="0" hangingPunct="1">
-              <a:lnSpc>
-                <a:spcPct val="100000"/>
-              </a:lnSpc>
-              <a:spcBef>
-                <a:spcPts val="0"/>
-              </a:spcBef>
-              <a:spcAft>
-                <a:spcPts val="0"/>
-              </a:spcAft>
-              <a:buClrTx/>
-              <a:buSzTx/>
-              <a:buFontTx/>
-              <a:buNone/>
-              <a:tabLst/>
-              <a:defRPr/>
-            </a:pPr>
-            <a:fld id="{BFF380C3-7D2B-43B9-A2FF-0551F6D200CF}" type="slidenum">
-              <a:rPr kumimoji="0" lang="en-US" sz="1200" b="0" i="0" u="none" strike="noStrike" kern="1200" cap="none" spc="0" normalizeH="0" baseline="0" noProof="0" smtClean="0">
-                <a:ln>
-                  <a:noFill/>
-                </a:ln>
-                <a:solidFill>
-                  <a:prstClr val="black"/>
-                </a:solidFill>
-                <a:effectLst/>
-                <a:uLnTx/>
-                <a:uFillTx/>
-                <a:latin typeface="Calibri" panose="020F0502020204030204"/>
-                <a:ea typeface="+mn-ea"/>
-                <a:cs typeface="+mn-cs"/>
-              </a:rPr>
-              <a:pPr marL="0" marR="0" lvl="0" indent="0" algn="r" defTabSz="1219170" rtl="0" eaLnBrk="1" fontAlgn="auto" latinLnBrk="0" hangingPunct="1">
-                <a:lnSpc>
-                  <a:spcPct val="100000"/>
-                </a:lnSpc>
-                <a:spcBef>
-                  <a:spcPts val="0"/>
-                </a:spcBef>
-                <a:spcAft>
-                  <a:spcPts val="0"/>
-                </a:spcAft>
-                <a:buClrTx/>
-                <a:buSzTx/>
-                <a:buFontTx/>
-                <a:buNone/>
-                <a:tabLst/>
-                <a:defRPr/>
-              </a:pPr>
-              <a:t>9</a:t>
-            </a:fld>
-            <a:endParaRPr kumimoji="0" lang="en-US" sz="1200" b="0" i="0" u="none" strike="noStrike" kern="1200" cap="none" spc="0" normalizeH="0" baseline="0" noProof="0">
-              <a:ln>
-                <a:noFill/>
-              </a:ln>
-              <a:solidFill>
-                <a:prstClr val="black"/>
-              </a:solidFill>
-              <a:effectLst/>
-              <a:uLnTx/>
-              <a:uFillTx/>
-              <a:latin typeface="Calibri" panose="020F0502020204030204"/>
-              <a:ea typeface="+mn-ea"/>
-              <a:cs typeface="+mn-cs"/>
-            </a:endParaRPr>
-          </a:p>
-        </p:txBody>
-      </p:sp>
-    </p:spTree>
-    <p:extLst>
-      <p:ext uri="{BB962C8B-B14F-4D97-AF65-F5344CB8AC3E}">
-        <p14:creationId xmlns:p14="http://schemas.microsoft.com/office/powerpoint/2010/main" val="1638200618"/>
       </p:ext>
     </p:extLst>
   </p:cSld>
@@ -7350,7 +7878,7 @@
             </a:r>
             <a:r>
               <a:rPr lang="en-US" altLang="zh-TW" sz="1800" b="1" dirty="0"/>
-              <a:t>: 12.03.2026</a:t>
+              <a:t>: 16.03.2026</a:t>
             </a:r>
           </a:p>
         </p:txBody>
@@ -7428,6 +7956,1715 @@
 </file>
 
 <file path=ppt/slides/slide10.xml><?xml version="1.0" encoding="utf-8"?>
+<p:sld xmlns:a="http://schemas.openxmlformats.org/drawingml/2006/main" xmlns:r="http://schemas.openxmlformats.org/officeDocument/2006/relationships" xmlns:p="http://schemas.openxmlformats.org/presentationml/2006/main">
+  <p:cSld>
+    <p:spTree>
+      <p:nvGrpSpPr>
+        <p:cNvPr id="1" name="">
+          <a:extLst>
+            <a:ext uri="{FF2B5EF4-FFF2-40B4-BE49-F238E27FC236}">
+              <a16:creationId xmlns:a16="http://schemas.microsoft.com/office/drawing/2014/main" id="{888CCBA7-0506-C670-1535-B08FD3DB7191}"/>
+            </a:ext>
+          </a:extLst>
+        </p:cNvPr>
+        <p:cNvGrpSpPr/>
+        <p:nvPr/>
+      </p:nvGrpSpPr>
+      <p:grpSpPr>
+        <a:xfrm>
+          <a:off x="0" y="0"/>
+          <a:ext cx="0" cy="0"/>
+          <a:chOff x="0" y="0"/>
+          <a:chExt cx="0" cy="0"/>
+        </a:xfrm>
+      </p:grpSpPr>
+      <p:sp>
+        <p:nvSpPr>
+          <p:cNvPr id="3" name="標題 2">
+            <a:extLst>
+              <a:ext uri="{FF2B5EF4-FFF2-40B4-BE49-F238E27FC236}">
+                <a16:creationId xmlns:a16="http://schemas.microsoft.com/office/drawing/2014/main" id="{28074E02-8E7D-C833-0BFF-C2993072FFA4}"/>
+              </a:ext>
+            </a:extLst>
+          </p:cNvPr>
+          <p:cNvSpPr>
+            <a:spLocks noGrp="1"/>
+          </p:cNvSpPr>
+          <p:nvPr>
+            <p:ph type="title"/>
+          </p:nvPr>
+        </p:nvSpPr>
+        <p:spPr>
+          <a:xfrm>
+            <a:off x="319892" y="107816"/>
+            <a:ext cx="11379200" cy="461659"/>
+          </a:xfrm>
+        </p:spPr>
+        <p:txBody>
+          <a:bodyPr>
+            <a:noAutofit/>
+          </a:bodyPr>
+          <a:lstStyle/>
+          <a:p>
+            <a:r>
+              <a:rPr lang="de-DE" altLang="zh-TW" sz="2800" dirty="0"/>
+              <a:t>Materialstamm verwalten (Material Master) - Nur Level 1 &amp; 2</a:t>
+            </a:r>
+            <a:endParaRPr lang="en-US" altLang="zh-TW" sz="2800" dirty="0"/>
+          </a:p>
+        </p:txBody>
+      </p:sp>
+      <p:sp>
+        <p:nvSpPr>
+          <p:cNvPr id="53" name="標題 2">
+            <a:extLst>
+              <a:ext uri="{FF2B5EF4-FFF2-40B4-BE49-F238E27FC236}">
+                <a16:creationId xmlns:a16="http://schemas.microsoft.com/office/drawing/2014/main" id="{DD32D693-B9CD-C627-7DB5-BC71BD85CCD9}"/>
+              </a:ext>
+            </a:extLst>
+          </p:cNvPr>
+          <p:cNvSpPr txBox="1">
+            <a:spLocks/>
+          </p:cNvSpPr>
+          <p:nvPr/>
+        </p:nvSpPr>
+        <p:spPr>
+          <a:xfrm>
+            <a:off x="217952" y="1303990"/>
+            <a:ext cx="5511319" cy="461659"/>
+          </a:xfrm>
+          <a:prstGeom prst="rect">
+            <a:avLst/>
+          </a:prstGeom>
+        </p:spPr>
+        <p:txBody>
+          <a:bodyPr vert="horz" lIns="0" tIns="45720" rIns="0" bIns="45720" rtlCol="0" anchor="t">
+            <a:noAutofit/>
+          </a:bodyPr>
+          <a:lstStyle>
+            <a:lvl1pPr algn="ctr" defTabSz="685783" rtl="0" eaLnBrk="1" latinLnBrk="0" hangingPunct="1">
+              <a:lnSpc>
+                <a:spcPct val="90000"/>
+              </a:lnSpc>
+              <a:spcBef>
+                <a:spcPct val="0"/>
+              </a:spcBef>
+              <a:buNone/>
+              <a:defRPr sz="2400" b="1" kern="1200">
+                <a:solidFill>
+                  <a:schemeClr val="tx2"/>
+                </a:solidFill>
+                <a:latin typeface="+mj-lt"/>
+                <a:ea typeface="+mj-ea"/>
+                <a:cs typeface="+mj-cs"/>
+              </a:defRPr>
+            </a:lvl1pPr>
+          </a:lstStyle>
+          <a:p>
+            <a:pPr algn="l"/>
+            <a:r>
+              <a:rPr lang="en-US" altLang="zh-TW" sz="1800" dirty="0">
+                <a:solidFill>
+                  <a:srgbClr val="0000FF"/>
+                </a:solidFill>
+              </a:rPr>
+              <a:t>1. Material </a:t>
+            </a:r>
+            <a:r>
+              <a:rPr lang="en-US" altLang="zh-TW" sz="1800" dirty="0" err="1">
+                <a:solidFill>
+                  <a:srgbClr val="0000FF"/>
+                </a:solidFill>
+              </a:rPr>
+              <a:t>bearbeiten</a:t>
+            </a:r>
+            <a:r>
+              <a:rPr lang="en-US" altLang="zh-TW" sz="1800" dirty="0">
+                <a:solidFill>
+                  <a:srgbClr val="0000FF"/>
+                </a:solidFill>
+              </a:rPr>
+              <a:t> / </a:t>
+            </a:r>
+            <a:r>
+              <a:rPr lang="en-US" altLang="zh-TW" sz="1800" dirty="0" err="1">
+                <a:solidFill>
+                  <a:srgbClr val="0000FF"/>
+                </a:solidFill>
+              </a:rPr>
+              <a:t>löschen</a:t>
+            </a:r>
+            <a:endParaRPr lang="zh-TW" altLang="en-US" sz="1800" dirty="0">
+              <a:solidFill>
+                <a:srgbClr val="0000FF"/>
+              </a:solidFill>
+            </a:endParaRPr>
+          </a:p>
+        </p:txBody>
+      </p:sp>
+      <p:sp>
+        <p:nvSpPr>
+          <p:cNvPr id="22" name="標題 2">
+            <a:extLst>
+              <a:ext uri="{FF2B5EF4-FFF2-40B4-BE49-F238E27FC236}">
+                <a16:creationId xmlns:a16="http://schemas.microsoft.com/office/drawing/2014/main" id="{537198B6-A9EA-3949-A249-B7B54A2D2385}"/>
+              </a:ext>
+            </a:extLst>
+          </p:cNvPr>
+          <p:cNvSpPr txBox="1">
+            <a:spLocks/>
+          </p:cNvSpPr>
+          <p:nvPr/>
+        </p:nvSpPr>
+        <p:spPr>
+          <a:xfrm>
+            <a:off x="537040" y="1765649"/>
+            <a:ext cx="8361864" cy="3523796"/>
+          </a:xfrm>
+          <a:prstGeom prst="rect">
+            <a:avLst/>
+          </a:prstGeom>
+        </p:spPr>
+        <p:txBody>
+          <a:bodyPr vert="horz" lIns="0" tIns="45720" rIns="0" bIns="45720" rtlCol="0" anchor="t">
+            <a:noAutofit/>
+          </a:bodyPr>
+          <a:lstStyle>
+            <a:lvl1pPr algn="ctr" defTabSz="685783" rtl="0" eaLnBrk="1" latinLnBrk="0" hangingPunct="1">
+              <a:lnSpc>
+                <a:spcPct val="90000"/>
+              </a:lnSpc>
+              <a:spcBef>
+                <a:spcPct val="0"/>
+              </a:spcBef>
+              <a:buNone/>
+              <a:defRPr sz="2400" b="1" kern="1200">
+                <a:solidFill>
+                  <a:schemeClr val="tx2"/>
+                </a:solidFill>
+                <a:latin typeface="+mj-lt"/>
+                <a:ea typeface="+mj-ea"/>
+                <a:cs typeface="+mj-cs"/>
+              </a:defRPr>
+            </a:lvl1pPr>
+          </a:lstStyle>
+          <a:p>
+            <a:pPr marL="342900" indent="-342900" algn="l">
+              <a:buFont typeface="+mj-lt"/>
+              <a:buAutoNum type="arabicPeriod"/>
+            </a:pPr>
+            <a:r>
+              <a:rPr lang="de-DE" altLang="zh-TW" sz="1800" dirty="0">
+                <a:solidFill>
+                  <a:srgbClr val="002060"/>
+                </a:solidFill>
+              </a:rPr>
+              <a:t>Teilenummer: Kann nicht mehr geändert werden. </a:t>
+            </a:r>
+          </a:p>
+          <a:p>
+            <a:pPr marL="342900" indent="-342900" algn="l">
+              <a:buFont typeface="+mj-lt"/>
+              <a:buAutoNum type="arabicPeriod"/>
+            </a:pPr>
+            <a:r>
+              <a:rPr lang="de-DE" altLang="zh-TW" sz="1800" dirty="0">
+                <a:solidFill>
+                  <a:srgbClr val="002060"/>
+                </a:solidFill>
+              </a:rPr>
+              <a:t>Name: Benutzerdefinierter Name. </a:t>
+            </a:r>
+          </a:p>
+          <a:p>
+            <a:pPr marL="342900" indent="-342900" algn="l">
+              <a:buFont typeface="+mj-lt"/>
+              <a:buAutoNum type="arabicPeriod"/>
+            </a:pPr>
+            <a:r>
+              <a:rPr lang="de-DE" altLang="zh-TW" sz="1800" dirty="0">
+                <a:solidFill>
+                  <a:srgbClr val="002060"/>
+                </a:solidFill>
+              </a:rPr>
+              <a:t>Spezifikation: Benutzerdefinierte Beschreibung. </a:t>
+            </a:r>
+          </a:p>
+          <a:p>
+            <a:pPr marL="342900" indent="-342900" algn="l">
+              <a:buFont typeface="+mj-lt"/>
+              <a:buAutoNum type="arabicPeriod"/>
+            </a:pPr>
+            <a:r>
+              <a:rPr lang="de-DE" altLang="zh-TW" sz="1800" dirty="0">
+                <a:solidFill>
+                  <a:srgbClr val="002060"/>
+                </a:solidFill>
+              </a:rPr>
+              <a:t>Sicherheitsbestand: Legt die Mindestsicherheitsmenge für dieses Teil fest.</a:t>
+            </a:r>
+          </a:p>
+          <a:p>
+            <a:pPr marL="342900" indent="-342900" algn="l">
+              <a:buFont typeface="+mj-lt"/>
+              <a:buAutoNum type="arabicPeriod"/>
+            </a:pPr>
+            <a:r>
+              <a:rPr lang="de-DE" altLang="zh-TW" sz="1800" dirty="0">
+                <a:solidFill>
+                  <a:srgbClr val="002060"/>
+                </a:solidFill>
+              </a:rPr>
+              <a:t>Lieferzeit (Tage): Legt die Anzahl der Tage für die Wiederbeschaffung fest.</a:t>
+            </a:r>
+          </a:p>
+          <a:p>
+            <a:pPr marL="342900" indent="-342900" algn="l">
+              <a:buFont typeface="+mj-lt"/>
+              <a:buAutoNum type="arabicPeriod"/>
+            </a:pPr>
+            <a:r>
+              <a:rPr lang="de-DE" altLang="zh-TW" sz="1800" dirty="0">
+                <a:solidFill>
+                  <a:srgbClr val="002060"/>
+                </a:solidFill>
+              </a:rPr>
+              <a:t>Lieferant: Name des Lieferanten. </a:t>
+            </a:r>
+          </a:p>
+          <a:p>
+            <a:pPr marL="342900" indent="-342900" algn="l">
+              <a:buFont typeface="+mj-lt"/>
+              <a:buAutoNum type="arabicPeriod"/>
+            </a:pPr>
+            <a:r>
+              <a:rPr lang="de-DE" altLang="zh-TW" sz="1800" dirty="0">
+                <a:solidFill>
+                  <a:srgbClr val="002060"/>
+                </a:solidFill>
+              </a:rPr>
+              <a:t>Hersteller: Name des Herstellers. </a:t>
+            </a:r>
+          </a:p>
+          <a:p>
+            <a:pPr marL="342900" indent="-342900" algn="l">
+              <a:buFont typeface="+mj-lt"/>
+              <a:buAutoNum type="arabicPeriod"/>
+            </a:pPr>
+            <a:r>
+              <a:rPr lang="de-DE" altLang="zh-TW" sz="1800" dirty="0">
+                <a:solidFill>
+                  <a:srgbClr val="002060"/>
+                </a:solidFill>
+              </a:rPr>
+              <a:t>Anfangsbestand: Aktueller Bestand. </a:t>
+            </a:r>
+          </a:p>
+          <a:p>
+            <a:pPr marL="342900" indent="-342900" algn="l">
+              <a:buFont typeface="+mj-lt"/>
+              <a:buAutoNum type="arabicPeriod"/>
+            </a:pPr>
+            <a:r>
+              <a:rPr lang="de-DE" altLang="zh-TW" sz="1800" dirty="0">
+                <a:solidFill>
+                  <a:srgbClr val="002060"/>
+                </a:solidFill>
+              </a:rPr>
+              <a:t>Anhänge: Unterstützt nur PDF-Dateien, maximal zwei Anhänge. </a:t>
+            </a:r>
+          </a:p>
+          <a:p>
+            <a:pPr marL="342900" indent="-342900" algn="l">
+              <a:buFont typeface="+mj-lt"/>
+              <a:buAutoNum type="arabicPeriod"/>
+            </a:pPr>
+            <a:r>
+              <a:rPr lang="de-DE" altLang="zh-TW" sz="1800" dirty="0">
+                <a:solidFill>
+                  <a:srgbClr val="002060"/>
+                </a:solidFill>
+              </a:rPr>
+              <a:t>Grundlegende Teileinformationen bearbeiten oder löschen. In der Bestandsabfrage einfach mit der rechten Maustaste auf das zu bearbeitende oder zu löschende Material klicken, um das Menü (Bearbeiten, Löschen) aufzurufen. </a:t>
+            </a:r>
+            <a:endParaRPr lang="zh-TW" altLang="en-US" sz="1800" dirty="0">
+              <a:solidFill>
+                <a:srgbClr val="002060"/>
+              </a:solidFill>
+            </a:endParaRPr>
+          </a:p>
+        </p:txBody>
+      </p:sp>
+      <p:sp>
+        <p:nvSpPr>
+          <p:cNvPr id="2" name="標題 2">
+            <a:extLst>
+              <a:ext uri="{FF2B5EF4-FFF2-40B4-BE49-F238E27FC236}">
+                <a16:creationId xmlns:a16="http://schemas.microsoft.com/office/drawing/2014/main" id="{1E1055AF-5024-F161-5AF8-BD0BD30461A0}"/>
+              </a:ext>
+            </a:extLst>
+          </p:cNvPr>
+          <p:cNvSpPr txBox="1">
+            <a:spLocks/>
+          </p:cNvSpPr>
+          <p:nvPr/>
+        </p:nvSpPr>
+        <p:spPr>
+          <a:xfrm>
+            <a:off x="537039" y="546476"/>
+            <a:ext cx="11162053" cy="1005790"/>
+          </a:xfrm>
+          <a:prstGeom prst="rect">
+            <a:avLst/>
+          </a:prstGeom>
+        </p:spPr>
+        <p:txBody>
+          <a:bodyPr vert="horz" lIns="0" tIns="45720" rIns="0" bIns="45720" rtlCol="0" anchor="t">
+            <a:noAutofit/>
+          </a:bodyPr>
+          <a:lstStyle>
+            <a:lvl1pPr algn="ctr" defTabSz="685783" rtl="0" eaLnBrk="1" latinLnBrk="0" hangingPunct="1">
+              <a:lnSpc>
+                <a:spcPct val="90000"/>
+              </a:lnSpc>
+              <a:spcBef>
+                <a:spcPct val="0"/>
+              </a:spcBef>
+              <a:buNone/>
+              <a:defRPr sz="2400" b="1" kern="1200">
+                <a:solidFill>
+                  <a:schemeClr val="tx2"/>
+                </a:solidFill>
+                <a:latin typeface="+mj-lt"/>
+                <a:ea typeface="+mj-ea"/>
+                <a:cs typeface="+mj-cs"/>
+              </a:defRPr>
+            </a:lvl1pPr>
+          </a:lstStyle>
+          <a:p>
+            <a:pPr marL="285750" indent="-285750" algn="l">
+              <a:buFont typeface="Wingdings" panose="05000000000000000000" pitchFamily="2" charset="2"/>
+              <a:buChar char="u"/>
+            </a:pPr>
+            <a:r>
+              <a:rPr lang="de-DE" altLang="zh-TW" sz="1800" dirty="0">
+                <a:solidFill>
+                  <a:srgbClr val="002060"/>
+                </a:solidFill>
+              </a:rPr>
+              <a:t>Grundlegende Teileinformationen bearbeiten oder löschen. Klicken Sie in der Bestandsabfrage mit der rechten Maustaste auf das zu bearbeitende oder zu löschende Material, um das Menü aufzurufen.</a:t>
+            </a:r>
+            <a:r>
+              <a:rPr lang="zh-TW" altLang="en-US" sz="1800" dirty="0">
+                <a:solidFill>
+                  <a:srgbClr val="002060"/>
+                </a:solidFill>
+              </a:rPr>
+              <a:t>。</a:t>
+            </a:r>
+          </a:p>
+        </p:txBody>
+      </p:sp>
+      <p:sp>
+        <p:nvSpPr>
+          <p:cNvPr id="9" name="標題 2">
+            <a:extLst>
+              <a:ext uri="{FF2B5EF4-FFF2-40B4-BE49-F238E27FC236}">
+                <a16:creationId xmlns:a16="http://schemas.microsoft.com/office/drawing/2014/main" id="{5B29FD1B-F5FB-0EC9-D33C-F7F83BA4F595}"/>
+              </a:ext>
+            </a:extLst>
+          </p:cNvPr>
+          <p:cNvSpPr txBox="1">
+            <a:spLocks/>
+          </p:cNvSpPr>
+          <p:nvPr/>
+        </p:nvSpPr>
+        <p:spPr>
+          <a:xfrm>
+            <a:off x="217952" y="5289457"/>
+            <a:ext cx="5511319" cy="1224466"/>
+          </a:xfrm>
+          <a:prstGeom prst="rect">
+            <a:avLst/>
+          </a:prstGeom>
+        </p:spPr>
+        <p:txBody>
+          <a:bodyPr vert="horz" lIns="0" tIns="45720" rIns="0" bIns="45720" rtlCol="0" anchor="t">
+            <a:noAutofit/>
+          </a:bodyPr>
+          <a:lstStyle>
+            <a:lvl1pPr algn="ctr" defTabSz="685783" rtl="0" eaLnBrk="1" latinLnBrk="0" hangingPunct="1">
+              <a:lnSpc>
+                <a:spcPct val="90000"/>
+              </a:lnSpc>
+              <a:spcBef>
+                <a:spcPct val="0"/>
+              </a:spcBef>
+              <a:buNone/>
+              <a:defRPr sz="2400" b="1" kern="1200">
+                <a:solidFill>
+                  <a:schemeClr val="tx2"/>
+                </a:solidFill>
+                <a:latin typeface="+mj-lt"/>
+                <a:ea typeface="+mj-ea"/>
+                <a:cs typeface="+mj-cs"/>
+              </a:defRPr>
+            </a:lvl1pPr>
+          </a:lstStyle>
+          <a:p>
+            <a:pPr algn="l"/>
+            <a:r>
+              <a:rPr lang="en-US" altLang="zh-TW" sz="1800" dirty="0">
+                <a:solidFill>
+                  <a:srgbClr val="0000FF"/>
+                </a:solidFill>
+              </a:rPr>
+              <a:t>2. </a:t>
+            </a:r>
+            <a:r>
+              <a:rPr lang="en-US" altLang="zh-TW" sz="1800" dirty="0" err="1">
+                <a:solidFill>
+                  <a:srgbClr val="0000FF"/>
+                </a:solidFill>
+              </a:rPr>
+              <a:t>Warenausgang</a:t>
+            </a:r>
+            <a:endParaRPr lang="zh-TW" altLang="en-US" sz="1800" dirty="0">
+              <a:solidFill>
+                <a:srgbClr val="0000FF"/>
+              </a:solidFill>
+            </a:endParaRPr>
+          </a:p>
+        </p:txBody>
+      </p:sp>
+      <p:sp>
+        <p:nvSpPr>
+          <p:cNvPr id="11" name="標題 2">
+            <a:extLst>
+              <a:ext uri="{FF2B5EF4-FFF2-40B4-BE49-F238E27FC236}">
+                <a16:creationId xmlns:a16="http://schemas.microsoft.com/office/drawing/2014/main" id="{F180A0E3-15B1-4F5E-274B-6D1D616FA348}"/>
+              </a:ext>
+            </a:extLst>
+          </p:cNvPr>
+          <p:cNvSpPr txBox="1">
+            <a:spLocks/>
+          </p:cNvSpPr>
+          <p:nvPr/>
+        </p:nvSpPr>
+        <p:spPr>
+          <a:xfrm>
+            <a:off x="537039" y="5751116"/>
+            <a:ext cx="9192749" cy="1005790"/>
+          </a:xfrm>
+          <a:prstGeom prst="rect">
+            <a:avLst/>
+          </a:prstGeom>
+        </p:spPr>
+        <p:txBody>
+          <a:bodyPr vert="horz" lIns="0" tIns="45720" rIns="0" bIns="45720" rtlCol="0" anchor="t">
+            <a:noAutofit/>
+          </a:bodyPr>
+          <a:lstStyle>
+            <a:lvl1pPr algn="ctr" defTabSz="685783" rtl="0" eaLnBrk="1" latinLnBrk="0" hangingPunct="1">
+              <a:lnSpc>
+                <a:spcPct val="90000"/>
+              </a:lnSpc>
+              <a:spcBef>
+                <a:spcPct val="0"/>
+              </a:spcBef>
+              <a:buNone/>
+              <a:defRPr sz="2400" b="1" kern="1200">
+                <a:solidFill>
+                  <a:schemeClr val="tx2"/>
+                </a:solidFill>
+                <a:latin typeface="+mj-lt"/>
+                <a:ea typeface="+mj-ea"/>
+                <a:cs typeface="+mj-cs"/>
+              </a:defRPr>
+            </a:lvl1pPr>
+          </a:lstStyle>
+          <a:p>
+            <a:pPr marL="342900" indent="-342900" algn="l">
+              <a:buFont typeface="+mj-lt"/>
+              <a:buAutoNum type="arabicPeriod"/>
+            </a:pPr>
+            <a:r>
+              <a:rPr lang="de-DE" altLang="zh-TW" sz="1800" dirty="0">
+                <a:solidFill>
+                  <a:srgbClr val="002060"/>
+                </a:solidFill>
+              </a:rPr>
+              <a:t>Ein Klick auf Warenausgang überträgt die Teilenummer automatisch in das Warenausgangsfenster.</a:t>
+            </a:r>
+            <a:endParaRPr lang="en-US" altLang="zh-TW" sz="1800" dirty="0">
+              <a:solidFill>
+                <a:srgbClr val="002060"/>
+              </a:solidFill>
+            </a:endParaRPr>
+          </a:p>
+        </p:txBody>
+      </p:sp>
+      <p:pic>
+        <p:nvPicPr>
+          <p:cNvPr id="13" name="圖片 12" descr="The image displays a user interface with tabs labeled 'Bestandsabfrage,' 'Stichwortsuche,' 'Materialname,' 'Spezifikation,' 'Gasdruckfeder,' 'Bearbeiten,' 'TEST1,' and 'Warenausgang,' likely for a document or database management system.&#10;&#10;AI 產生的內容可能不正確。">
+            <a:extLst>
+              <a:ext uri="{FF2B5EF4-FFF2-40B4-BE49-F238E27FC236}">
+                <a16:creationId xmlns:a16="http://schemas.microsoft.com/office/drawing/2014/main" id="{892A74B1-70EF-1470-B1D6-3A7CDFB5950A}"/>
+              </a:ext>
+            </a:extLst>
+          </p:cNvPr>
+          <p:cNvPicPr>
+            <a:picLocks noChangeAspect="1"/>
+          </p:cNvPicPr>
+          <p:nvPr/>
+        </p:nvPicPr>
+        <p:blipFill>
+          <a:blip r:embed="rId3"/>
+          <a:stretch>
+            <a:fillRect/>
+          </a:stretch>
+        </p:blipFill>
+        <p:spPr>
+          <a:xfrm>
+            <a:off x="9414381" y="5133597"/>
+            <a:ext cx="2238351" cy="1616587"/>
+          </a:xfrm>
+          <a:prstGeom prst="rect">
+            <a:avLst/>
+          </a:prstGeom>
+        </p:spPr>
+      </p:pic>
+      <p:pic>
+        <p:nvPicPr>
+          <p:cNvPr id="15" name="圖片 14" descr="The image shows a user interface displaying a document in an editing mode with fields for product details, such as part number, name, specifications, lead time, supplier, manufacturer, and options to attach and download PDFs.&#10;&#10;AI 產生的內容可能不正確。">
+            <a:extLst>
+              <a:ext uri="{FF2B5EF4-FFF2-40B4-BE49-F238E27FC236}">
+                <a16:creationId xmlns:a16="http://schemas.microsoft.com/office/drawing/2014/main" id="{7EDF7BCA-08C9-C6B9-0042-79625799C7D7}"/>
+              </a:ext>
+            </a:extLst>
+          </p:cNvPr>
+          <p:cNvPicPr>
+            <a:picLocks noChangeAspect="1"/>
+          </p:cNvPicPr>
+          <p:nvPr/>
+        </p:nvPicPr>
+        <p:blipFill>
+          <a:blip r:embed="rId4"/>
+          <a:stretch>
+            <a:fillRect/>
+          </a:stretch>
+        </p:blipFill>
+        <p:spPr>
+          <a:xfrm>
+            <a:off x="9048935" y="1124786"/>
+            <a:ext cx="2969244" cy="3985455"/>
+          </a:xfrm>
+          <a:prstGeom prst="rect">
+            <a:avLst/>
+          </a:prstGeom>
+        </p:spPr>
+      </p:pic>
+    </p:spTree>
+    <p:extLst>
+      <p:ext uri="{BB962C8B-B14F-4D97-AF65-F5344CB8AC3E}">
+        <p14:creationId xmlns:p14="http://schemas.microsoft.com/office/powerpoint/2010/main" val="319827598"/>
+      </p:ext>
+    </p:extLst>
+  </p:cSld>
+  <p:clrMapOvr>
+    <a:masterClrMapping/>
+  </p:clrMapOvr>
+</p:sld>
+</file>
+
+<file path=ppt/slides/slide11.xml><?xml version="1.0" encoding="utf-8"?>
+<p:sld xmlns:a="http://schemas.openxmlformats.org/drawingml/2006/main" xmlns:r="http://schemas.openxmlformats.org/officeDocument/2006/relationships" xmlns:p="http://schemas.openxmlformats.org/presentationml/2006/main">
+  <p:cSld>
+    <p:spTree>
+      <p:nvGrpSpPr>
+        <p:cNvPr id="1" name="">
+          <a:extLst>
+            <a:ext uri="{FF2B5EF4-FFF2-40B4-BE49-F238E27FC236}">
+              <a16:creationId xmlns:a16="http://schemas.microsoft.com/office/drawing/2014/main" id="{9087C49E-ACCC-CC16-7516-4D97DD300EFB}"/>
+            </a:ext>
+          </a:extLst>
+        </p:cNvPr>
+        <p:cNvGrpSpPr/>
+        <p:nvPr/>
+      </p:nvGrpSpPr>
+      <p:grpSpPr>
+        <a:xfrm>
+          <a:off x="0" y="0"/>
+          <a:ext cx="0" cy="0"/>
+          <a:chOff x="0" y="0"/>
+          <a:chExt cx="0" cy="0"/>
+        </a:xfrm>
+      </p:grpSpPr>
+      <p:sp>
+        <p:nvSpPr>
+          <p:cNvPr id="3" name="標題 2">
+            <a:extLst>
+              <a:ext uri="{FF2B5EF4-FFF2-40B4-BE49-F238E27FC236}">
+                <a16:creationId xmlns:a16="http://schemas.microsoft.com/office/drawing/2014/main" id="{B7F30EA8-14CA-0337-626E-936AC979D801}"/>
+              </a:ext>
+            </a:extLst>
+          </p:cNvPr>
+          <p:cNvSpPr>
+            <a:spLocks noGrp="1"/>
+          </p:cNvSpPr>
+          <p:nvPr>
+            <p:ph type="title"/>
+          </p:nvPr>
+        </p:nvSpPr>
+        <p:spPr>
+          <a:xfrm>
+            <a:off x="319892" y="107816"/>
+            <a:ext cx="11379200" cy="461659"/>
+          </a:xfrm>
+        </p:spPr>
+        <p:txBody>
+          <a:bodyPr>
+            <a:noAutofit/>
+          </a:bodyPr>
+          <a:lstStyle/>
+          <a:p>
+            <a:r>
+              <a:rPr lang="en-US" altLang="zh-TW" sz="2800" dirty="0" err="1"/>
+              <a:t>Bestandsabfrage</a:t>
+            </a:r>
+            <a:endParaRPr lang="en-US" altLang="zh-TW" sz="2800" dirty="0"/>
+          </a:p>
+        </p:txBody>
+      </p:sp>
+      <p:sp>
+        <p:nvSpPr>
+          <p:cNvPr id="53" name="標題 2">
+            <a:extLst>
+              <a:ext uri="{FF2B5EF4-FFF2-40B4-BE49-F238E27FC236}">
+                <a16:creationId xmlns:a16="http://schemas.microsoft.com/office/drawing/2014/main" id="{B596482B-6D93-EDE6-9CE4-8F0026113B93}"/>
+              </a:ext>
+            </a:extLst>
+          </p:cNvPr>
+          <p:cNvSpPr txBox="1">
+            <a:spLocks/>
+          </p:cNvSpPr>
+          <p:nvPr/>
+        </p:nvSpPr>
+        <p:spPr>
+          <a:xfrm>
+            <a:off x="217952" y="1200293"/>
+            <a:ext cx="5511319" cy="461659"/>
+          </a:xfrm>
+          <a:prstGeom prst="rect">
+            <a:avLst/>
+          </a:prstGeom>
+        </p:spPr>
+        <p:txBody>
+          <a:bodyPr vert="horz" lIns="0" tIns="45720" rIns="0" bIns="45720" rtlCol="0" anchor="t">
+            <a:noAutofit/>
+          </a:bodyPr>
+          <a:lstStyle>
+            <a:lvl1pPr algn="ctr" defTabSz="685783" rtl="0" eaLnBrk="1" latinLnBrk="0" hangingPunct="1">
+              <a:lnSpc>
+                <a:spcPct val="90000"/>
+              </a:lnSpc>
+              <a:spcBef>
+                <a:spcPct val="0"/>
+              </a:spcBef>
+              <a:buNone/>
+              <a:defRPr sz="2400" b="1" kern="1200">
+                <a:solidFill>
+                  <a:schemeClr val="tx2"/>
+                </a:solidFill>
+                <a:latin typeface="+mj-lt"/>
+                <a:ea typeface="+mj-ea"/>
+                <a:cs typeface="+mj-cs"/>
+              </a:defRPr>
+            </a:lvl1pPr>
+          </a:lstStyle>
+          <a:p>
+            <a:pPr algn="l"/>
+            <a:r>
+              <a:rPr lang="en-US" altLang="zh-TW" sz="1800" dirty="0">
+                <a:solidFill>
+                  <a:srgbClr val="0000FF"/>
+                </a:solidFill>
+              </a:rPr>
+              <a:t>1. </a:t>
+            </a:r>
+            <a:r>
+              <a:rPr lang="en-US" altLang="zh-TW" sz="1800" dirty="0" err="1">
+                <a:solidFill>
+                  <a:srgbClr val="0000FF"/>
+                </a:solidFill>
+              </a:rPr>
+              <a:t>Bestandsabfrage</a:t>
+            </a:r>
+            <a:endParaRPr lang="zh-TW" altLang="en-US" sz="1800" dirty="0">
+              <a:solidFill>
+                <a:srgbClr val="0000FF"/>
+              </a:solidFill>
+            </a:endParaRPr>
+          </a:p>
+        </p:txBody>
+      </p:sp>
+      <p:sp>
+        <p:nvSpPr>
+          <p:cNvPr id="22" name="標題 2">
+            <a:extLst>
+              <a:ext uri="{FF2B5EF4-FFF2-40B4-BE49-F238E27FC236}">
+                <a16:creationId xmlns:a16="http://schemas.microsoft.com/office/drawing/2014/main" id="{F4FEE48A-F7EC-3CCD-4683-59A177514EE8}"/>
+              </a:ext>
+            </a:extLst>
+          </p:cNvPr>
+          <p:cNvSpPr txBox="1">
+            <a:spLocks/>
+          </p:cNvSpPr>
+          <p:nvPr/>
+        </p:nvSpPr>
+        <p:spPr>
+          <a:xfrm>
+            <a:off x="537039" y="1661952"/>
+            <a:ext cx="9192749" cy="1005790"/>
+          </a:xfrm>
+          <a:prstGeom prst="rect">
+            <a:avLst/>
+          </a:prstGeom>
+        </p:spPr>
+        <p:txBody>
+          <a:bodyPr vert="horz" lIns="0" tIns="45720" rIns="0" bIns="45720" rtlCol="0" anchor="t">
+            <a:noAutofit/>
+          </a:bodyPr>
+          <a:lstStyle>
+            <a:lvl1pPr algn="ctr" defTabSz="685783" rtl="0" eaLnBrk="1" latinLnBrk="0" hangingPunct="1">
+              <a:lnSpc>
+                <a:spcPct val="90000"/>
+              </a:lnSpc>
+              <a:spcBef>
+                <a:spcPct val="0"/>
+              </a:spcBef>
+              <a:buNone/>
+              <a:defRPr sz="2400" b="1" kern="1200">
+                <a:solidFill>
+                  <a:schemeClr val="tx2"/>
+                </a:solidFill>
+                <a:latin typeface="+mj-lt"/>
+                <a:ea typeface="+mj-ea"/>
+                <a:cs typeface="+mj-cs"/>
+              </a:defRPr>
+            </a:lvl1pPr>
+          </a:lstStyle>
+          <a:p>
+            <a:pPr marL="342900" indent="-342900" algn="l">
+              <a:buAutoNum type="arabicPeriod"/>
+            </a:pPr>
+            <a:r>
+              <a:rPr lang="de-DE" altLang="zh-TW" sz="1800" dirty="0">
+                <a:solidFill>
+                  <a:srgbClr val="002060"/>
+                </a:solidFill>
+              </a:rPr>
+              <a:t>Geben Sie ein Schlüsselwort bei Stichwortsuche: ein und klicken Sie auf Suche, um nach Materialname, Spezifikation oder Teilenummer zu suchen.</a:t>
+            </a:r>
+          </a:p>
+          <a:p>
+            <a:pPr marL="342900" indent="-342900" algn="l">
+              <a:buAutoNum type="arabicPeriod"/>
+            </a:pPr>
+            <a:r>
+              <a:rPr lang="de-DE" altLang="zh-TW" sz="1800" dirty="0">
+                <a:solidFill>
+                  <a:srgbClr val="002060"/>
+                </a:solidFill>
+              </a:rPr>
+              <a:t>Klicken Sie auf Alle anzeigen, um den gesamten Bestand aufzulisten.</a:t>
+            </a:r>
+            <a:endParaRPr lang="en-US" altLang="zh-TW" sz="1800" dirty="0">
+              <a:solidFill>
+                <a:srgbClr val="002060"/>
+              </a:solidFill>
+            </a:endParaRPr>
+          </a:p>
+        </p:txBody>
+      </p:sp>
+      <p:sp>
+        <p:nvSpPr>
+          <p:cNvPr id="2" name="標題 2">
+            <a:extLst>
+              <a:ext uri="{FF2B5EF4-FFF2-40B4-BE49-F238E27FC236}">
+                <a16:creationId xmlns:a16="http://schemas.microsoft.com/office/drawing/2014/main" id="{4289CD50-EC92-01C2-856A-A0B1D73CC3CA}"/>
+              </a:ext>
+            </a:extLst>
+          </p:cNvPr>
+          <p:cNvSpPr txBox="1">
+            <a:spLocks/>
+          </p:cNvSpPr>
+          <p:nvPr/>
+        </p:nvSpPr>
+        <p:spPr>
+          <a:xfrm>
+            <a:off x="537039" y="546476"/>
+            <a:ext cx="11162053" cy="1005790"/>
+          </a:xfrm>
+          <a:prstGeom prst="rect">
+            <a:avLst/>
+          </a:prstGeom>
+        </p:spPr>
+        <p:txBody>
+          <a:bodyPr vert="horz" lIns="0" tIns="45720" rIns="0" bIns="45720" rtlCol="0" anchor="t">
+            <a:noAutofit/>
+          </a:bodyPr>
+          <a:lstStyle>
+            <a:lvl1pPr algn="ctr" defTabSz="685783" rtl="0" eaLnBrk="1" latinLnBrk="0" hangingPunct="1">
+              <a:lnSpc>
+                <a:spcPct val="90000"/>
+              </a:lnSpc>
+              <a:spcBef>
+                <a:spcPct val="0"/>
+              </a:spcBef>
+              <a:buNone/>
+              <a:defRPr sz="2400" b="1" kern="1200">
+                <a:solidFill>
+                  <a:schemeClr val="tx2"/>
+                </a:solidFill>
+                <a:latin typeface="+mj-lt"/>
+                <a:ea typeface="+mj-ea"/>
+                <a:cs typeface="+mj-cs"/>
+              </a:defRPr>
+            </a:lvl1pPr>
+          </a:lstStyle>
+          <a:p>
+            <a:pPr marL="285750" indent="-285750" algn="l">
+              <a:buFont typeface="Wingdings" panose="05000000000000000000" pitchFamily="2" charset="2"/>
+              <a:buChar char="u"/>
+            </a:pPr>
+            <a:r>
+              <a:rPr lang="de-DE" altLang="zh-TW" sz="1800" dirty="0">
+                <a:solidFill>
+                  <a:srgbClr val="002060"/>
+                </a:solidFill>
+              </a:rPr>
+              <a:t>Wird verwendet, um die Bestandsliste abzufragen.</a:t>
+            </a:r>
+            <a:endParaRPr lang="en-US" altLang="zh-TW" sz="1800" dirty="0">
+              <a:solidFill>
+                <a:srgbClr val="002060"/>
+              </a:solidFill>
+            </a:endParaRPr>
+          </a:p>
+        </p:txBody>
+      </p:sp>
+      <p:pic>
+        <p:nvPicPr>
+          <p:cNvPr id="4" name="圖片 3" descr="The image displays a table with columns for terms such as 'Bestand', 'Spezifikation', 'Lager', and 'Lieferant', listing various items like 'Gasdruckfeder' and their associated details.&#10;&#10;AI 產生的內容可能不正確。">
+            <a:extLst>
+              <a:ext uri="{FF2B5EF4-FFF2-40B4-BE49-F238E27FC236}">
+                <a16:creationId xmlns:a16="http://schemas.microsoft.com/office/drawing/2014/main" id="{FB1B3DC4-A032-1B1C-3DCC-6DDCF76C9B66}"/>
+              </a:ext>
+            </a:extLst>
+          </p:cNvPr>
+          <p:cNvPicPr>
+            <a:picLocks noChangeAspect="1"/>
+          </p:cNvPicPr>
+          <p:nvPr/>
+        </p:nvPicPr>
+        <p:blipFill>
+          <a:blip r:embed="rId3"/>
+          <a:stretch>
+            <a:fillRect/>
+          </a:stretch>
+        </p:blipFill>
+        <p:spPr>
+          <a:xfrm>
+            <a:off x="217952" y="3429000"/>
+            <a:ext cx="11532124" cy="2503172"/>
+          </a:xfrm>
+          <a:prstGeom prst="rect">
+            <a:avLst/>
+          </a:prstGeom>
+        </p:spPr>
+      </p:pic>
+      <p:grpSp>
+        <p:nvGrpSpPr>
+          <p:cNvPr id="5" name="群組 4">
+            <a:extLst>
+              <a:ext uri="{FF2B5EF4-FFF2-40B4-BE49-F238E27FC236}">
+                <a16:creationId xmlns:a16="http://schemas.microsoft.com/office/drawing/2014/main" id="{13A5AFA6-656D-F79D-E6E9-C453C908DECD}"/>
+              </a:ext>
+            </a:extLst>
+          </p:cNvPr>
+          <p:cNvGrpSpPr/>
+          <p:nvPr/>
+        </p:nvGrpSpPr>
+        <p:grpSpPr>
+          <a:xfrm>
+            <a:off x="273194" y="3806684"/>
+            <a:ext cx="4289855" cy="605107"/>
+            <a:chOff x="7688062" y="4473437"/>
+            <a:chExt cx="2041726" cy="711122"/>
+          </a:xfrm>
+        </p:grpSpPr>
+        <p:sp>
+          <p:nvSpPr>
+            <p:cNvPr id="7" name="矩形 6">
+              <a:extLst>
+                <a:ext uri="{FF2B5EF4-FFF2-40B4-BE49-F238E27FC236}">
+                  <a16:creationId xmlns:a16="http://schemas.microsoft.com/office/drawing/2014/main" id="{F3EA105B-554C-997B-C768-2A2DC6CD1A06}"/>
+                </a:ext>
+              </a:extLst>
+            </p:cNvPr>
+            <p:cNvSpPr/>
+            <p:nvPr/>
+          </p:nvSpPr>
+          <p:spPr>
+            <a:xfrm>
+              <a:off x="7688062" y="4500979"/>
+              <a:ext cx="2041726" cy="683580"/>
+            </a:xfrm>
+            <a:prstGeom prst="rect">
+              <a:avLst/>
+            </a:prstGeom>
+            <a:noFill/>
+            <a:ln>
+              <a:solidFill>
+                <a:srgbClr val="FF0000"/>
+              </a:solidFill>
+            </a:ln>
+          </p:spPr>
+          <p:style>
+            <a:lnRef idx="2">
+              <a:schemeClr val="accent1">
+                <a:shade val="50000"/>
+              </a:schemeClr>
+            </a:lnRef>
+            <a:fillRef idx="1">
+              <a:schemeClr val="accent1"/>
+            </a:fillRef>
+            <a:effectRef idx="0">
+              <a:schemeClr val="accent1"/>
+            </a:effectRef>
+            <a:fontRef idx="minor">
+              <a:schemeClr val="lt1"/>
+            </a:fontRef>
+          </p:style>
+          <p:txBody>
+            <a:bodyPr rtlCol="0" anchor="ctr"/>
+            <a:lstStyle/>
+            <a:p>
+              <a:pPr algn="ctr"/>
+              <a:endParaRPr lang="zh-TW" altLang="en-US" sz="1400" b="1" dirty="0"/>
+            </a:p>
+          </p:txBody>
+        </p:sp>
+        <p:sp>
+          <p:nvSpPr>
+            <p:cNvPr id="13" name="文字方塊 12">
+              <a:extLst>
+                <a:ext uri="{FF2B5EF4-FFF2-40B4-BE49-F238E27FC236}">
+                  <a16:creationId xmlns:a16="http://schemas.microsoft.com/office/drawing/2014/main" id="{D44884A0-EC60-0CB9-E066-1FFA8873E45E}"/>
+                </a:ext>
+              </a:extLst>
+            </p:cNvPr>
+            <p:cNvSpPr txBox="1"/>
+            <p:nvPr/>
+          </p:nvSpPr>
+          <p:spPr>
+            <a:xfrm>
+              <a:off x="9416882" y="4473437"/>
+              <a:ext cx="233271" cy="342014"/>
+            </a:xfrm>
+            <a:prstGeom prst="rect">
+              <a:avLst/>
+            </a:prstGeom>
+            <a:noFill/>
+          </p:spPr>
+          <p:txBody>
+            <a:bodyPr wrap="none" rtlCol="0">
+              <a:spAutoFit/>
+            </a:bodyPr>
+            <a:lstStyle/>
+            <a:p>
+              <a:r>
+                <a:rPr lang="en-US" altLang="zh-TW" b="1" dirty="0">
+                  <a:solidFill>
+                    <a:srgbClr val="FF0000"/>
+                  </a:solidFill>
+                </a:rPr>
+                <a:t>1</a:t>
+              </a:r>
+              <a:endParaRPr lang="zh-TW" altLang="en-US" b="1" dirty="0">
+                <a:solidFill>
+                  <a:srgbClr val="FF0000"/>
+                </a:solidFill>
+              </a:endParaRPr>
+            </a:p>
+          </p:txBody>
+        </p:sp>
+      </p:grpSp>
+      <p:grpSp>
+        <p:nvGrpSpPr>
+          <p:cNvPr id="16" name="群組 15">
+            <a:extLst>
+              <a:ext uri="{FF2B5EF4-FFF2-40B4-BE49-F238E27FC236}">
+                <a16:creationId xmlns:a16="http://schemas.microsoft.com/office/drawing/2014/main" id="{5843038D-DFB1-A009-308A-D947E94667B8}"/>
+              </a:ext>
+            </a:extLst>
+          </p:cNvPr>
+          <p:cNvGrpSpPr/>
+          <p:nvPr/>
+        </p:nvGrpSpPr>
+        <p:grpSpPr>
+          <a:xfrm>
+            <a:off x="4592316" y="3806684"/>
+            <a:ext cx="1400465" cy="565009"/>
+            <a:chOff x="7688062" y="4473437"/>
+            <a:chExt cx="2108579" cy="711122"/>
+          </a:xfrm>
+        </p:grpSpPr>
+        <p:sp>
+          <p:nvSpPr>
+            <p:cNvPr id="17" name="矩形 16">
+              <a:extLst>
+                <a:ext uri="{FF2B5EF4-FFF2-40B4-BE49-F238E27FC236}">
+                  <a16:creationId xmlns:a16="http://schemas.microsoft.com/office/drawing/2014/main" id="{1EC1E6FF-DC7D-670D-3E1D-513C4AAA5520}"/>
+                </a:ext>
+              </a:extLst>
+            </p:cNvPr>
+            <p:cNvSpPr/>
+            <p:nvPr/>
+          </p:nvSpPr>
+          <p:spPr>
+            <a:xfrm>
+              <a:off x="7688062" y="4500979"/>
+              <a:ext cx="2041726" cy="683580"/>
+            </a:xfrm>
+            <a:prstGeom prst="rect">
+              <a:avLst/>
+            </a:prstGeom>
+            <a:noFill/>
+            <a:ln>
+              <a:solidFill>
+                <a:srgbClr val="FF0000"/>
+              </a:solidFill>
+            </a:ln>
+          </p:spPr>
+          <p:style>
+            <a:lnRef idx="2">
+              <a:schemeClr val="accent1">
+                <a:shade val="50000"/>
+              </a:schemeClr>
+            </a:lnRef>
+            <a:fillRef idx="1">
+              <a:schemeClr val="accent1"/>
+            </a:fillRef>
+            <a:effectRef idx="0">
+              <a:schemeClr val="accent1"/>
+            </a:effectRef>
+            <a:fontRef idx="minor">
+              <a:schemeClr val="lt1"/>
+            </a:fontRef>
+          </p:style>
+          <p:txBody>
+            <a:bodyPr rtlCol="0" anchor="ctr"/>
+            <a:lstStyle/>
+            <a:p>
+              <a:pPr algn="ctr"/>
+              <a:endParaRPr lang="zh-TW" altLang="en-US" sz="1400" b="1" dirty="0"/>
+            </a:p>
+          </p:txBody>
+        </p:sp>
+        <p:sp>
+          <p:nvSpPr>
+            <p:cNvPr id="18" name="文字方塊 17">
+              <a:extLst>
+                <a:ext uri="{FF2B5EF4-FFF2-40B4-BE49-F238E27FC236}">
+                  <a16:creationId xmlns:a16="http://schemas.microsoft.com/office/drawing/2014/main" id="{7FDE709E-34E8-96DD-1D06-C5E140CC0C90}"/>
+                </a:ext>
+              </a:extLst>
+            </p:cNvPr>
+            <p:cNvSpPr txBox="1"/>
+            <p:nvPr/>
+          </p:nvSpPr>
+          <p:spPr>
+            <a:xfrm>
+              <a:off x="9416882" y="4473437"/>
+              <a:ext cx="379759" cy="342014"/>
+            </a:xfrm>
+            <a:prstGeom prst="rect">
+              <a:avLst/>
+            </a:prstGeom>
+            <a:noFill/>
+          </p:spPr>
+          <p:txBody>
+            <a:bodyPr wrap="none" rtlCol="0">
+              <a:spAutoFit/>
+            </a:bodyPr>
+            <a:lstStyle/>
+            <a:p>
+              <a:r>
+                <a:rPr lang="en-US" altLang="zh-TW" b="1" dirty="0">
+                  <a:solidFill>
+                    <a:srgbClr val="FF0000"/>
+                  </a:solidFill>
+                </a:rPr>
+                <a:t>2</a:t>
+              </a:r>
+              <a:endParaRPr lang="zh-TW" altLang="en-US" b="1" dirty="0">
+                <a:solidFill>
+                  <a:srgbClr val="FF0000"/>
+                </a:solidFill>
+              </a:endParaRPr>
+            </a:p>
+          </p:txBody>
+        </p:sp>
+      </p:grpSp>
+    </p:spTree>
+    <p:extLst>
+      <p:ext uri="{BB962C8B-B14F-4D97-AF65-F5344CB8AC3E}">
+        <p14:creationId xmlns:p14="http://schemas.microsoft.com/office/powerpoint/2010/main" val="2626338067"/>
+      </p:ext>
+    </p:extLst>
+  </p:cSld>
+  <p:clrMapOvr>
+    <a:masterClrMapping/>
+  </p:clrMapOvr>
+</p:sld>
+</file>
+
+<file path=ppt/slides/slide12.xml><?xml version="1.0" encoding="utf-8"?>
+<p:sld xmlns:a="http://schemas.openxmlformats.org/drawingml/2006/main" xmlns:r="http://schemas.openxmlformats.org/officeDocument/2006/relationships" xmlns:p="http://schemas.openxmlformats.org/presentationml/2006/main">
+  <p:cSld>
+    <p:spTree>
+      <p:nvGrpSpPr>
+        <p:cNvPr id="1" name="">
+          <a:extLst>
+            <a:ext uri="{FF2B5EF4-FFF2-40B4-BE49-F238E27FC236}">
+              <a16:creationId xmlns:a16="http://schemas.microsoft.com/office/drawing/2014/main" id="{58E51442-6BD6-C6F0-1F69-EC6F14626D62}"/>
+            </a:ext>
+          </a:extLst>
+        </p:cNvPr>
+        <p:cNvGrpSpPr/>
+        <p:nvPr/>
+      </p:nvGrpSpPr>
+      <p:grpSpPr>
+        <a:xfrm>
+          <a:off x="0" y="0"/>
+          <a:ext cx="0" cy="0"/>
+          <a:chOff x="0" y="0"/>
+          <a:chExt cx="0" cy="0"/>
+        </a:xfrm>
+      </p:grpSpPr>
+      <p:sp>
+        <p:nvSpPr>
+          <p:cNvPr id="3" name="標題 2">
+            <a:extLst>
+              <a:ext uri="{FF2B5EF4-FFF2-40B4-BE49-F238E27FC236}">
+                <a16:creationId xmlns:a16="http://schemas.microsoft.com/office/drawing/2014/main" id="{F0EA1FF4-D808-25AD-DB91-0D15317D4E6F}"/>
+              </a:ext>
+            </a:extLst>
+          </p:cNvPr>
+          <p:cNvSpPr>
+            <a:spLocks noGrp="1"/>
+          </p:cNvSpPr>
+          <p:nvPr>
+            <p:ph type="title"/>
+          </p:nvPr>
+        </p:nvSpPr>
+        <p:spPr>
+          <a:xfrm>
+            <a:off x="319892" y="107816"/>
+            <a:ext cx="11379200" cy="461659"/>
+          </a:xfrm>
+        </p:spPr>
+        <p:txBody>
+          <a:bodyPr>
+            <a:noAutofit/>
+          </a:bodyPr>
+          <a:lstStyle/>
+          <a:p>
+            <a:r>
+              <a:rPr lang="en-US" altLang="zh-TW" sz="2800" dirty="0" err="1"/>
+              <a:t>Überwachung</a:t>
+            </a:r>
+            <a:r>
+              <a:rPr lang="en-US" altLang="zh-TW" sz="2800" dirty="0"/>
+              <a:t> des </a:t>
+            </a:r>
+            <a:r>
+              <a:rPr lang="en-US" altLang="zh-TW" sz="2800" dirty="0" err="1"/>
+              <a:t>niedrigen</a:t>
+            </a:r>
+            <a:r>
+              <a:rPr lang="en-US" altLang="zh-TW" sz="2800" dirty="0"/>
+              <a:t> </a:t>
+            </a:r>
+            <a:r>
+              <a:rPr lang="en-US" altLang="zh-TW" sz="2800" dirty="0" err="1"/>
+              <a:t>Sicherheitsbestands</a:t>
+            </a:r>
+            <a:endParaRPr lang="en-US" altLang="zh-TW" sz="2800" dirty="0"/>
+          </a:p>
+        </p:txBody>
+      </p:sp>
+      <p:sp>
+        <p:nvSpPr>
+          <p:cNvPr id="53" name="標題 2">
+            <a:extLst>
+              <a:ext uri="{FF2B5EF4-FFF2-40B4-BE49-F238E27FC236}">
+                <a16:creationId xmlns:a16="http://schemas.microsoft.com/office/drawing/2014/main" id="{69CA39BF-1A32-AAD9-66FB-E7B28B423FD4}"/>
+              </a:ext>
+            </a:extLst>
+          </p:cNvPr>
+          <p:cNvSpPr txBox="1">
+            <a:spLocks/>
+          </p:cNvSpPr>
+          <p:nvPr/>
+        </p:nvSpPr>
+        <p:spPr>
+          <a:xfrm>
+            <a:off x="217952" y="1200293"/>
+            <a:ext cx="5511319" cy="461659"/>
+          </a:xfrm>
+          <a:prstGeom prst="rect">
+            <a:avLst/>
+          </a:prstGeom>
+        </p:spPr>
+        <p:txBody>
+          <a:bodyPr vert="horz" lIns="0" tIns="45720" rIns="0" bIns="45720" rtlCol="0" anchor="t">
+            <a:noAutofit/>
+          </a:bodyPr>
+          <a:lstStyle>
+            <a:lvl1pPr algn="ctr" defTabSz="685783" rtl="0" eaLnBrk="1" latinLnBrk="0" hangingPunct="1">
+              <a:lnSpc>
+                <a:spcPct val="90000"/>
+              </a:lnSpc>
+              <a:spcBef>
+                <a:spcPct val="0"/>
+              </a:spcBef>
+              <a:buNone/>
+              <a:defRPr sz="2400" b="1" kern="1200">
+                <a:solidFill>
+                  <a:schemeClr val="tx2"/>
+                </a:solidFill>
+                <a:latin typeface="+mj-lt"/>
+                <a:ea typeface="+mj-ea"/>
+                <a:cs typeface="+mj-cs"/>
+              </a:defRPr>
+            </a:lvl1pPr>
+          </a:lstStyle>
+          <a:p>
+            <a:pPr algn="l"/>
+            <a:r>
+              <a:rPr lang="en-US" altLang="zh-TW" sz="1800" dirty="0">
+                <a:solidFill>
+                  <a:srgbClr val="0000FF"/>
+                </a:solidFill>
+              </a:rPr>
+              <a:t>1. Alarm für </a:t>
+            </a:r>
+            <a:r>
+              <a:rPr lang="en-US" altLang="zh-TW" sz="1800" dirty="0" err="1">
+                <a:solidFill>
+                  <a:srgbClr val="0000FF"/>
+                </a:solidFill>
+              </a:rPr>
+              <a:t>niedrigen</a:t>
+            </a:r>
+            <a:r>
+              <a:rPr lang="en-US" altLang="zh-TW" sz="1800" dirty="0">
+                <a:solidFill>
+                  <a:srgbClr val="0000FF"/>
+                </a:solidFill>
+              </a:rPr>
+              <a:t> </a:t>
+            </a:r>
+            <a:r>
+              <a:rPr lang="en-US" altLang="zh-TW" sz="1800" dirty="0" err="1">
+                <a:solidFill>
+                  <a:srgbClr val="0000FF"/>
+                </a:solidFill>
+              </a:rPr>
+              <a:t>Sicherheitsbestand</a:t>
+            </a:r>
+            <a:endParaRPr lang="zh-TW" altLang="en-US" sz="1800" dirty="0">
+              <a:solidFill>
+                <a:srgbClr val="0000FF"/>
+              </a:solidFill>
+            </a:endParaRPr>
+          </a:p>
+        </p:txBody>
+      </p:sp>
+      <p:sp>
+        <p:nvSpPr>
+          <p:cNvPr id="22" name="標題 2">
+            <a:extLst>
+              <a:ext uri="{FF2B5EF4-FFF2-40B4-BE49-F238E27FC236}">
+                <a16:creationId xmlns:a16="http://schemas.microsoft.com/office/drawing/2014/main" id="{883D75F4-F8CB-CCBB-9215-C21AF251BD35}"/>
+              </a:ext>
+            </a:extLst>
+          </p:cNvPr>
+          <p:cNvSpPr txBox="1">
+            <a:spLocks/>
+          </p:cNvSpPr>
+          <p:nvPr/>
+        </p:nvSpPr>
+        <p:spPr>
+          <a:xfrm>
+            <a:off x="537039" y="1661951"/>
+            <a:ext cx="6712173" cy="1137801"/>
+          </a:xfrm>
+          <a:prstGeom prst="rect">
+            <a:avLst/>
+          </a:prstGeom>
+        </p:spPr>
+        <p:txBody>
+          <a:bodyPr vert="horz" lIns="0" tIns="45720" rIns="0" bIns="45720" rtlCol="0" anchor="t">
+            <a:noAutofit/>
+          </a:bodyPr>
+          <a:lstStyle>
+            <a:lvl1pPr algn="ctr" defTabSz="685783" rtl="0" eaLnBrk="1" latinLnBrk="0" hangingPunct="1">
+              <a:lnSpc>
+                <a:spcPct val="90000"/>
+              </a:lnSpc>
+              <a:spcBef>
+                <a:spcPct val="0"/>
+              </a:spcBef>
+              <a:buNone/>
+              <a:defRPr sz="2400" b="1" kern="1200">
+                <a:solidFill>
+                  <a:schemeClr val="tx2"/>
+                </a:solidFill>
+                <a:latin typeface="+mj-lt"/>
+                <a:ea typeface="+mj-ea"/>
+                <a:cs typeface="+mj-cs"/>
+              </a:defRPr>
+            </a:lvl1pPr>
+          </a:lstStyle>
+          <a:p>
+            <a:pPr marL="285750" indent="-285750" algn="l">
+              <a:buFont typeface="Wingdings" panose="05000000000000000000" pitchFamily="2" charset="2"/>
+              <a:buChar char="u"/>
+            </a:pPr>
+            <a:r>
+              <a:rPr lang="de-DE" altLang="zh-TW" sz="1800" dirty="0">
+                <a:solidFill>
+                  <a:srgbClr val="002060"/>
+                </a:solidFill>
+              </a:rPr>
+              <a:t>Wenn der verbleibende Bestand nach einer Materialausgabe unter den Sicherheitsbestand fällt, wird ein roter Warnhinweis (Alarm) auf dem Bildschirm ausgegeben. Klicken Sie zur Bestätigung auf Bestätigen.</a:t>
+            </a:r>
+            <a:endParaRPr lang="en-US" altLang="zh-TW" sz="1800" dirty="0">
+              <a:solidFill>
+                <a:srgbClr val="002060"/>
+              </a:solidFill>
+            </a:endParaRPr>
+          </a:p>
+        </p:txBody>
+      </p:sp>
+      <p:sp>
+        <p:nvSpPr>
+          <p:cNvPr id="35" name="標題 2">
+            <a:extLst>
+              <a:ext uri="{FF2B5EF4-FFF2-40B4-BE49-F238E27FC236}">
+                <a16:creationId xmlns:a16="http://schemas.microsoft.com/office/drawing/2014/main" id="{414A5CC3-D0FF-379E-B150-99D2AAA1AA1B}"/>
+              </a:ext>
+            </a:extLst>
+          </p:cNvPr>
+          <p:cNvSpPr txBox="1">
+            <a:spLocks/>
+          </p:cNvSpPr>
+          <p:nvPr/>
+        </p:nvSpPr>
+        <p:spPr>
+          <a:xfrm>
+            <a:off x="217952" y="2799753"/>
+            <a:ext cx="5511319" cy="461659"/>
+          </a:xfrm>
+          <a:prstGeom prst="rect">
+            <a:avLst/>
+          </a:prstGeom>
+        </p:spPr>
+        <p:txBody>
+          <a:bodyPr vert="horz" lIns="0" tIns="45720" rIns="0" bIns="45720" rtlCol="0" anchor="t">
+            <a:noAutofit/>
+          </a:bodyPr>
+          <a:lstStyle>
+            <a:lvl1pPr algn="ctr" defTabSz="685783" rtl="0" eaLnBrk="1" latinLnBrk="0" hangingPunct="1">
+              <a:lnSpc>
+                <a:spcPct val="90000"/>
+              </a:lnSpc>
+              <a:spcBef>
+                <a:spcPct val="0"/>
+              </a:spcBef>
+              <a:buNone/>
+              <a:defRPr sz="2400" b="1" kern="1200">
+                <a:solidFill>
+                  <a:schemeClr val="tx2"/>
+                </a:solidFill>
+                <a:latin typeface="+mj-lt"/>
+                <a:ea typeface="+mj-ea"/>
+                <a:cs typeface="+mj-cs"/>
+              </a:defRPr>
+            </a:lvl1pPr>
+          </a:lstStyle>
+          <a:p>
+            <a:pPr algn="l"/>
+            <a:r>
+              <a:rPr lang="en-US" altLang="zh-TW" sz="1800" dirty="0">
+                <a:solidFill>
+                  <a:srgbClr val="0000FF"/>
+                </a:solidFill>
+              </a:rPr>
+              <a:t>2. </a:t>
+            </a:r>
+            <a:r>
+              <a:rPr lang="en-US" altLang="zh-TW" sz="1800" dirty="0" err="1">
+                <a:solidFill>
+                  <a:srgbClr val="0000FF"/>
+                </a:solidFill>
+              </a:rPr>
+              <a:t>Werks</a:t>
+            </a:r>
+            <a:r>
+              <a:rPr lang="en-US" altLang="zh-TW" sz="1800" dirty="0">
+                <a:solidFill>
+                  <a:srgbClr val="0000FF"/>
+                </a:solidFill>
+              </a:rPr>
+              <a:t>-</a:t>
+            </a:r>
+            <a:r>
+              <a:rPr lang="en-US" altLang="zh-TW" sz="1800" dirty="0" err="1">
+                <a:solidFill>
+                  <a:srgbClr val="0000FF"/>
+                </a:solidFill>
+              </a:rPr>
+              <a:t>Sicherheitsbestand</a:t>
+            </a:r>
+            <a:r>
+              <a:rPr lang="en-US" altLang="zh-TW" sz="1800" dirty="0">
+                <a:solidFill>
+                  <a:srgbClr val="0000FF"/>
+                </a:solidFill>
+              </a:rPr>
+              <a:t>-Dashboard</a:t>
+            </a:r>
+            <a:endParaRPr lang="zh-TW" altLang="en-US" sz="1800" dirty="0">
+              <a:solidFill>
+                <a:srgbClr val="0000FF"/>
+              </a:solidFill>
+            </a:endParaRPr>
+          </a:p>
+        </p:txBody>
+      </p:sp>
+      <p:sp>
+        <p:nvSpPr>
+          <p:cNvPr id="43" name="標題 2">
+            <a:extLst>
+              <a:ext uri="{FF2B5EF4-FFF2-40B4-BE49-F238E27FC236}">
+                <a16:creationId xmlns:a16="http://schemas.microsoft.com/office/drawing/2014/main" id="{BE249722-073E-AC22-8A27-BD6475EB42BE}"/>
+              </a:ext>
+            </a:extLst>
+          </p:cNvPr>
+          <p:cNvSpPr txBox="1">
+            <a:spLocks/>
+          </p:cNvSpPr>
+          <p:nvPr/>
+        </p:nvSpPr>
+        <p:spPr>
+          <a:xfrm>
+            <a:off x="537039" y="3261412"/>
+            <a:ext cx="6712173" cy="1005790"/>
+          </a:xfrm>
+          <a:prstGeom prst="rect">
+            <a:avLst/>
+          </a:prstGeom>
+        </p:spPr>
+        <p:txBody>
+          <a:bodyPr vert="horz" lIns="0" tIns="45720" rIns="0" bIns="45720" rtlCol="0" anchor="t">
+            <a:noAutofit/>
+          </a:bodyPr>
+          <a:lstStyle>
+            <a:lvl1pPr algn="ctr" defTabSz="685783" rtl="0" eaLnBrk="1" latinLnBrk="0" hangingPunct="1">
+              <a:lnSpc>
+                <a:spcPct val="90000"/>
+              </a:lnSpc>
+              <a:spcBef>
+                <a:spcPct val="0"/>
+              </a:spcBef>
+              <a:buNone/>
+              <a:defRPr sz="2400" b="1" kern="1200">
+                <a:solidFill>
+                  <a:schemeClr val="tx2"/>
+                </a:solidFill>
+                <a:latin typeface="+mj-lt"/>
+                <a:ea typeface="+mj-ea"/>
+                <a:cs typeface="+mj-cs"/>
+              </a:defRPr>
+            </a:lvl1pPr>
+          </a:lstStyle>
+          <a:p>
+            <a:pPr marL="285750" indent="-285750" algn="l">
+              <a:buFont typeface="Wingdings" panose="05000000000000000000" pitchFamily="2" charset="2"/>
+              <a:buChar char="u"/>
+            </a:pPr>
+            <a:r>
+              <a:rPr lang="de-DE" altLang="zh-TW" sz="1800" dirty="0">
+                <a:solidFill>
+                  <a:srgbClr val="002060"/>
+                </a:solidFill>
+              </a:rPr>
+              <a:t>Öffnen Sie dieses Dashboard, um alle Materialien zu sehen, deren aktueller Bestand (Bestand) unter dem Sicherheitsbestand (Sicherheitsbestand) liegt.</a:t>
+            </a:r>
+            <a:endParaRPr lang="en-US" altLang="zh-TW" sz="1800" dirty="0">
+              <a:solidFill>
+                <a:srgbClr val="002060"/>
+              </a:solidFill>
+            </a:endParaRPr>
+          </a:p>
+        </p:txBody>
+      </p:sp>
+      <p:sp>
+        <p:nvSpPr>
+          <p:cNvPr id="2" name="標題 2">
+            <a:extLst>
+              <a:ext uri="{FF2B5EF4-FFF2-40B4-BE49-F238E27FC236}">
+                <a16:creationId xmlns:a16="http://schemas.microsoft.com/office/drawing/2014/main" id="{95F584EF-6D8A-328D-8364-D6A254D4972F}"/>
+              </a:ext>
+            </a:extLst>
+          </p:cNvPr>
+          <p:cNvSpPr txBox="1">
+            <a:spLocks/>
+          </p:cNvSpPr>
+          <p:nvPr/>
+        </p:nvSpPr>
+        <p:spPr>
+          <a:xfrm>
+            <a:off x="537039" y="546476"/>
+            <a:ext cx="11162053" cy="1005790"/>
+          </a:xfrm>
+          <a:prstGeom prst="rect">
+            <a:avLst/>
+          </a:prstGeom>
+        </p:spPr>
+        <p:txBody>
+          <a:bodyPr vert="horz" lIns="0" tIns="45720" rIns="0" bIns="45720" rtlCol="0" anchor="t">
+            <a:noAutofit/>
+          </a:bodyPr>
+          <a:lstStyle>
+            <a:lvl1pPr algn="ctr" defTabSz="685783" rtl="0" eaLnBrk="1" latinLnBrk="0" hangingPunct="1">
+              <a:lnSpc>
+                <a:spcPct val="90000"/>
+              </a:lnSpc>
+              <a:spcBef>
+                <a:spcPct val="0"/>
+              </a:spcBef>
+              <a:buNone/>
+              <a:defRPr sz="2400" b="1" kern="1200">
+                <a:solidFill>
+                  <a:schemeClr val="tx2"/>
+                </a:solidFill>
+                <a:latin typeface="+mj-lt"/>
+                <a:ea typeface="+mj-ea"/>
+                <a:cs typeface="+mj-cs"/>
+              </a:defRPr>
+            </a:lvl1pPr>
+          </a:lstStyle>
+          <a:p>
+            <a:pPr marL="285750" indent="-285750" algn="l">
+              <a:buFont typeface="Wingdings" panose="05000000000000000000" pitchFamily="2" charset="2"/>
+              <a:buChar char="u"/>
+            </a:pPr>
+            <a:r>
+              <a:rPr lang="de-DE" altLang="zh-TW" sz="1800" dirty="0">
+                <a:solidFill>
+                  <a:srgbClr val="002060"/>
+                </a:solidFill>
+              </a:rPr>
+              <a:t>Dient zur Überwachung von Materialien, deren Bestand unter den Sicherheitsbestand gefallen ist.</a:t>
+            </a:r>
+            <a:endParaRPr lang="en-US" altLang="zh-TW" sz="1800" dirty="0">
+              <a:solidFill>
+                <a:srgbClr val="002060"/>
+              </a:solidFill>
+            </a:endParaRPr>
+          </a:p>
+        </p:txBody>
+      </p:sp>
+      <p:pic>
+        <p:nvPicPr>
+          <p:cNvPr id="13" name="圖片 12" descr="The stock in the warehouse is only 2 units, and the safety level (5) has been reached, please notify purchasing.&#10;&#10;AI 產生的內容可能不正確。">
+            <a:extLst>
+              <a:ext uri="{FF2B5EF4-FFF2-40B4-BE49-F238E27FC236}">
+                <a16:creationId xmlns:a16="http://schemas.microsoft.com/office/drawing/2014/main" id="{5D48B64B-2920-1F8E-3BE7-760800C9B567}"/>
+              </a:ext>
+            </a:extLst>
+          </p:cNvPr>
+          <p:cNvPicPr>
+            <a:picLocks noChangeAspect="1"/>
+          </p:cNvPicPr>
+          <p:nvPr/>
+        </p:nvPicPr>
+        <p:blipFill>
+          <a:blip r:embed="rId3"/>
+          <a:stretch>
+            <a:fillRect/>
+          </a:stretch>
+        </p:blipFill>
+        <p:spPr>
+          <a:xfrm>
+            <a:off x="7318167" y="1031134"/>
+            <a:ext cx="3989539" cy="2659693"/>
+          </a:xfrm>
+          <a:prstGeom prst="rect">
+            <a:avLst/>
+          </a:prstGeom>
+        </p:spPr>
+      </p:pic>
+      <p:pic>
+        <p:nvPicPr>
+          <p:cNvPr id="15" name="圖片 14" descr="The image is a dashboard interface showing a table with columns for Teilenummer (Part Number), Materialname (Material Name), Spezifikation (Specification), Bestand (Inventory), and Sicherheitsbestand (Safety Stock), with an entry for part number 2000-001-3637.A and material code M.&#10;&#10;AI 產生的內容可能不正確。">
+            <a:extLst>
+              <a:ext uri="{FF2B5EF4-FFF2-40B4-BE49-F238E27FC236}">
+                <a16:creationId xmlns:a16="http://schemas.microsoft.com/office/drawing/2014/main" id="{B9840452-ADC9-75B0-1125-89E66687BB2C}"/>
+              </a:ext>
+            </a:extLst>
+          </p:cNvPr>
+          <p:cNvPicPr>
+            <a:picLocks noChangeAspect="1"/>
+          </p:cNvPicPr>
+          <p:nvPr/>
+        </p:nvPicPr>
+        <p:blipFill>
+          <a:blip r:embed="rId4"/>
+          <a:stretch>
+            <a:fillRect/>
+          </a:stretch>
+        </p:blipFill>
+        <p:spPr>
+          <a:xfrm>
+            <a:off x="689344" y="4152486"/>
+            <a:ext cx="10079854" cy="2536763"/>
+          </a:xfrm>
+          <a:prstGeom prst="rect">
+            <a:avLst/>
+          </a:prstGeom>
+        </p:spPr>
+      </p:pic>
+    </p:spTree>
+    <p:extLst>
+      <p:ext uri="{BB962C8B-B14F-4D97-AF65-F5344CB8AC3E}">
+        <p14:creationId xmlns:p14="http://schemas.microsoft.com/office/powerpoint/2010/main" val="4253898824"/>
+      </p:ext>
+    </p:extLst>
+  </p:cSld>
+  <p:clrMapOvr>
+    <a:masterClrMapping/>
+  </p:clrMapOvr>
+</p:sld>
+</file>
+
+<file path=ppt/slides/slide13.xml><?xml version="1.0" encoding="utf-8"?>
 <p:sld xmlns:a="http://schemas.openxmlformats.org/drawingml/2006/main" xmlns:r="http://schemas.openxmlformats.org/officeDocument/2006/relationships" xmlns:p="http://schemas.openxmlformats.org/presentationml/2006/main">
   <p:cSld>
     <p:spTree>
@@ -7986,10 +10223,10 @@
       </p:sp>
       <p:pic>
         <p:nvPicPr>
-          <p:cNvPr id="7" name="圖片 6" descr="7ￂﾰ￢ﾄﾃ Sunny.&#10;&#10;AI 產生的內容可能不正確。">
+          <p:cNvPr id="5" name="圖片 4" descr="The image displays a computer screen with a file explorer interface, showing a list of documents, and includes a section with options to open a protocol list, terminate a server, and access Microsoft 365.&#10;&#10;AI 產生的內容可能不正確。">
             <a:extLst>
               <a:ext uri="{FF2B5EF4-FFF2-40B4-BE49-F238E27FC236}">
-                <a16:creationId xmlns:a16="http://schemas.microsoft.com/office/drawing/2014/main" id="{7373FD56-5055-33DB-7472-D3C227CBFEC9}"/>
+                <a16:creationId xmlns:a16="http://schemas.microsoft.com/office/drawing/2014/main" id="{71303F80-0E60-AD66-7E77-1BF6BF9E59C3}"/>
               </a:ext>
             </a:extLst>
           </p:cNvPr>
@@ -8006,8 +10243,8 @@
         </p:blipFill>
         <p:spPr>
           <a:xfrm>
-            <a:off x="9409697" y="4281416"/>
-            <a:ext cx="2564351" cy="1955745"/>
+            <a:off x="3728930" y="5259289"/>
+            <a:ext cx="3331304" cy="1276481"/>
           </a:xfrm>
           <a:prstGeom prst="rect">
             <a:avLst/>
@@ -8017,7 +10254,7 @@
     </p:spTree>
     <p:extLst>
       <p:ext uri="{BB962C8B-B14F-4D97-AF65-F5344CB8AC3E}">
-        <p14:creationId xmlns:p14="http://schemas.microsoft.com/office/powerpoint/2010/main" val="1547232800"/>
+        <p14:creationId xmlns:p14="http://schemas.microsoft.com/office/powerpoint/2010/main" val="4055451499"/>
       </p:ext>
     </p:extLst>
   </p:cSld>
@@ -8028,6 +10265,656 @@
 </file>
 
 <file path=ppt/slides/slide3.xml><?xml version="1.0" encoding="utf-8"?>
+<p:sld xmlns:a="http://schemas.openxmlformats.org/drawingml/2006/main" xmlns:r="http://schemas.openxmlformats.org/officeDocument/2006/relationships" xmlns:p="http://schemas.openxmlformats.org/presentationml/2006/main">
+  <p:cSld>
+    <p:spTree>
+      <p:nvGrpSpPr>
+        <p:cNvPr id="1" name="">
+          <a:extLst>
+            <a:ext uri="{FF2B5EF4-FFF2-40B4-BE49-F238E27FC236}">
+              <a16:creationId xmlns:a16="http://schemas.microsoft.com/office/drawing/2014/main" id="{267652B4-DD50-90DD-1372-1BAAADC3ADDF}"/>
+            </a:ext>
+          </a:extLst>
+        </p:cNvPr>
+        <p:cNvGrpSpPr/>
+        <p:nvPr/>
+      </p:nvGrpSpPr>
+      <p:grpSpPr>
+        <a:xfrm>
+          <a:off x="0" y="0"/>
+          <a:ext cx="0" cy="0"/>
+          <a:chOff x="0" y="0"/>
+          <a:chExt cx="0" cy="0"/>
+        </a:xfrm>
+      </p:grpSpPr>
+      <p:sp>
+        <p:nvSpPr>
+          <p:cNvPr id="3" name="標題 2">
+            <a:extLst>
+              <a:ext uri="{FF2B5EF4-FFF2-40B4-BE49-F238E27FC236}">
+                <a16:creationId xmlns:a16="http://schemas.microsoft.com/office/drawing/2014/main" id="{67D0F314-0F7B-9255-14A5-96ECDE8DE331}"/>
+              </a:ext>
+            </a:extLst>
+          </p:cNvPr>
+          <p:cNvSpPr>
+            <a:spLocks noGrp="1"/>
+          </p:cNvSpPr>
+          <p:nvPr>
+            <p:ph type="title"/>
+          </p:nvPr>
+        </p:nvSpPr>
+        <p:spPr>
+          <a:xfrm>
+            <a:off x="319892" y="107816"/>
+            <a:ext cx="11379200" cy="461659"/>
+          </a:xfrm>
+        </p:spPr>
+        <p:txBody>
+          <a:bodyPr>
+            <a:noAutofit/>
+          </a:bodyPr>
+          <a:lstStyle/>
+          <a:p>
+            <a:r>
+              <a:rPr lang="en-US" altLang="zh-TW" sz="2800" dirty="0" err="1"/>
+              <a:t>Systemeinstellungen</a:t>
+            </a:r>
+            <a:endParaRPr lang="zh-TW" altLang="en-US" sz="2800" dirty="0"/>
+          </a:p>
+        </p:txBody>
+      </p:sp>
+      <p:sp>
+        <p:nvSpPr>
+          <p:cNvPr id="53" name="標題 2">
+            <a:extLst>
+              <a:ext uri="{FF2B5EF4-FFF2-40B4-BE49-F238E27FC236}">
+                <a16:creationId xmlns:a16="http://schemas.microsoft.com/office/drawing/2014/main" id="{F1D58291-492B-EB1C-A0F8-D422A13FC50F}"/>
+              </a:ext>
+            </a:extLst>
+          </p:cNvPr>
+          <p:cNvSpPr txBox="1">
+            <a:spLocks/>
+          </p:cNvSpPr>
+          <p:nvPr/>
+        </p:nvSpPr>
+        <p:spPr>
+          <a:xfrm>
+            <a:off x="217952" y="615828"/>
+            <a:ext cx="6516516" cy="1119372"/>
+          </a:xfrm>
+          <a:prstGeom prst="rect">
+            <a:avLst/>
+          </a:prstGeom>
+        </p:spPr>
+        <p:txBody>
+          <a:bodyPr vert="horz" lIns="0" tIns="45720" rIns="0" bIns="45720" rtlCol="0" anchor="t">
+            <a:noAutofit/>
+          </a:bodyPr>
+          <a:lstStyle>
+            <a:lvl1pPr algn="ctr" defTabSz="685783" rtl="0" eaLnBrk="1" latinLnBrk="0" hangingPunct="1">
+              <a:lnSpc>
+                <a:spcPct val="90000"/>
+              </a:lnSpc>
+              <a:spcBef>
+                <a:spcPct val="0"/>
+              </a:spcBef>
+              <a:buNone/>
+              <a:defRPr sz="2400" b="1" kern="1200">
+                <a:solidFill>
+                  <a:schemeClr val="tx2"/>
+                </a:solidFill>
+                <a:latin typeface="+mj-lt"/>
+                <a:ea typeface="+mj-ea"/>
+                <a:cs typeface="+mj-cs"/>
+              </a:defRPr>
+            </a:lvl1pPr>
+          </a:lstStyle>
+          <a:p>
+            <a:pPr algn="l"/>
+            <a:r>
+              <a:rPr lang="en-US" altLang="zh-TW" sz="1800" dirty="0">
+                <a:solidFill>
+                  <a:srgbClr val="0000FF"/>
+                </a:solidFill>
+              </a:rPr>
+              <a:t>1. Backend-Dienst (API Server)</a:t>
+            </a:r>
+            <a:endParaRPr lang="zh-TW" altLang="en-US" sz="1800" dirty="0">
+              <a:solidFill>
+                <a:srgbClr val="0000FF"/>
+              </a:solidFill>
+            </a:endParaRPr>
+          </a:p>
+        </p:txBody>
+      </p:sp>
+      <p:sp>
+        <p:nvSpPr>
+          <p:cNvPr id="22" name="標題 2">
+            <a:extLst>
+              <a:ext uri="{FF2B5EF4-FFF2-40B4-BE49-F238E27FC236}">
+                <a16:creationId xmlns:a16="http://schemas.microsoft.com/office/drawing/2014/main" id="{9D0186C0-3D2B-922E-87F0-681CFEAC529D}"/>
+              </a:ext>
+            </a:extLst>
+          </p:cNvPr>
+          <p:cNvSpPr txBox="1">
+            <a:spLocks/>
+          </p:cNvSpPr>
+          <p:nvPr/>
+        </p:nvSpPr>
+        <p:spPr>
+          <a:xfrm>
+            <a:off x="537039" y="1077486"/>
+            <a:ext cx="10869394" cy="2438711"/>
+          </a:xfrm>
+          <a:prstGeom prst="rect">
+            <a:avLst/>
+          </a:prstGeom>
+        </p:spPr>
+        <p:txBody>
+          <a:bodyPr vert="horz" lIns="0" tIns="45720" rIns="0" bIns="45720" rtlCol="0" anchor="t">
+            <a:noAutofit/>
+          </a:bodyPr>
+          <a:lstStyle>
+            <a:lvl1pPr algn="ctr" defTabSz="685783" rtl="0" eaLnBrk="1" latinLnBrk="0" hangingPunct="1">
+              <a:lnSpc>
+                <a:spcPct val="90000"/>
+              </a:lnSpc>
+              <a:spcBef>
+                <a:spcPct val="0"/>
+              </a:spcBef>
+              <a:buNone/>
+              <a:defRPr sz="2400" b="1" kern="1200">
+                <a:solidFill>
+                  <a:schemeClr val="tx2"/>
+                </a:solidFill>
+                <a:latin typeface="+mj-lt"/>
+                <a:ea typeface="+mj-ea"/>
+                <a:cs typeface="+mj-cs"/>
+              </a:defRPr>
+            </a:lvl1pPr>
+          </a:lstStyle>
+          <a:p>
+            <a:pPr marL="285750" indent="-285750" algn="l">
+              <a:buFont typeface="Wingdings" panose="05000000000000000000" pitchFamily="2" charset="2"/>
+              <a:buChar char="u"/>
+            </a:pPr>
+            <a:r>
+              <a:rPr lang="de-DE" altLang="zh-TW" sz="1800" dirty="0">
+                <a:solidFill>
+                  <a:srgbClr val="002060"/>
+                </a:solidFill>
+              </a:rPr>
+              <a:t>Der Backend-Dienst verwaltet hauptsächlich die Datenbank und empfängt Verbindungsanfragen von den Clients. Es sollte nur einen in der gesamten Fabrik geben. </a:t>
+            </a:r>
+          </a:p>
+          <a:p>
+            <a:pPr marL="285750" indent="-285750" algn="l">
+              <a:buFont typeface="Wingdings" panose="05000000000000000000" pitchFamily="2" charset="2"/>
+              <a:buChar char="u"/>
+            </a:pPr>
+            <a:r>
+              <a:rPr lang="de-DE" altLang="zh-TW" sz="1800" dirty="0">
+                <a:solidFill>
+                  <a:srgbClr val="002060"/>
+                </a:solidFill>
+              </a:rPr>
+              <a:t>Die Backend-Konfigurationsdatei befindet sich im Ordner als Config.ini. </a:t>
+            </a:r>
+          </a:p>
+          <a:p>
+            <a:pPr marL="285750" indent="-285750" algn="l">
+              <a:buFont typeface="Wingdings" panose="05000000000000000000" pitchFamily="2" charset="2"/>
+              <a:buChar char="u"/>
+            </a:pPr>
+            <a:r>
+              <a:rPr lang="de-DE" altLang="zh-TW" sz="1800" dirty="0">
+                <a:solidFill>
+                  <a:srgbClr val="002060"/>
+                </a:solidFill>
+              </a:rPr>
+              <a:t>DefaultConnection=Data Source : Speicherort der Datenbank. </a:t>
+            </a:r>
+          </a:p>
+          <a:p>
+            <a:pPr marL="285750" indent="-285750" algn="l">
+              <a:buFont typeface="Wingdings" panose="05000000000000000000" pitchFamily="2" charset="2"/>
+              <a:buChar char="u"/>
+            </a:pPr>
+            <a:r>
+              <a:rPr lang="de-DE" altLang="zh-TW" sz="1800" dirty="0">
+                <a:solidFill>
+                  <a:srgbClr val="002060"/>
+                </a:solidFill>
+              </a:rPr>
+              <a:t>Urls : Erlaubte Verbindungsadresse für das Backend, normalerweise auf http://0.0.0.0:5000 eingestellt und erfordert keine Änderung. </a:t>
+            </a:r>
+          </a:p>
+          <a:p>
+            <a:pPr marL="285750" indent="-285750" algn="l">
+              <a:buFont typeface="Wingdings" panose="05000000000000000000" pitchFamily="2" charset="2"/>
+              <a:buChar char="u"/>
+            </a:pPr>
+            <a:r>
+              <a:rPr lang="de-DE" altLang="zh-TW" sz="1800" dirty="0">
+                <a:solidFill>
+                  <a:srgbClr val="002060"/>
+                </a:solidFill>
+              </a:rPr>
+              <a:t>Language : System-Spracheinstellung, unterstützt derzeit Chinesisch (zh-TW), Englisch (en), Deutsch (de). </a:t>
+            </a:r>
+          </a:p>
+          <a:p>
+            <a:pPr marL="285750" indent="-285750" algn="l">
+              <a:buFont typeface="Wingdings" panose="05000000000000000000" pitchFamily="2" charset="2"/>
+              <a:buChar char="u"/>
+            </a:pPr>
+            <a:r>
+              <a:rPr lang="de-DE" altLang="zh-TW" sz="1800" dirty="0">
+                <a:solidFill>
+                  <a:srgbClr val="002060"/>
+                </a:solidFill>
+              </a:rPr>
+              <a:t>AttachmentPath : Speicherort für Anhänge der Teilenummern. </a:t>
+            </a:r>
+          </a:p>
+          <a:p>
+            <a:pPr marL="285750" indent="-285750" algn="l">
+              <a:buFont typeface="Wingdings" panose="05000000000000000000" pitchFamily="2" charset="2"/>
+              <a:buChar char="u"/>
+            </a:pPr>
+            <a:r>
+              <a:rPr lang="de-DE" altLang="zh-TW" sz="1800" dirty="0">
+                <a:solidFill>
+                  <a:srgbClr val="002060"/>
+                </a:solidFill>
+              </a:rPr>
+              <a:t>Dieses System ist in "Backend-Dienst (API Server)" und "Client" unterteilt. Um einen unterbrechungsfreien Betrieb zu gewährleisten, ist der Backend-Dienst auf automatisches Management eingestellt.</a:t>
+            </a:r>
+            <a:endParaRPr lang="en-US" altLang="zh-TW" sz="1800" dirty="0">
+              <a:solidFill>
+                <a:srgbClr val="002060"/>
+              </a:solidFill>
+            </a:endParaRPr>
+          </a:p>
+        </p:txBody>
+      </p:sp>
+      <p:pic>
+        <p:nvPicPr>
+          <p:cNvPr id="5" name="圖片 4" descr="The image displays a configuration for a PartsManager API server, including connection strings, network information, and system settings.&#10;&#10;AI 產生的內容可能不正確。">
+            <a:extLst>
+              <a:ext uri="{FF2B5EF4-FFF2-40B4-BE49-F238E27FC236}">
+                <a16:creationId xmlns:a16="http://schemas.microsoft.com/office/drawing/2014/main" id="{30DD1355-25C1-9CCB-9F31-EA07E4A124A8}"/>
+              </a:ext>
+            </a:extLst>
+          </p:cNvPr>
+          <p:cNvPicPr>
+            <a:picLocks noChangeAspect="1"/>
+          </p:cNvPicPr>
+          <p:nvPr/>
+        </p:nvPicPr>
+        <p:blipFill>
+          <a:blip r:embed="rId3"/>
+          <a:stretch>
+            <a:fillRect/>
+          </a:stretch>
+        </p:blipFill>
+        <p:spPr>
+          <a:xfrm>
+            <a:off x="4531596" y="4024208"/>
+            <a:ext cx="4821997" cy="2438711"/>
+          </a:xfrm>
+          <a:prstGeom prst="rect">
+            <a:avLst/>
+          </a:prstGeom>
+        </p:spPr>
+      </p:pic>
+    </p:spTree>
+    <p:extLst>
+      <p:ext uri="{BB962C8B-B14F-4D97-AF65-F5344CB8AC3E}">
+        <p14:creationId xmlns:p14="http://schemas.microsoft.com/office/powerpoint/2010/main" val="665868171"/>
+      </p:ext>
+    </p:extLst>
+  </p:cSld>
+  <p:clrMapOvr>
+    <a:masterClrMapping/>
+  </p:clrMapOvr>
+</p:sld>
+</file>
+
+<file path=ppt/slides/slide4.xml><?xml version="1.0" encoding="utf-8"?>
+<p:sld xmlns:a="http://schemas.openxmlformats.org/drawingml/2006/main" xmlns:r="http://schemas.openxmlformats.org/officeDocument/2006/relationships" xmlns:p="http://schemas.openxmlformats.org/presentationml/2006/main">
+  <p:cSld>
+    <p:spTree>
+      <p:nvGrpSpPr>
+        <p:cNvPr id="1" name="">
+          <a:extLst>
+            <a:ext uri="{FF2B5EF4-FFF2-40B4-BE49-F238E27FC236}">
+              <a16:creationId xmlns:a16="http://schemas.microsoft.com/office/drawing/2014/main" id="{5119ADCA-4CFD-C13B-388C-A44B35EBA70E}"/>
+            </a:ext>
+          </a:extLst>
+        </p:cNvPr>
+        <p:cNvGrpSpPr/>
+        <p:nvPr/>
+      </p:nvGrpSpPr>
+      <p:grpSpPr>
+        <a:xfrm>
+          <a:off x="0" y="0"/>
+          <a:ext cx="0" cy="0"/>
+          <a:chOff x="0" y="0"/>
+          <a:chExt cx="0" cy="0"/>
+        </a:xfrm>
+      </p:grpSpPr>
+      <p:sp>
+        <p:nvSpPr>
+          <p:cNvPr id="3" name="標題 2">
+            <a:extLst>
+              <a:ext uri="{FF2B5EF4-FFF2-40B4-BE49-F238E27FC236}">
+                <a16:creationId xmlns:a16="http://schemas.microsoft.com/office/drawing/2014/main" id="{FEC18BF5-3A91-0ECF-C96D-B8A2F7881E4F}"/>
+              </a:ext>
+            </a:extLst>
+          </p:cNvPr>
+          <p:cNvSpPr>
+            <a:spLocks noGrp="1"/>
+          </p:cNvSpPr>
+          <p:nvPr>
+            <p:ph type="title"/>
+          </p:nvPr>
+        </p:nvSpPr>
+        <p:spPr>
+          <a:xfrm>
+            <a:off x="319892" y="107816"/>
+            <a:ext cx="11379200" cy="461659"/>
+          </a:xfrm>
+        </p:spPr>
+        <p:txBody>
+          <a:bodyPr>
+            <a:noAutofit/>
+          </a:bodyPr>
+          <a:lstStyle/>
+          <a:p>
+            <a:r>
+              <a:rPr lang="en-US" altLang="zh-TW" sz="2800" dirty="0" err="1"/>
+              <a:t>Systemeinstellungen</a:t>
+            </a:r>
+            <a:endParaRPr lang="zh-TW" altLang="en-US" sz="2800" dirty="0"/>
+          </a:p>
+        </p:txBody>
+      </p:sp>
+      <p:sp>
+        <p:nvSpPr>
+          <p:cNvPr id="35" name="標題 2">
+            <a:extLst>
+              <a:ext uri="{FF2B5EF4-FFF2-40B4-BE49-F238E27FC236}">
+                <a16:creationId xmlns:a16="http://schemas.microsoft.com/office/drawing/2014/main" id="{E0B6479F-9213-480E-0CD6-CFF621C1323D}"/>
+              </a:ext>
+            </a:extLst>
+          </p:cNvPr>
+          <p:cNvSpPr txBox="1">
+            <a:spLocks/>
+          </p:cNvSpPr>
+          <p:nvPr/>
+        </p:nvSpPr>
+        <p:spPr>
+          <a:xfrm>
+            <a:off x="208525" y="759756"/>
+            <a:ext cx="6822160" cy="1367026"/>
+          </a:xfrm>
+          <a:prstGeom prst="rect">
+            <a:avLst/>
+          </a:prstGeom>
+        </p:spPr>
+        <p:txBody>
+          <a:bodyPr vert="horz" lIns="0" tIns="45720" rIns="0" bIns="45720" rtlCol="0" anchor="t">
+            <a:noAutofit/>
+          </a:bodyPr>
+          <a:lstStyle>
+            <a:lvl1pPr algn="ctr" defTabSz="685783" rtl="0" eaLnBrk="1" latinLnBrk="0" hangingPunct="1">
+              <a:lnSpc>
+                <a:spcPct val="90000"/>
+              </a:lnSpc>
+              <a:spcBef>
+                <a:spcPct val="0"/>
+              </a:spcBef>
+              <a:buNone/>
+              <a:defRPr sz="2400" b="1" kern="1200">
+                <a:solidFill>
+                  <a:schemeClr val="tx2"/>
+                </a:solidFill>
+                <a:latin typeface="+mj-lt"/>
+                <a:ea typeface="+mj-ea"/>
+                <a:cs typeface="+mj-cs"/>
+              </a:defRPr>
+            </a:lvl1pPr>
+          </a:lstStyle>
+          <a:p>
+            <a:pPr algn="l"/>
+            <a:r>
+              <a:rPr lang="en-US" altLang="zh-TW" sz="1800" dirty="0">
+                <a:solidFill>
+                  <a:srgbClr val="0000FF"/>
+                </a:solidFill>
+              </a:rPr>
+              <a:t>2.</a:t>
+            </a:r>
+            <a:r>
+              <a:rPr lang="zh-TW" altLang="en-US" sz="1800" dirty="0">
+                <a:solidFill>
+                  <a:srgbClr val="002060"/>
+                </a:solidFill>
+              </a:rPr>
+              <a:t> </a:t>
+            </a:r>
+            <a:r>
+              <a:rPr lang="en-US" altLang="zh-TW" sz="1800" dirty="0">
+                <a:solidFill>
+                  <a:srgbClr val="0000FF"/>
+                </a:solidFill>
+              </a:rPr>
+              <a:t>Client</a:t>
+            </a:r>
+            <a:endParaRPr lang="zh-TW" altLang="en-US" sz="1800" dirty="0">
+              <a:solidFill>
+                <a:srgbClr val="0000FF"/>
+              </a:solidFill>
+            </a:endParaRPr>
+          </a:p>
+        </p:txBody>
+      </p:sp>
+      <p:pic>
+        <p:nvPicPr>
+          <p:cNvPr id="6" name="圖片 5" descr="The diagram shows a configuration for a Parts Manager Client with network settings, system language, and inventory options.&#10;&#10;AI 產生的內容可能不正確。">
+            <a:extLst>
+              <a:ext uri="{FF2B5EF4-FFF2-40B4-BE49-F238E27FC236}">
+                <a16:creationId xmlns:a16="http://schemas.microsoft.com/office/drawing/2014/main" id="{6CB2BC96-D29D-2635-95F9-9FD0C02A1B4C}"/>
+              </a:ext>
+            </a:extLst>
+          </p:cNvPr>
+          <p:cNvPicPr>
+            <a:picLocks noChangeAspect="1"/>
+          </p:cNvPicPr>
+          <p:nvPr/>
+        </p:nvPicPr>
+        <p:blipFill>
+          <a:blip r:embed="rId3"/>
+          <a:stretch>
+            <a:fillRect/>
+          </a:stretch>
+        </p:blipFill>
+        <p:spPr>
+          <a:xfrm>
+            <a:off x="4619380" y="4100660"/>
+            <a:ext cx="3440965" cy="2417975"/>
+          </a:xfrm>
+          <a:prstGeom prst="rect">
+            <a:avLst/>
+          </a:prstGeom>
+        </p:spPr>
+      </p:pic>
+      <p:sp>
+        <p:nvSpPr>
+          <p:cNvPr id="7" name="標題 2">
+            <a:extLst>
+              <a:ext uri="{FF2B5EF4-FFF2-40B4-BE49-F238E27FC236}">
+                <a16:creationId xmlns:a16="http://schemas.microsoft.com/office/drawing/2014/main" id="{BAF6F0C8-5D97-98DC-6943-1B49F09C40A5}"/>
+              </a:ext>
+            </a:extLst>
+          </p:cNvPr>
+          <p:cNvSpPr txBox="1">
+            <a:spLocks/>
+          </p:cNvSpPr>
+          <p:nvPr/>
+        </p:nvSpPr>
+        <p:spPr>
+          <a:xfrm>
+            <a:off x="537039" y="1228317"/>
+            <a:ext cx="11379200" cy="2978261"/>
+          </a:xfrm>
+          <a:prstGeom prst="rect">
+            <a:avLst/>
+          </a:prstGeom>
+        </p:spPr>
+        <p:txBody>
+          <a:bodyPr vert="horz" lIns="0" tIns="45720" rIns="0" bIns="45720" rtlCol="0" anchor="t">
+            <a:noAutofit/>
+          </a:bodyPr>
+          <a:lstStyle>
+            <a:lvl1pPr algn="ctr" defTabSz="685783" rtl="0" eaLnBrk="1" latinLnBrk="0" hangingPunct="1">
+              <a:lnSpc>
+                <a:spcPct val="90000"/>
+              </a:lnSpc>
+              <a:spcBef>
+                <a:spcPct val="0"/>
+              </a:spcBef>
+              <a:buNone/>
+              <a:defRPr sz="2400" b="1" kern="1200">
+                <a:solidFill>
+                  <a:schemeClr val="tx2"/>
+                </a:solidFill>
+                <a:latin typeface="+mj-lt"/>
+                <a:ea typeface="+mj-ea"/>
+                <a:cs typeface="+mj-cs"/>
+              </a:defRPr>
+            </a:lvl1pPr>
+          </a:lstStyle>
+          <a:p>
+            <a:pPr marL="285750" indent="-285750" algn="l">
+              <a:buFont typeface="Wingdings" panose="05000000000000000000" pitchFamily="2" charset="2"/>
+              <a:buChar char="u"/>
+            </a:pPr>
+            <a:r>
+              <a:rPr lang="de-DE" altLang="zh-TW" sz="1800" dirty="0">
+                <a:solidFill>
+                  <a:srgbClr val="002060"/>
+                </a:solidFill>
+              </a:rPr>
+              <a:t>Dieses System ist in "Backend-Dienst (API Server)" und "Client" unterteilt. Um einen unterbrechungsfreien Betrieb zu gewährleisten, ist der Backend-Dienst auf automatisches Management eingestellt. </a:t>
+            </a:r>
+          </a:p>
+          <a:p>
+            <a:pPr marL="285750" indent="-285750" algn="l">
+              <a:buFont typeface="Wingdings" panose="05000000000000000000" pitchFamily="2" charset="2"/>
+              <a:buChar char="u"/>
+            </a:pPr>
+            <a:r>
+              <a:rPr lang="de-DE" altLang="zh-TW" sz="1800" dirty="0">
+                <a:solidFill>
+                  <a:srgbClr val="002060"/>
+                </a:solidFill>
+              </a:rPr>
+              <a:t>Der Client bietet hauptsächlich eine Schnittstelle zur Ausführung von Vorgängen wie Warenausgang und Wareneingang. Es können mehrere im gesamten Werk vorhanden sein. </a:t>
+            </a:r>
+          </a:p>
+          <a:p>
+            <a:pPr marL="285750" indent="-285750" algn="l">
+              <a:buFont typeface="Wingdings" panose="05000000000000000000" pitchFamily="2" charset="2"/>
+              <a:buChar char="u"/>
+            </a:pPr>
+            <a:r>
+              <a:rPr lang="de-DE" altLang="zh-TW" sz="1800" dirty="0">
+                <a:solidFill>
+                  <a:srgbClr val="002060"/>
+                </a:solidFill>
+              </a:rPr>
+              <a:t>Die Client-Konfigurationsdatei befindet sich im Ordner als Config.ini. </a:t>
+            </a:r>
+          </a:p>
+          <a:p>
+            <a:pPr marL="285750" indent="-285750" algn="l">
+              <a:buFont typeface="Wingdings" panose="05000000000000000000" pitchFamily="2" charset="2"/>
+              <a:buChar char="u"/>
+            </a:pPr>
+            <a:r>
+              <a:rPr lang="de-DE" altLang="zh-TW" sz="1800" dirty="0">
+                <a:solidFill>
+                  <a:srgbClr val="002060"/>
+                </a:solidFill>
+              </a:rPr>
+              <a:t>ServerIP : Die IP des Backend-Servers. </a:t>
+            </a:r>
+          </a:p>
+          <a:p>
+            <a:pPr marL="285750" indent="-285750" algn="l">
+              <a:buFont typeface="Wingdings" panose="05000000000000000000" pitchFamily="2" charset="2"/>
+              <a:buChar char="u"/>
+            </a:pPr>
+            <a:r>
+              <a:rPr lang="de-DE" altLang="zh-TW" sz="1800" dirty="0">
+                <a:solidFill>
+                  <a:srgbClr val="002060"/>
+                </a:solidFill>
+              </a:rPr>
+              <a:t>ServerPort : Der Port des Backend-Servers, Standard ist 5000. </a:t>
+            </a:r>
+          </a:p>
+          <a:p>
+            <a:pPr marL="285750" indent="-285750" algn="l">
+              <a:buFont typeface="Wingdings" panose="05000000000000000000" pitchFamily="2" charset="2"/>
+              <a:buChar char="u"/>
+            </a:pPr>
+            <a:r>
+              <a:rPr lang="de-DE" altLang="zh-TW" sz="1800" dirty="0">
+                <a:solidFill>
+                  <a:srgbClr val="002060"/>
+                </a:solidFill>
+              </a:rPr>
+              <a:t>Language : System-Spracheinstellung, unterstützt derzeit Chinesisch (zh-TW), Englisch (en), Deutsch (de). </a:t>
+            </a:r>
+          </a:p>
+          <a:p>
+            <a:pPr marL="285750" indent="-285750" algn="l">
+              <a:buFont typeface="Wingdings" panose="05000000000000000000" pitchFamily="2" charset="2"/>
+              <a:buChar char="u"/>
+            </a:pPr>
+            <a:r>
+              <a:rPr lang="de-DE" altLang="zh-TW" sz="1800" dirty="0">
+                <a:solidFill>
+                  <a:srgbClr val="002060"/>
+                </a:solidFill>
+              </a:rPr>
+              <a:t>AutoLogoutMinutes : Automatische Abmeldung nach bestimmter Inaktivitätszeit.</a:t>
+            </a:r>
+            <a:endParaRPr lang="en-US" altLang="zh-TW" sz="1800" dirty="0">
+              <a:solidFill>
+                <a:srgbClr val="002060"/>
+              </a:solidFill>
+            </a:endParaRPr>
+          </a:p>
+        </p:txBody>
+      </p:sp>
+    </p:spTree>
+    <p:extLst>
+      <p:ext uri="{BB962C8B-B14F-4D97-AF65-F5344CB8AC3E}">
+        <p14:creationId xmlns:p14="http://schemas.microsoft.com/office/powerpoint/2010/main" val="1582073006"/>
+      </p:ext>
+    </p:extLst>
+  </p:cSld>
+  <p:clrMapOvr>
+    <a:masterClrMapping/>
+  </p:clrMapOvr>
+</p:sld>
+</file>
+
+<file path=ppt/slides/slide5.xml><?xml version="1.0" encoding="utf-8"?>
 <p:sld xmlns:a="http://schemas.openxmlformats.org/drawingml/2006/main" xmlns:r="http://schemas.openxmlformats.org/officeDocument/2006/relationships" xmlns:p="http://schemas.openxmlformats.org/presentationml/2006/main">
   <p:cSld>
     <p:spTree>
@@ -8145,6 +11032,20 @@
               </a:rPr>
               <a:t>Das System unterscheidet vier Berechtigungsstufen, um die Datensicherheit zu gewährleisten und die Benutzeroberfläche übersichtlich zu halten. Je kleiner die Zahl, desto höher die Berechtigung.</a:t>
             </a:r>
+          </a:p>
+          <a:p>
+            <a:pPr marL="285750" indent="-285750" algn="l">
+              <a:buFont typeface="Wingdings" panose="05000000000000000000" pitchFamily="2" charset="2"/>
+              <a:buChar char="u"/>
+            </a:pPr>
+            <a:r>
+              <a:rPr lang="de-DE" altLang="zh-TW" sz="1800" dirty="0">
+                <a:solidFill>
+                  <a:srgbClr val="002060"/>
+                </a:solidFill>
+              </a:rPr>
+              <a:t>Das System hat einen Standard-Administrator-Benutzernamen (admin) und ein Passwort (admin).</a:t>
+            </a:r>
             <a:endParaRPr lang="zh-TW" altLang="en-US" sz="1800" dirty="0">
               <a:solidFill>
                 <a:srgbClr val="002060"/>
@@ -8165,13 +11066,7 @@
           <p:cNvGraphicFramePr>
             <a:graphicFrameLocks noGrp="1"/>
           </p:cNvGraphicFramePr>
-          <p:nvPr>
-            <p:extLst>
-              <p:ext uri="{D42A27DB-BD31-4B8C-83A1-F6EECF244321}">
-                <p14:modId xmlns:p14="http://schemas.microsoft.com/office/powerpoint/2010/main" val="314637140"/>
-              </p:ext>
-            </p:extLst>
-          </p:nvPr>
+          <p:nvPr/>
         </p:nvGraphicFramePr>
         <p:xfrm>
           <a:off x="1297352" y="1729344"/>
@@ -9281,7 +12176,7 @@
     </p:spTree>
     <p:extLst>
       <p:ext uri="{BB962C8B-B14F-4D97-AF65-F5344CB8AC3E}">
-        <p14:creationId xmlns:p14="http://schemas.microsoft.com/office/powerpoint/2010/main" val="1844310951"/>
+        <p14:creationId xmlns:p14="http://schemas.microsoft.com/office/powerpoint/2010/main" val="192316106"/>
       </p:ext>
     </p:extLst>
   </p:cSld>
@@ -9291,7 +12186,7 @@
 </p:sld>
 </file>
 
-<file path=ppt/slides/slide4.xml><?xml version="1.0" encoding="utf-8"?>
+<file path=ppt/slides/slide6.xml><?xml version="1.0" encoding="utf-8"?>
 <p:sld xmlns:a="http://schemas.openxmlformats.org/drawingml/2006/main" xmlns:r="http://schemas.openxmlformats.org/officeDocument/2006/relationships" xmlns:p="http://schemas.openxmlformats.org/presentationml/2006/main">
   <p:cSld>
     <p:spTree>
@@ -10062,7 +12957,7 @@
     </p:spTree>
     <p:extLst>
       <p:ext uri="{BB962C8B-B14F-4D97-AF65-F5344CB8AC3E}">
-        <p14:creationId xmlns:p14="http://schemas.microsoft.com/office/powerpoint/2010/main" val="373521678"/>
+        <p14:creationId xmlns:p14="http://schemas.microsoft.com/office/powerpoint/2010/main" val="1565075013"/>
       </p:ext>
     </p:extLst>
   </p:cSld>
@@ -10072,7 +12967,7 @@
 </p:sld>
 </file>
 
-<file path=ppt/slides/slide5.xml><?xml version="1.0" encoding="utf-8"?>
+<file path=ppt/slides/slide7.xml><?xml version="1.0" encoding="utf-8"?>
 <p:sld xmlns:a="http://schemas.openxmlformats.org/drawingml/2006/main" xmlns:r="http://schemas.openxmlformats.org/officeDocument/2006/relationships" xmlns:p="http://schemas.openxmlformats.org/presentationml/2006/main">
   <p:cSld>
     <p:spTree>
@@ -10712,7 +13607,7 @@
     </p:spTree>
     <p:extLst>
       <p:ext uri="{BB962C8B-B14F-4D97-AF65-F5344CB8AC3E}">
-        <p14:creationId xmlns:p14="http://schemas.microsoft.com/office/powerpoint/2010/main" val="2504131418"/>
+        <p14:creationId xmlns:p14="http://schemas.microsoft.com/office/powerpoint/2010/main" val="828588465"/>
       </p:ext>
     </p:extLst>
   </p:cSld>
@@ -10722,7 +13617,7 @@
 </p:sld>
 </file>
 
-<file path=ppt/slides/slide6.xml><?xml version="1.0" encoding="utf-8"?>
+<file path=ppt/slides/slide8.xml><?xml version="1.0" encoding="utf-8"?>
 <p:sld xmlns:a="http://schemas.openxmlformats.org/drawingml/2006/main" xmlns:r="http://schemas.openxmlformats.org/officeDocument/2006/relationships" xmlns:p="http://schemas.openxmlformats.org/presentationml/2006/main">
   <p:cSld>
     <p:spTree>
@@ -10774,21 +13669,10 @@
           <a:lstStyle/>
           <a:p>
             <a:r>
-              <a:rPr lang="en-US" altLang="zh-TW" sz="2800" dirty="0" err="1"/>
-              <a:t>Materialstammverwaltung</a:t>
-            </a:r>
-            <a:r>
-              <a:rPr lang="en-US" altLang="zh-TW" sz="2800" dirty="0"/>
-              <a:t>- </a:t>
-            </a:r>
-            <a:r>
-              <a:rPr lang="zh-TW" altLang="en-US" sz="2800" dirty="0"/>
-              <a:t> </a:t>
-            </a:r>
-            <a:r>
-              <a:rPr lang="en-US" altLang="zh-TW" sz="2800" dirty="0"/>
-              <a:t>Level 1 &amp; 2</a:t>
-            </a:r>
+              <a:rPr lang="de-DE" altLang="zh-TW" sz="2800" dirty="0"/>
+              <a:t>Materialstamm verwalten (Material Master) - Nur Level 1 &amp; 2</a:t>
+            </a:r>
+            <a:endParaRPr lang="en-US" altLang="zh-TW" sz="2800" dirty="0"/>
           </a:p>
         </p:txBody>
       </p:sp>
@@ -10808,7 +13692,7 @@
         </p:nvSpPr>
         <p:spPr>
           <a:xfrm>
-            <a:off x="217952" y="1200293"/>
+            <a:off x="217952" y="1068315"/>
             <a:ext cx="5511319" cy="461659"/>
           </a:xfrm>
           <a:prstGeom prst="rect">
@@ -10854,23 +13738,7 @@
                   <a:srgbClr val="0000FF"/>
                 </a:solidFill>
               </a:rPr>
-              <a:t>anlegen</a:t>
-            </a:r>
-            <a:r>
-              <a:rPr lang="en-US" altLang="zh-TW" sz="1800" dirty="0">
-                <a:solidFill>
-                  <a:srgbClr val="0000FF"/>
-                </a:solidFill>
-              </a:rPr>
-              <a:t> / </a:t>
-            </a:r>
-            <a:r>
-              <a:rPr lang="en-US" altLang="zh-TW" sz="1800" dirty="0" err="1">
-                <a:solidFill>
-                  <a:srgbClr val="0000FF"/>
-                </a:solidFill>
-              </a:rPr>
-              <a:t>bearbeiten</a:t>
+              <a:t>erstellen</a:t>
             </a:r>
             <a:endParaRPr lang="zh-TW" altLang="en-US" sz="1800" dirty="0">
               <a:solidFill>
@@ -10896,8 +13764,8 @@
         </p:nvSpPr>
         <p:spPr>
           <a:xfrm>
-            <a:off x="537040" y="1661951"/>
-            <a:ext cx="6042870" cy="3060877"/>
+            <a:off x="537039" y="1529973"/>
+            <a:ext cx="6768330" cy="5002800"/>
           </a:xfrm>
           <a:prstGeom prst="rect">
             <a:avLst/>
@@ -10937,7 +13805,7 @@
                   <a:srgbClr val="002060"/>
                 </a:solidFill>
               </a:rPr>
-              <a:t>Teilenummer: Eindeutige Kennung, nach dem Speichern nicht mehr änderbar.</a:t>
+              <a:t>Teilenummer: Eindeutige Kennung, kann nach dem Speichern nicht mehr geändert werden. </a:t>
             </a:r>
           </a:p>
           <a:p>
@@ -10946,28 +13814,12 @@
               <a:buAutoNum type="arabicPeriod"/>
             </a:pPr>
             <a:r>
-              <a:rPr lang="en-US" altLang="zh-TW" sz="1800" dirty="0">
+              <a:rPr lang="de-DE" altLang="zh-TW" sz="1800" dirty="0">
                 <a:solidFill>
                   <a:srgbClr val="002060"/>
                 </a:solidFill>
               </a:rPr>
-              <a:t>Name: </a:t>
-            </a:r>
-            <a:r>
-              <a:rPr lang="en-US" altLang="zh-TW" sz="1800" dirty="0" err="1">
-                <a:solidFill>
-                  <a:srgbClr val="002060"/>
-                </a:solidFill>
-              </a:rPr>
-              <a:t>Benutzerdefinierter</a:t>
-            </a:r>
-            <a:r>
-              <a:rPr lang="en-US" altLang="zh-TW" sz="1800" dirty="0">
-                <a:solidFill>
-                  <a:srgbClr val="002060"/>
-                </a:solidFill>
-              </a:rPr>
-              <a:t> Name.</a:t>
+              <a:t>Name: Benutzerdefinierter Name. </a:t>
             </a:r>
           </a:p>
           <a:p>
@@ -10976,52 +13828,12 @@
               <a:buAutoNum type="arabicPeriod"/>
             </a:pPr>
             <a:r>
-              <a:rPr lang="en-US" altLang="zh-TW" sz="1800" dirty="0" err="1">
+              <a:rPr lang="de-DE" altLang="zh-TW" sz="1800" dirty="0">
                 <a:solidFill>
                   <a:srgbClr val="002060"/>
                 </a:solidFill>
               </a:rPr>
-              <a:t>Spezifikation</a:t>
-            </a:r>
-            <a:r>
-              <a:rPr lang="en-US" altLang="zh-TW" sz="1800" dirty="0">
-                <a:solidFill>
-                  <a:srgbClr val="002060"/>
-                </a:solidFill>
-              </a:rPr>
-              <a:t>: </a:t>
-            </a:r>
-            <a:r>
-              <a:rPr lang="en-US" altLang="zh-TW" sz="1800" dirty="0" err="1">
-                <a:solidFill>
-                  <a:srgbClr val="002060"/>
-                </a:solidFill>
-              </a:rPr>
-              <a:t>Benutzerdefinierte</a:t>
-            </a:r>
-            <a:r>
-              <a:rPr lang="en-US" altLang="zh-TW" sz="1800" dirty="0">
-                <a:solidFill>
-                  <a:srgbClr val="002060"/>
-                </a:solidFill>
-              </a:rPr>
-              <a:t> </a:t>
-            </a:r>
-            <a:r>
-              <a:rPr lang="en-US" altLang="zh-TW" sz="1800" dirty="0" err="1">
-                <a:solidFill>
-                  <a:srgbClr val="002060"/>
-                </a:solidFill>
-              </a:rPr>
-              <a:t>Beschreibung</a:t>
-            </a:r>
-            <a:r>
-              <a:rPr lang="en-US" altLang="zh-TW" sz="1800" dirty="0">
-                <a:solidFill>
-                  <a:srgbClr val="002060"/>
-                </a:solidFill>
-              </a:rPr>
-              <a:t>.</a:t>
+              <a:t>Spezifikation: Benutzerdefinierte Beschreibung.</a:t>
             </a:r>
           </a:p>
           <a:p>
@@ -11035,7 +13847,7 @@
                   <a:srgbClr val="002060"/>
                 </a:solidFill>
               </a:rPr>
-              <a:t>Sicherheitsbestand: Festlegen der Mindest-Sicherheitsmenge für dieses Teil.</a:t>
+              <a:t>Sicherheitsbestand: Legt die Mindestsicherheitsmenge für dieses Teil fest. </a:t>
             </a:r>
           </a:p>
           <a:p>
@@ -11049,7 +13861,7 @@
                   <a:srgbClr val="002060"/>
                 </a:solidFill>
               </a:rPr>
-              <a:t>Lieferzeit (Tage): Festlegen der benötigten Tage für die Wiederbeschaffung.</a:t>
+              <a:t>Lieferzeit (Tage): Legt die Anzahl der Tage für die Wiederbeschaffung fest. </a:t>
             </a:r>
           </a:p>
           <a:p>
@@ -11063,66 +13875,13 @@
                   <a:srgbClr val="002060"/>
                 </a:solidFill>
               </a:rPr>
-              <a:t>Station: Zugehörige Station des Teils, optional.</a:t>
-            </a:r>
-            <a:endParaRPr lang="zh-TW" altLang="en-US" sz="1800" dirty="0">
-              <a:solidFill>
-                <a:srgbClr val="002060"/>
-              </a:solidFill>
-            </a:endParaRPr>
+              <a:t>Lieferant: Name des Lieferanten. </a:t>
+            </a:r>
           </a:p>
-        </p:txBody>
-      </p:sp>
-      <p:sp>
-        <p:nvSpPr>
-          <p:cNvPr id="2" name="標題 2">
-            <a:extLst>
-              <a:ext uri="{FF2B5EF4-FFF2-40B4-BE49-F238E27FC236}">
-                <a16:creationId xmlns:a16="http://schemas.microsoft.com/office/drawing/2014/main" id="{88BDEFE0-8625-702B-A709-E4CC6D5C1BDF}"/>
-              </a:ext>
-            </a:extLst>
-          </p:cNvPr>
-          <p:cNvSpPr txBox="1">
-            <a:spLocks/>
-          </p:cNvSpPr>
-          <p:nvPr/>
-        </p:nvSpPr>
-        <p:spPr>
-          <a:xfrm>
-            <a:off x="537039" y="546476"/>
-            <a:ext cx="11162053" cy="1005790"/>
-          </a:xfrm>
-          <a:prstGeom prst="rect">
-            <a:avLst/>
-          </a:prstGeom>
-        </p:spPr>
-        <p:txBody>
-          <a:bodyPr vert="horz" lIns="0" tIns="45720" rIns="0" bIns="45720" rtlCol="0" anchor="t">
-            <a:noAutofit/>
-          </a:bodyPr>
-          <a:lstStyle>
-            <a:lvl1pPr algn="ctr" defTabSz="685783" rtl="0" eaLnBrk="1" latinLnBrk="0" hangingPunct="1">
-              <a:lnSpc>
-                <a:spcPct val="90000"/>
-              </a:lnSpc>
-              <a:spcBef>
-                <a:spcPct val="0"/>
-              </a:spcBef>
-              <a:buNone/>
-              <a:defRPr sz="2400" b="1" kern="1200">
-                <a:solidFill>
-                  <a:schemeClr val="tx2"/>
-                </a:solidFill>
-                <a:latin typeface="+mj-lt"/>
-                <a:ea typeface="+mj-ea"/>
-                <a:cs typeface="+mj-cs"/>
-              </a:defRPr>
-            </a:lvl1pPr>
-          </a:lstStyle>
           <a:p>
-            <a:pPr marL="285750" indent="-285750" algn="l">
-              <a:buFont typeface="Wingdings" panose="05000000000000000000" pitchFamily="2" charset="2"/>
-              <a:buChar char="u"/>
+            <a:pPr marL="342900" indent="-342900" algn="l">
+              <a:buFont typeface="+mj-lt"/>
+              <a:buAutoNum type="arabicPeriod"/>
             </a:pPr>
             <a:r>
               <a:rPr lang="de-DE" altLang="zh-TW" sz="1800" dirty="0">
@@ -11130,7 +13889,49 @@
                   <a:srgbClr val="002060"/>
                 </a:solidFill>
               </a:rPr>
-              <a:t>Erstellen oder Bearbeiten von grundlegenden Teileinformationen.</a:t>
+              <a:t>Hersteller: Name des Herstellers. </a:t>
+            </a:r>
+          </a:p>
+          <a:p>
+            <a:pPr marL="342900" indent="-342900" algn="l">
+              <a:buFont typeface="+mj-lt"/>
+              <a:buAutoNum type="arabicPeriod"/>
+            </a:pPr>
+            <a:r>
+              <a:rPr lang="de-DE" altLang="zh-TW" sz="1800" dirty="0">
+                <a:solidFill>
+                  <a:srgbClr val="002060"/>
+                </a:solidFill>
+              </a:rPr>
+              <a:t>Anfangsbestand: Aktueller Bestand. </a:t>
+            </a:r>
+          </a:p>
+          <a:p>
+            <a:pPr marL="342900" indent="-342900" algn="l">
+              <a:buFont typeface="+mj-lt"/>
+              <a:buAutoNum type="arabicPeriod"/>
+            </a:pPr>
+            <a:r>
+              <a:rPr lang="de-DE" altLang="zh-TW" sz="1800" dirty="0">
+                <a:solidFill>
+                  <a:srgbClr val="002060"/>
+                </a:solidFill>
+              </a:rPr>
+              <a:t>Anhänge: Unterstützt nur PDF-Dateien, maximal zwei Anhänge (Anhänge (Max 2 PDF)) pro Teilenummer über PDF hochladen. Maximal 2MB pro Datei.</a:t>
+            </a:r>
+          </a:p>
+          <a:p>
+            <a:pPr marL="342900" indent="-342900" algn="l">
+              <a:buFont typeface="+mj-lt"/>
+              <a:buAutoNum type="arabicPeriod"/>
+            </a:pPr>
+            <a:r>
+              <a:rPr lang="de-DE" altLang="zh-TW" sz="1800" dirty="0">
+                <a:solidFill>
+                  <a:srgbClr val="002060"/>
+                </a:solidFill>
+              </a:rPr>
+              <a:t>Basisinformationen für das Teil erstellen. Speichern mit Speichern, Abbruch mit Abbrechen. </a:t>
             </a:r>
             <a:endParaRPr lang="zh-TW" altLang="en-US" sz="1800" dirty="0">
               <a:solidFill>
@@ -11142,10 +13943,10 @@
       </p:sp>
       <p:pic>
         <p:nvPicPr>
-          <p:cNvPr id="18" name="圖片 17" descr="The image shows a form or document interface with fields for Name, Specification, Security, and Delivery Time, along with buttons for saving and canceling.&#10;&#10;AI 產生的內容可能不正確。">
+          <p:cNvPr id="7" name="圖片 6" descr="The image is a user interface for a document management system, displaying a form for entering and managing supply chain details, including fields for product numbers, names, specifications, safety stock, delivery time, supplier, manufacturer, initial stock, and a storage location for PDF attachments.&#10;&#10;AI 產生的內容可能不正確。">
             <a:extLst>
               <a:ext uri="{FF2B5EF4-FFF2-40B4-BE49-F238E27FC236}">
-                <a16:creationId xmlns:a16="http://schemas.microsoft.com/office/drawing/2014/main" id="{9B8811BA-2EA6-1756-0F73-506525E07040}"/>
+                <a16:creationId xmlns:a16="http://schemas.microsoft.com/office/drawing/2014/main" id="{5BBE7AC6-3723-59A0-82A6-A3588E52655A}"/>
               </a:ext>
             </a:extLst>
           </p:cNvPr>
@@ -11162,8 +13963,8 @@
         </p:blipFill>
         <p:spPr>
           <a:xfrm>
-            <a:off x="6579910" y="1661951"/>
-            <a:ext cx="5201836" cy="4525458"/>
+            <a:off x="7349500" y="832392"/>
+            <a:ext cx="4305461" cy="5765524"/>
           </a:xfrm>
           <a:prstGeom prst="rect">
             <a:avLst/>
@@ -11183,7 +13984,7 @@
 </p:sld>
 </file>
 
-<file path=ppt/slides/slide7.xml><?xml version="1.0" encoding="utf-8"?>
+<file path=ppt/slides/slide9.xml><?xml version="1.0" encoding="utf-8"?>
 <p:sld xmlns:a="http://schemas.openxmlformats.org/drawingml/2006/main" xmlns:r="http://schemas.openxmlformats.org/officeDocument/2006/relationships" xmlns:p="http://schemas.openxmlformats.org/presentationml/2006/main">
   <p:cSld>
     <p:spTree>
@@ -11191,7 +13992,7 @@
         <p:cNvPr id="1" name="">
           <a:extLst>
             <a:ext uri="{FF2B5EF4-FFF2-40B4-BE49-F238E27FC236}">
-              <a16:creationId xmlns:a16="http://schemas.microsoft.com/office/drawing/2014/main" id="{888CCBA7-0506-C670-1535-B08FD3DB7191}"/>
+              <a16:creationId xmlns:a16="http://schemas.microsoft.com/office/drawing/2014/main" id="{1B04A490-AFC0-0EA3-F444-4F34D190A031}"/>
             </a:ext>
           </a:extLst>
         </p:cNvPr>
@@ -11206,12 +14007,42 @@
           <a:chExt cx="0" cy="0"/>
         </a:xfrm>
       </p:grpSpPr>
+      <p:pic>
+        <p:nvPicPr>
+          <p:cNvPr id="14" name="圖片 13" descr="Vorlage erstellen&#10;&#10;AI 產生的內容可能不正確。">
+            <a:extLst>
+              <a:ext uri="{FF2B5EF4-FFF2-40B4-BE49-F238E27FC236}">
+                <a16:creationId xmlns:a16="http://schemas.microsoft.com/office/drawing/2014/main" id="{A184C5B6-8CCC-C23F-F649-6FFFA50F00A8}"/>
+              </a:ext>
+            </a:extLst>
+          </p:cNvPr>
+          <p:cNvPicPr>
+            <a:picLocks noChangeAspect="1"/>
+          </p:cNvPicPr>
+          <p:nvPr/>
+        </p:nvPicPr>
+        <p:blipFill>
+          <a:blip r:embed="rId3"/>
+          <a:stretch>
+            <a:fillRect/>
+          </a:stretch>
+        </p:blipFill>
+        <p:spPr>
+          <a:xfrm>
+            <a:off x="2726047" y="2528399"/>
+            <a:ext cx="6566890" cy="3934639"/>
+          </a:xfrm>
+          <a:prstGeom prst="rect">
+            <a:avLst/>
+          </a:prstGeom>
+        </p:spPr>
+      </p:pic>
       <p:sp>
         <p:nvSpPr>
           <p:cNvPr id="3" name="標題 2">
             <a:extLst>
               <a:ext uri="{FF2B5EF4-FFF2-40B4-BE49-F238E27FC236}">
-                <a16:creationId xmlns:a16="http://schemas.microsoft.com/office/drawing/2014/main" id="{28074E02-8E7D-C833-0BFF-C2993072FFA4}"/>
+                <a16:creationId xmlns:a16="http://schemas.microsoft.com/office/drawing/2014/main" id="{470860C4-560A-7D3C-B577-198DA450D664}"/>
               </a:ext>
             </a:extLst>
           </p:cNvPr>
@@ -11235,21 +14066,10 @@
           <a:lstStyle/>
           <a:p>
             <a:r>
-              <a:rPr lang="en-US" altLang="zh-TW" sz="2800" dirty="0" err="1"/>
-              <a:t>Materialstammverwaltung</a:t>
-            </a:r>
-            <a:r>
-              <a:rPr lang="en-US" altLang="zh-TW" sz="2800" dirty="0"/>
-              <a:t>- </a:t>
-            </a:r>
-            <a:r>
-              <a:rPr lang="zh-TW" altLang="en-US" sz="2800" dirty="0"/>
-              <a:t> </a:t>
-            </a:r>
-            <a:r>
-              <a:rPr lang="en-US" altLang="zh-TW" sz="2800" dirty="0"/>
-              <a:t>Level 1 &amp; 2</a:t>
-            </a:r>
+              <a:rPr lang="de-DE" altLang="zh-TW" sz="2800" dirty="0"/>
+              <a:t>Materialstamm verwalten (Material Master) - Nur Level 1 &amp; 2</a:t>
+            </a:r>
+            <a:endParaRPr lang="en-US" altLang="zh-TW" sz="2800" dirty="0"/>
           </a:p>
         </p:txBody>
       </p:sp>
@@ -11258,7 +14078,7 @@
           <p:cNvPr id="53" name="標題 2">
             <a:extLst>
               <a:ext uri="{FF2B5EF4-FFF2-40B4-BE49-F238E27FC236}">
-                <a16:creationId xmlns:a16="http://schemas.microsoft.com/office/drawing/2014/main" id="{DD32D693-B9CD-C627-7DB5-BC71BD85CCD9}"/>
+                <a16:creationId xmlns:a16="http://schemas.microsoft.com/office/drawing/2014/main" id="{9FF7B84F-902C-20F5-F348-2781EDB663A7}"/>
               </a:ext>
             </a:extLst>
           </p:cNvPr>
@@ -11269,7 +14089,7 @@
         </p:nvSpPr>
         <p:spPr>
           <a:xfrm>
-            <a:off x="217952" y="1200293"/>
+            <a:off x="183997" y="680057"/>
             <a:ext cx="5511319" cy="461659"/>
           </a:xfrm>
           <a:prstGeom prst="rect">
@@ -11315,47 +14135,7 @@
                   <a:srgbClr val="0000FF"/>
                 </a:solidFill>
               </a:rPr>
-              <a:t>Bearbeiten</a:t>
-            </a:r>
-            <a:r>
-              <a:rPr lang="zh-TW" altLang="en-US" sz="1800" dirty="0">
-                <a:solidFill>
-                  <a:srgbClr val="0000FF"/>
-                </a:solidFill>
-              </a:rPr>
-              <a:t> </a:t>
-            </a:r>
-            <a:r>
-              <a:rPr lang="en-US" altLang="zh-TW" sz="1800" dirty="0">
-                <a:solidFill>
-                  <a:srgbClr val="0000FF"/>
-                </a:solidFill>
-              </a:rPr>
-              <a:t>/</a:t>
-            </a:r>
-            <a:r>
-              <a:rPr lang="zh-TW" altLang="en-US" sz="1800" dirty="0">
-                <a:solidFill>
-                  <a:srgbClr val="0000FF"/>
-                </a:solidFill>
-              </a:rPr>
-              <a:t> </a:t>
-            </a:r>
-            <a:r>
-              <a:rPr lang="en-US" altLang="zh-TW" sz="1800" dirty="0" err="1">
-                <a:solidFill>
-                  <a:srgbClr val="0000FF"/>
-                </a:solidFill>
-              </a:rPr>
-              <a:t>Löschen</a:t>
-            </a:r>
-            <a:r>
-              <a:rPr lang="en-US" altLang="zh-TW" sz="1800" dirty="0">
-                <a:solidFill>
-                  <a:srgbClr val="0000FF"/>
-                </a:solidFill>
-              </a:rPr>
-              <a:t> </a:t>
+              <a:t>Chargen-Materialimport</a:t>
             </a:r>
             <a:endParaRPr lang="zh-TW" altLang="en-US" sz="1800" dirty="0">
               <a:solidFill>
@@ -11367,10 +14147,10 @@
       </p:sp>
       <p:sp>
         <p:nvSpPr>
-          <p:cNvPr id="2" name="標題 2">
+          <p:cNvPr id="22" name="標題 2">
             <a:extLst>
               <a:ext uri="{FF2B5EF4-FFF2-40B4-BE49-F238E27FC236}">
-                <a16:creationId xmlns:a16="http://schemas.microsoft.com/office/drawing/2014/main" id="{1E1055AF-5024-F161-5AF8-BD0BD30461A0}"/>
+                <a16:creationId xmlns:a16="http://schemas.microsoft.com/office/drawing/2014/main" id="{BEA47B21-B138-F05A-89BF-DB492F5ACE61}"/>
               </a:ext>
             </a:extLst>
           </p:cNvPr>
@@ -11381,8 +14161,8 @@
         </p:nvSpPr>
         <p:spPr>
           <a:xfrm>
-            <a:off x="537039" y="546476"/>
-            <a:ext cx="11162053" cy="1005790"/>
+            <a:off x="503085" y="1141715"/>
+            <a:ext cx="9970094" cy="1592058"/>
           </a:xfrm>
           <a:prstGeom prst="rect">
             <a:avLst/>
@@ -11412,133 +14192,6 @@
             </a:lvl1pPr>
           </a:lstStyle>
           <a:p>
-            <a:pPr marL="285750" indent="-285750" algn="l">
-              <a:buFont typeface="Wingdings" panose="05000000000000000000" pitchFamily="2" charset="2"/>
-              <a:buChar char="u"/>
-            </a:pPr>
-            <a:r>
-              <a:rPr lang="de-DE" altLang="zh-TW" sz="1800" dirty="0">
-                <a:solidFill>
-                  <a:srgbClr val="002060"/>
-                </a:solidFill>
-              </a:rPr>
-              <a:t>Grundlegende Teileinformationen bearbeiten oder löschen. Klicken Sie in der Bestandsabfrage mit der rechten Maustaste auf das Material, um das Menü aufzurufen</a:t>
-            </a:r>
-            <a:endParaRPr lang="zh-TW" altLang="en-US" sz="1800" dirty="0">
-              <a:solidFill>
-                <a:srgbClr val="002060"/>
-              </a:solidFill>
-            </a:endParaRPr>
-          </a:p>
-        </p:txBody>
-      </p:sp>
-      <p:pic>
-        <p:nvPicPr>
-          <p:cNvPr id="13" name="圖片 12" descr="The image shows a user interface displaying an edit mode for a material document, with fields for part number, name, specifications, delivery time, and a save/cancel option.&#10;&#10;AI 產生的內容可能不正確。">
-            <a:extLst>
-              <a:ext uri="{FF2B5EF4-FFF2-40B4-BE49-F238E27FC236}">
-                <a16:creationId xmlns:a16="http://schemas.microsoft.com/office/drawing/2014/main" id="{33ABDDF5-328C-09B5-84BD-B11995E41444}"/>
-              </a:ext>
-            </a:extLst>
-          </p:cNvPr>
-          <p:cNvPicPr>
-            <a:picLocks noChangeAspect="1"/>
-          </p:cNvPicPr>
-          <p:nvPr/>
-        </p:nvPicPr>
-        <p:blipFill>
-          <a:blip r:embed="rId3"/>
-          <a:stretch>
-            <a:fillRect/>
-          </a:stretch>
-        </p:blipFill>
-        <p:spPr>
-          <a:xfrm>
-            <a:off x="6519085" y="1552265"/>
-            <a:ext cx="5499094" cy="4864299"/>
-          </a:xfrm>
-          <a:prstGeom prst="rect">
-            <a:avLst/>
-          </a:prstGeom>
-        </p:spPr>
-      </p:pic>
-      <p:pic>
-        <p:nvPicPr>
-          <p:cNvPr id="15" name="圖片 14" descr="0.2-4mm&#10;&#10;AI 產生的內容可能不正確。">
-            <a:extLst>
-              <a:ext uri="{FF2B5EF4-FFF2-40B4-BE49-F238E27FC236}">
-                <a16:creationId xmlns:a16="http://schemas.microsoft.com/office/drawing/2014/main" id="{12AF0D11-F4B1-82F6-1BD4-F83EF7F9DFD3}"/>
-              </a:ext>
-            </a:extLst>
-          </p:cNvPr>
-          <p:cNvPicPr>
-            <a:picLocks noChangeAspect="1"/>
-          </p:cNvPicPr>
-          <p:nvPr/>
-        </p:nvPicPr>
-        <p:blipFill>
-          <a:blip r:embed="rId4"/>
-          <a:stretch>
-            <a:fillRect/>
-          </a:stretch>
-        </p:blipFill>
-        <p:spPr>
-          <a:xfrm>
-            <a:off x="1205691" y="4006392"/>
-            <a:ext cx="4467225" cy="2664693"/>
-          </a:xfrm>
-          <a:prstGeom prst="rect">
-            <a:avLst/>
-          </a:prstGeom>
-        </p:spPr>
-      </p:pic>
-      <p:sp>
-        <p:nvSpPr>
-          <p:cNvPr id="4" name="標題 2">
-            <a:extLst>
-              <a:ext uri="{FF2B5EF4-FFF2-40B4-BE49-F238E27FC236}">
-                <a16:creationId xmlns:a16="http://schemas.microsoft.com/office/drawing/2014/main" id="{717E2581-D148-50A2-AAF7-3F8BC17A4D7F}"/>
-              </a:ext>
-            </a:extLst>
-          </p:cNvPr>
-          <p:cNvSpPr txBox="1">
-            <a:spLocks/>
-          </p:cNvSpPr>
-          <p:nvPr/>
-        </p:nvSpPr>
-        <p:spPr>
-          <a:xfrm>
-            <a:off x="537039" y="1645933"/>
-            <a:ext cx="6042870" cy="3060877"/>
-          </a:xfrm>
-          <a:prstGeom prst="rect">
-            <a:avLst/>
-          </a:prstGeom>
-        </p:spPr>
-        <p:txBody>
-          <a:bodyPr vert="horz" lIns="0" tIns="45720" rIns="0" bIns="45720" rtlCol="0" anchor="t">
-            <a:noAutofit/>
-          </a:bodyPr>
-          <a:lstStyle>
-            <a:lvl1pPr algn="ctr" defTabSz="685783" rtl="0" eaLnBrk="1" latinLnBrk="0" hangingPunct="1">
-              <a:lnSpc>
-                <a:spcPct val="90000"/>
-              </a:lnSpc>
-              <a:spcBef>
-                <a:spcPct val="0"/>
-              </a:spcBef>
-              <a:buNone/>
-              <a:defRPr sz="2400" b="1" kern="1200">
-                <a:solidFill>
-                  <a:schemeClr val="tx2"/>
-                </a:solidFill>
-                <a:latin typeface="+mj-lt"/>
-                <a:ea typeface="+mj-ea"/>
-                <a:cs typeface="+mj-cs"/>
-              </a:defRPr>
-            </a:lvl1pPr>
-          </a:lstStyle>
-          <a:p>
             <a:pPr marL="342900" indent="-342900" algn="l">
               <a:buFont typeface="+mj-lt"/>
               <a:buAutoNum type="arabicPeriod"/>
@@ -11549,7 +14202,7 @@
                   <a:srgbClr val="002060"/>
                 </a:solidFill>
               </a:rPr>
-              <a:t>Teilenummer: Eindeutige Kennung, nach dem Speichern nicht mehr änderbar.</a:t>
+              <a:t>Vorlage erstellen: Laden Sie eine Excel-Tabelle für den Massenimport herunter.</a:t>
             </a:r>
           </a:p>
           <a:p>
@@ -11558,28 +14211,12 @@
               <a:buAutoNum type="arabicPeriod"/>
             </a:pPr>
             <a:r>
-              <a:rPr lang="en-US" altLang="zh-TW" sz="1800" dirty="0">
+              <a:rPr lang="de-DE" altLang="zh-TW" sz="1800" dirty="0">
                 <a:solidFill>
                   <a:srgbClr val="002060"/>
                 </a:solidFill>
               </a:rPr>
-              <a:t>Name: </a:t>
-            </a:r>
-            <a:r>
-              <a:rPr lang="en-US" altLang="zh-TW" sz="1800" dirty="0" err="1">
-                <a:solidFill>
-                  <a:srgbClr val="002060"/>
-                </a:solidFill>
-              </a:rPr>
-              <a:t>Benutzerdefinierter</a:t>
-            </a:r>
-            <a:r>
-              <a:rPr lang="en-US" altLang="zh-TW" sz="1800" dirty="0">
-                <a:solidFill>
-                  <a:srgbClr val="002060"/>
-                </a:solidFill>
-              </a:rPr>
-              <a:t> Name.</a:t>
+              <a:t>Materialdatei importieren: Importieren Sie die Excel-Tabelle. Wenn die Teilenummer bereits vorhanden ist oder Daten fehlen, wird dieser Datensatz übersprungen.</a:t>
             </a:r>
           </a:p>
           <a:p>
@@ -11588,384 +14225,12 @@
               <a:buAutoNum type="arabicPeriod"/>
             </a:pPr>
             <a:r>
-              <a:rPr lang="en-US" altLang="zh-TW" sz="1800" dirty="0" err="1">
+              <a:rPr lang="de-DE" altLang="zh-TW" sz="1800" dirty="0">
                 <a:solidFill>
                   <a:srgbClr val="002060"/>
                 </a:solidFill>
               </a:rPr>
-              <a:t>Spezifikation</a:t>
-            </a:r>
-            <a:r>
-              <a:rPr lang="en-US" altLang="zh-TW" sz="1800" dirty="0">
-                <a:solidFill>
-                  <a:srgbClr val="002060"/>
-                </a:solidFill>
-              </a:rPr>
-              <a:t>: </a:t>
-            </a:r>
-            <a:r>
-              <a:rPr lang="en-US" altLang="zh-TW" sz="1800" dirty="0" err="1">
-                <a:solidFill>
-                  <a:srgbClr val="002060"/>
-                </a:solidFill>
-              </a:rPr>
-              <a:t>Benutzerdefinierte</a:t>
-            </a:r>
-            <a:r>
-              <a:rPr lang="en-US" altLang="zh-TW" sz="1800" dirty="0">
-                <a:solidFill>
-                  <a:srgbClr val="002060"/>
-                </a:solidFill>
-              </a:rPr>
-              <a:t> </a:t>
-            </a:r>
-            <a:r>
-              <a:rPr lang="en-US" altLang="zh-TW" sz="1800" dirty="0" err="1">
-                <a:solidFill>
-                  <a:srgbClr val="002060"/>
-                </a:solidFill>
-              </a:rPr>
-              <a:t>Beschreibung</a:t>
-            </a:r>
-            <a:r>
-              <a:rPr lang="en-US" altLang="zh-TW" sz="1800" dirty="0">
-                <a:solidFill>
-                  <a:srgbClr val="002060"/>
-                </a:solidFill>
-              </a:rPr>
-              <a:t>.</a:t>
-            </a:r>
-          </a:p>
-          <a:p>
-            <a:pPr marL="342900" indent="-342900" algn="l">
-              <a:buFont typeface="+mj-lt"/>
-              <a:buAutoNum type="arabicPeriod"/>
-            </a:pPr>
-            <a:r>
-              <a:rPr lang="de-DE" altLang="zh-TW" sz="1800" dirty="0">
-                <a:solidFill>
-                  <a:srgbClr val="002060"/>
-                </a:solidFill>
-              </a:rPr>
-              <a:t>Sicherheitsbestand: Festlegen der Mindest-Sicherheitsmenge für dieses Teil.</a:t>
-            </a:r>
-          </a:p>
-          <a:p>
-            <a:pPr marL="342900" indent="-342900" algn="l">
-              <a:buFont typeface="+mj-lt"/>
-              <a:buAutoNum type="arabicPeriod"/>
-            </a:pPr>
-            <a:r>
-              <a:rPr lang="de-DE" altLang="zh-TW" sz="1800" dirty="0">
-                <a:solidFill>
-                  <a:srgbClr val="002060"/>
-                </a:solidFill>
-              </a:rPr>
-              <a:t>Lieferzeit (Tage): Festlegen der benötigten Tage für die Wiederbeschaffung.</a:t>
-            </a:r>
-          </a:p>
-          <a:p>
-            <a:pPr marL="342900" indent="-342900" algn="l">
-              <a:buFont typeface="+mj-lt"/>
-              <a:buAutoNum type="arabicPeriod"/>
-            </a:pPr>
-            <a:r>
-              <a:rPr lang="de-DE" altLang="zh-TW" sz="1800" dirty="0">
-                <a:solidFill>
-                  <a:srgbClr val="002060"/>
-                </a:solidFill>
-              </a:rPr>
-              <a:t>Station: Zugehörige Station des Teils, optional.</a:t>
-            </a:r>
-            <a:endParaRPr lang="zh-TW" altLang="en-US" sz="1800" dirty="0">
-              <a:solidFill>
-                <a:srgbClr val="002060"/>
-              </a:solidFill>
-            </a:endParaRPr>
-          </a:p>
-        </p:txBody>
-      </p:sp>
-    </p:spTree>
-    <p:extLst>
-      <p:ext uri="{BB962C8B-B14F-4D97-AF65-F5344CB8AC3E}">
-        <p14:creationId xmlns:p14="http://schemas.microsoft.com/office/powerpoint/2010/main" val="319827598"/>
-      </p:ext>
-    </p:extLst>
-  </p:cSld>
-  <p:clrMapOvr>
-    <a:masterClrMapping/>
-  </p:clrMapOvr>
-</p:sld>
-</file>
-
-<file path=ppt/slides/slide8.xml><?xml version="1.0" encoding="utf-8"?>
-<p:sld xmlns:a="http://schemas.openxmlformats.org/drawingml/2006/main" xmlns:r="http://schemas.openxmlformats.org/officeDocument/2006/relationships" xmlns:p="http://schemas.openxmlformats.org/presentationml/2006/main">
-  <p:cSld>
-    <p:spTree>
-      <p:nvGrpSpPr>
-        <p:cNvPr id="1" name="">
-          <a:extLst>
-            <a:ext uri="{FF2B5EF4-FFF2-40B4-BE49-F238E27FC236}">
-              <a16:creationId xmlns:a16="http://schemas.microsoft.com/office/drawing/2014/main" id="{9087C49E-ACCC-CC16-7516-4D97DD300EFB}"/>
-            </a:ext>
-          </a:extLst>
-        </p:cNvPr>
-        <p:cNvGrpSpPr/>
-        <p:nvPr/>
-      </p:nvGrpSpPr>
-      <p:grpSpPr>
-        <a:xfrm>
-          <a:off x="0" y="0"/>
-          <a:ext cx="0" cy="0"/>
-          <a:chOff x="0" y="0"/>
-          <a:chExt cx="0" cy="0"/>
-        </a:xfrm>
-      </p:grpSpPr>
-      <p:sp>
-        <p:nvSpPr>
-          <p:cNvPr id="3" name="標題 2">
-            <a:extLst>
-              <a:ext uri="{FF2B5EF4-FFF2-40B4-BE49-F238E27FC236}">
-                <a16:creationId xmlns:a16="http://schemas.microsoft.com/office/drawing/2014/main" id="{B7F30EA8-14CA-0337-626E-936AC979D801}"/>
-              </a:ext>
-            </a:extLst>
-          </p:cNvPr>
-          <p:cNvSpPr>
-            <a:spLocks noGrp="1"/>
-          </p:cNvSpPr>
-          <p:nvPr>
-            <p:ph type="title"/>
-          </p:nvPr>
-        </p:nvSpPr>
-        <p:spPr>
-          <a:xfrm>
-            <a:off x="319892" y="107816"/>
-            <a:ext cx="11379200" cy="461659"/>
-          </a:xfrm>
-        </p:spPr>
-        <p:txBody>
-          <a:bodyPr>
-            <a:noAutofit/>
-          </a:bodyPr>
-          <a:lstStyle/>
-          <a:p>
-            <a:r>
-              <a:rPr lang="en-US" altLang="zh-TW" sz="2800" dirty="0" err="1"/>
-              <a:t>Bestandsabfrage</a:t>
-            </a:r>
-            <a:endParaRPr lang="en-US" altLang="zh-TW" sz="2800" dirty="0"/>
-          </a:p>
-        </p:txBody>
-      </p:sp>
-      <p:sp>
-        <p:nvSpPr>
-          <p:cNvPr id="53" name="標題 2">
-            <a:extLst>
-              <a:ext uri="{FF2B5EF4-FFF2-40B4-BE49-F238E27FC236}">
-                <a16:creationId xmlns:a16="http://schemas.microsoft.com/office/drawing/2014/main" id="{B596482B-6D93-EDE6-9CE4-8F0026113B93}"/>
-              </a:ext>
-            </a:extLst>
-          </p:cNvPr>
-          <p:cNvSpPr txBox="1">
-            <a:spLocks/>
-          </p:cNvSpPr>
-          <p:nvPr/>
-        </p:nvSpPr>
-        <p:spPr>
-          <a:xfrm>
-            <a:off x="217952" y="1200293"/>
-            <a:ext cx="5511319" cy="461659"/>
-          </a:xfrm>
-          <a:prstGeom prst="rect">
-            <a:avLst/>
-          </a:prstGeom>
-        </p:spPr>
-        <p:txBody>
-          <a:bodyPr vert="horz" lIns="0" tIns="45720" rIns="0" bIns="45720" rtlCol="0" anchor="t">
-            <a:noAutofit/>
-          </a:bodyPr>
-          <a:lstStyle>
-            <a:lvl1pPr algn="ctr" defTabSz="685783" rtl="0" eaLnBrk="1" latinLnBrk="0" hangingPunct="1">
-              <a:lnSpc>
-                <a:spcPct val="90000"/>
-              </a:lnSpc>
-              <a:spcBef>
-                <a:spcPct val="0"/>
-              </a:spcBef>
-              <a:buNone/>
-              <a:defRPr sz="2400" b="1" kern="1200">
-                <a:solidFill>
-                  <a:schemeClr val="tx2"/>
-                </a:solidFill>
-                <a:latin typeface="+mj-lt"/>
-                <a:ea typeface="+mj-ea"/>
-                <a:cs typeface="+mj-cs"/>
-              </a:defRPr>
-            </a:lvl1pPr>
-          </a:lstStyle>
-          <a:p>
-            <a:pPr algn="l"/>
-            <a:r>
-              <a:rPr lang="en-US" altLang="zh-TW" sz="1800" dirty="0">
-                <a:solidFill>
-                  <a:srgbClr val="0000FF"/>
-                </a:solidFill>
-              </a:rPr>
-              <a:t>1. </a:t>
-            </a:r>
-            <a:r>
-              <a:rPr lang="en-US" altLang="zh-TW" sz="1800" dirty="0" err="1">
-                <a:solidFill>
-                  <a:srgbClr val="0000FF"/>
-                </a:solidFill>
-              </a:rPr>
-              <a:t>Bestandsabfrage</a:t>
-            </a:r>
-            <a:endParaRPr lang="zh-TW" altLang="en-US" sz="1800" dirty="0">
-              <a:solidFill>
-                <a:srgbClr val="0000FF"/>
-              </a:solidFill>
-            </a:endParaRPr>
-          </a:p>
-        </p:txBody>
-      </p:sp>
-      <p:sp>
-        <p:nvSpPr>
-          <p:cNvPr id="22" name="標題 2">
-            <a:extLst>
-              <a:ext uri="{FF2B5EF4-FFF2-40B4-BE49-F238E27FC236}">
-                <a16:creationId xmlns:a16="http://schemas.microsoft.com/office/drawing/2014/main" id="{F4FEE48A-F7EC-3CCD-4683-59A177514EE8}"/>
-              </a:ext>
-            </a:extLst>
-          </p:cNvPr>
-          <p:cNvSpPr txBox="1">
-            <a:spLocks/>
-          </p:cNvSpPr>
-          <p:nvPr/>
-        </p:nvSpPr>
-        <p:spPr>
-          <a:xfrm>
-            <a:off x="537039" y="1661952"/>
-            <a:ext cx="9192749" cy="1005790"/>
-          </a:xfrm>
-          <a:prstGeom prst="rect">
-            <a:avLst/>
-          </a:prstGeom>
-        </p:spPr>
-        <p:txBody>
-          <a:bodyPr vert="horz" lIns="0" tIns="45720" rIns="0" bIns="45720" rtlCol="0" anchor="t">
-            <a:noAutofit/>
-          </a:bodyPr>
-          <a:lstStyle>
-            <a:lvl1pPr algn="ctr" defTabSz="685783" rtl="0" eaLnBrk="1" latinLnBrk="0" hangingPunct="1">
-              <a:lnSpc>
-                <a:spcPct val="90000"/>
-              </a:lnSpc>
-              <a:spcBef>
-                <a:spcPct val="0"/>
-              </a:spcBef>
-              <a:buNone/>
-              <a:defRPr sz="2400" b="1" kern="1200">
-                <a:solidFill>
-                  <a:schemeClr val="tx2"/>
-                </a:solidFill>
-                <a:latin typeface="+mj-lt"/>
-                <a:ea typeface="+mj-ea"/>
-                <a:cs typeface="+mj-cs"/>
-              </a:defRPr>
-            </a:lvl1pPr>
-          </a:lstStyle>
-          <a:p>
-            <a:pPr marL="342900" indent="-342900" algn="l">
-              <a:buAutoNum type="arabicPeriod"/>
-            </a:pPr>
-            <a:r>
-              <a:rPr lang="de-DE" altLang="zh-TW" sz="1800" dirty="0">
-                <a:solidFill>
-                  <a:srgbClr val="002060"/>
-                </a:solidFill>
-              </a:rPr>
-              <a:t>Geben Sie ein Schlüsselwort bei Stichwortsuche: ein und klicken Sie auf Suche, um nach Materialname, Spezifikation oder Teilenummer zu suchen.</a:t>
-            </a:r>
-          </a:p>
-          <a:p>
-            <a:pPr marL="342900" indent="-342900" algn="l">
-              <a:buAutoNum type="arabicPeriod"/>
-            </a:pPr>
-            <a:r>
-              <a:rPr lang="de-DE" altLang="zh-TW" sz="1800" dirty="0">
-                <a:solidFill>
-                  <a:srgbClr val="002060"/>
-                </a:solidFill>
-              </a:rPr>
-              <a:t>Klicken Sie auf Alle anzeigen, um den gesamten Bestand aufzulisten.</a:t>
-            </a:r>
-            <a:endParaRPr lang="en-US" altLang="zh-TW" sz="1800" dirty="0">
-              <a:solidFill>
-                <a:srgbClr val="002060"/>
-              </a:solidFill>
-            </a:endParaRPr>
-          </a:p>
-        </p:txBody>
-      </p:sp>
-      <p:sp>
-        <p:nvSpPr>
-          <p:cNvPr id="2" name="標題 2">
-            <a:extLst>
-              <a:ext uri="{FF2B5EF4-FFF2-40B4-BE49-F238E27FC236}">
-                <a16:creationId xmlns:a16="http://schemas.microsoft.com/office/drawing/2014/main" id="{4289CD50-EC92-01C2-856A-A0B1D73CC3CA}"/>
-              </a:ext>
-            </a:extLst>
-          </p:cNvPr>
-          <p:cNvSpPr txBox="1">
-            <a:spLocks/>
-          </p:cNvSpPr>
-          <p:nvPr/>
-        </p:nvSpPr>
-        <p:spPr>
-          <a:xfrm>
-            <a:off x="537039" y="546476"/>
-            <a:ext cx="11162053" cy="1005790"/>
-          </a:xfrm>
-          <a:prstGeom prst="rect">
-            <a:avLst/>
-          </a:prstGeom>
-        </p:spPr>
-        <p:txBody>
-          <a:bodyPr vert="horz" lIns="0" tIns="45720" rIns="0" bIns="45720" rtlCol="0" anchor="t">
-            <a:noAutofit/>
-          </a:bodyPr>
-          <a:lstStyle>
-            <a:lvl1pPr algn="ctr" defTabSz="685783" rtl="0" eaLnBrk="1" latinLnBrk="0" hangingPunct="1">
-              <a:lnSpc>
-                <a:spcPct val="90000"/>
-              </a:lnSpc>
-              <a:spcBef>
-                <a:spcPct val="0"/>
-              </a:spcBef>
-              <a:buNone/>
-              <a:defRPr sz="2400" b="1" kern="1200">
-                <a:solidFill>
-                  <a:schemeClr val="tx2"/>
-                </a:solidFill>
-                <a:latin typeface="+mj-lt"/>
-                <a:ea typeface="+mj-ea"/>
-                <a:cs typeface="+mj-cs"/>
-              </a:defRPr>
-            </a:lvl1pPr>
-          </a:lstStyle>
-          <a:p>
-            <a:pPr marL="285750" indent="-285750" algn="l">
-              <a:buFont typeface="Wingdings" panose="05000000000000000000" pitchFamily="2" charset="2"/>
-              <a:buChar char="u"/>
-            </a:pPr>
-            <a:r>
-              <a:rPr lang="de-DE" altLang="zh-TW" sz="1800" dirty="0">
-                <a:solidFill>
-                  <a:srgbClr val="002060"/>
-                </a:solidFill>
-              </a:rPr>
-              <a:t>Wird verwendet, um die Bestandsliste abzufragen.</a:t>
+              <a:t>Basisinformationen von Teilen im Stapelverfahren erstellen. Überprüfen Sie das Import-Protokoll:. </a:t>
             </a:r>
             <a:endParaRPr lang="en-US" altLang="zh-TW" sz="1800" dirty="0">
               <a:solidFill>
@@ -11977,10 +14242,10 @@
       </p:sp>
       <p:grpSp>
         <p:nvGrpSpPr>
-          <p:cNvPr id="15" name="群組 14">
+          <p:cNvPr id="7" name="群組 6">
             <a:extLst>
               <a:ext uri="{FF2B5EF4-FFF2-40B4-BE49-F238E27FC236}">
-                <a16:creationId xmlns:a16="http://schemas.microsoft.com/office/drawing/2014/main" id="{E791F2BF-391C-54F0-C406-EDDD93D95901}"/>
+                <a16:creationId xmlns:a16="http://schemas.microsoft.com/office/drawing/2014/main" id="{1212DD35-BEC5-17C6-9ED9-A43E26D98FC6}"/>
               </a:ext>
             </a:extLst>
           </p:cNvPr>
@@ -11989,814 +14254,230 @@
         </p:nvGrpSpPr>
         <p:grpSpPr>
           <a:xfrm>
-            <a:off x="351416" y="3169067"/>
-            <a:ext cx="11535784" cy="2413518"/>
-            <a:chOff x="351416" y="3169067"/>
-            <a:chExt cx="11535784" cy="2413518"/>
+            <a:off x="2899063" y="2846577"/>
+            <a:ext cx="1620613" cy="664015"/>
+            <a:chOff x="7688062" y="4473437"/>
+            <a:chExt cx="2041726" cy="711122"/>
           </a:xfrm>
         </p:grpSpPr>
-        <p:pic>
-          <p:nvPicPr>
-            <p:cNvPr id="14" name="圖片 13" descr="The image displays a database table or grid with columns for various attributes such as 'Bestandsabfrage,' 'Materialname,' 'Spezifikation,' and 'Lager,' listing items like 'Schutzleiterreihenklemme' and their specifications.&#10;&#10;AI 產生的內容可能不正確。">
+        <p:sp>
+          <p:nvSpPr>
+            <p:cNvPr id="8" name="矩形 7">
               <a:extLst>
                 <a:ext uri="{FF2B5EF4-FFF2-40B4-BE49-F238E27FC236}">
-                  <a16:creationId xmlns:a16="http://schemas.microsoft.com/office/drawing/2014/main" id="{B8D87AB1-11B8-F43B-2E25-8F88FA4EA519}"/>
+                  <a16:creationId xmlns:a16="http://schemas.microsoft.com/office/drawing/2014/main" id="{7320A1F7-923D-29C5-14A3-E831F05F4582}"/>
                 </a:ext>
               </a:extLst>
             </p:cNvPr>
-            <p:cNvPicPr>
-              <a:picLocks noChangeAspect="1"/>
-            </p:cNvPicPr>
+            <p:cNvSpPr/>
             <p:nvPr/>
-          </p:nvPicPr>
-          <p:blipFill>
-            <a:blip r:embed="rId3"/>
-            <a:stretch>
-              <a:fillRect/>
-            </a:stretch>
-          </p:blipFill>
+          </p:nvSpPr>
           <p:spPr>
             <a:xfrm>
-              <a:off x="351416" y="3169067"/>
-              <a:ext cx="11535784" cy="2413518"/>
+              <a:off x="7688062" y="4500979"/>
+              <a:ext cx="2041726" cy="683580"/>
             </a:xfrm>
             <a:prstGeom prst="rect">
               <a:avLst/>
             </a:prstGeom>
+            <a:noFill/>
+            <a:ln>
+              <a:solidFill>
+                <a:srgbClr val="FF0000"/>
+              </a:solidFill>
+            </a:ln>
           </p:spPr>
-        </p:pic>
-        <p:grpSp>
-          <p:nvGrpSpPr>
-            <p:cNvPr id="6" name="群組 5">
+          <p:style>
+            <a:lnRef idx="2">
+              <a:schemeClr val="accent1">
+                <a:shade val="50000"/>
+              </a:schemeClr>
+            </a:lnRef>
+            <a:fillRef idx="1">
+              <a:schemeClr val="accent1"/>
+            </a:fillRef>
+            <a:effectRef idx="0">
+              <a:schemeClr val="accent1"/>
+            </a:effectRef>
+            <a:fontRef idx="minor">
+              <a:schemeClr val="lt1"/>
+            </a:fontRef>
+          </p:style>
+          <p:txBody>
+            <a:bodyPr rtlCol="0" anchor="ctr"/>
+            <a:lstStyle/>
+            <a:p>
+              <a:pPr algn="ctr"/>
+              <a:endParaRPr lang="zh-TW" altLang="en-US" sz="1400" b="1" dirty="0"/>
+            </a:p>
+          </p:txBody>
+        </p:sp>
+        <p:sp>
+          <p:nvSpPr>
+            <p:cNvPr id="9" name="文字方塊 8">
               <a:extLst>
                 <a:ext uri="{FF2B5EF4-FFF2-40B4-BE49-F238E27FC236}">
-                  <a16:creationId xmlns:a16="http://schemas.microsoft.com/office/drawing/2014/main" id="{CE215241-EEC4-8622-786C-235339509618}"/>
+                  <a16:creationId xmlns:a16="http://schemas.microsoft.com/office/drawing/2014/main" id="{7CEBD8D0-98C0-8011-C44F-2E3DB56614C4}"/>
                 </a:ext>
               </a:extLst>
             </p:cNvPr>
-            <p:cNvGrpSpPr/>
+            <p:cNvSpPr txBox="1"/>
             <p:nvPr/>
-          </p:nvGrpSpPr>
-          <p:grpSpPr>
+          </p:nvSpPr>
+          <p:spPr>
             <a:xfrm>
-              <a:off x="470683" y="3596088"/>
-              <a:ext cx="5051228" cy="767921"/>
-              <a:chOff x="7688062" y="4473437"/>
-              <a:chExt cx="2041726" cy="711122"/>
+              <a:off x="9416882" y="4473437"/>
+              <a:ext cx="233271" cy="342014"/>
             </a:xfrm>
-          </p:grpSpPr>
-          <p:sp>
-            <p:nvSpPr>
-              <p:cNvPr id="8" name="矩形 7">
-                <a:extLst>
-                  <a:ext uri="{FF2B5EF4-FFF2-40B4-BE49-F238E27FC236}">
-                    <a16:creationId xmlns:a16="http://schemas.microsoft.com/office/drawing/2014/main" id="{77569B9B-F6B6-65C1-8F27-66905B080C28}"/>
-                  </a:ext>
-                </a:extLst>
-              </p:cNvPr>
-              <p:cNvSpPr/>
-              <p:nvPr/>
-            </p:nvSpPr>
-            <p:spPr>
-              <a:xfrm>
-                <a:off x="7688062" y="4500979"/>
-                <a:ext cx="2041726" cy="683580"/>
-              </a:xfrm>
-              <a:prstGeom prst="rect">
-                <a:avLst/>
-              </a:prstGeom>
-              <a:noFill/>
-              <a:ln>
-                <a:solidFill>
-                  <a:srgbClr val="FF0000"/>
-                </a:solidFill>
-              </a:ln>
-            </p:spPr>
-            <p:style>
-              <a:lnRef idx="2">
-                <a:schemeClr val="accent1">
-                  <a:shade val="50000"/>
-                </a:schemeClr>
-              </a:lnRef>
-              <a:fillRef idx="1">
-                <a:schemeClr val="accent1"/>
-              </a:fillRef>
-              <a:effectRef idx="0">
-                <a:schemeClr val="accent1"/>
-              </a:effectRef>
-              <a:fontRef idx="minor">
-                <a:schemeClr val="lt1"/>
-              </a:fontRef>
-            </p:style>
-            <p:txBody>
-              <a:bodyPr rtlCol="0" anchor="ctr"/>
-              <a:lstStyle/>
-              <a:p>
-                <a:pPr algn="ctr"/>
-                <a:endParaRPr lang="zh-TW" altLang="en-US" sz="1400" b="1" dirty="0"/>
-              </a:p>
-            </p:txBody>
-          </p:sp>
-          <p:sp>
-            <p:nvSpPr>
-              <p:cNvPr id="9" name="文字方塊 8">
-                <a:extLst>
-                  <a:ext uri="{FF2B5EF4-FFF2-40B4-BE49-F238E27FC236}">
-                    <a16:creationId xmlns:a16="http://schemas.microsoft.com/office/drawing/2014/main" id="{682DB426-07CB-8C72-8DED-A2A98203AF8C}"/>
-                  </a:ext>
-                </a:extLst>
-              </p:cNvPr>
-              <p:cNvSpPr txBox="1"/>
-              <p:nvPr/>
-            </p:nvSpPr>
-            <p:spPr>
-              <a:xfrm>
-                <a:off x="9416882" y="4473437"/>
-                <a:ext cx="233271" cy="342014"/>
-              </a:xfrm>
-              <a:prstGeom prst="rect">
-                <a:avLst/>
-              </a:prstGeom>
-              <a:noFill/>
-            </p:spPr>
-            <p:txBody>
-              <a:bodyPr wrap="none" rtlCol="0">
-                <a:spAutoFit/>
-              </a:bodyPr>
-              <a:lstStyle/>
-              <a:p>
-                <a:r>
-                  <a:rPr lang="en-US" altLang="zh-TW" b="1" dirty="0">
-                    <a:solidFill>
-                      <a:srgbClr val="FF0000"/>
-                    </a:solidFill>
-                  </a:rPr>
-                  <a:t>1</a:t>
-                </a:r>
-                <a:endParaRPr lang="zh-TW" altLang="en-US" b="1" dirty="0">
+            <a:prstGeom prst="rect">
+              <a:avLst/>
+            </a:prstGeom>
+            <a:noFill/>
+          </p:spPr>
+          <p:txBody>
+            <a:bodyPr wrap="none" rtlCol="0">
+              <a:spAutoFit/>
+            </a:bodyPr>
+            <a:lstStyle/>
+            <a:p>
+              <a:r>
+                <a:rPr lang="en-US" altLang="zh-TW" b="1" dirty="0">
                   <a:solidFill>
                     <a:srgbClr val="FF0000"/>
                   </a:solidFill>
-                </a:endParaRPr>
-              </a:p>
-            </p:txBody>
-          </p:sp>
-        </p:grpSp>
-        <p:grpSp>
-          <p:nvGrpSpPr>
-            <p:cNvPr id="10" name="群組 9">
+                </a:rPr>
+                <a:t>1</a:t>
+              </a:r>
+              <a:endParaRPr lang="zh-TW" altLang="en-US" b="1" dirty="0">
+                <a:solidFill>
+                  <a:srgbClr val="FF0000"/>
+                </a:solidFill>
+              </a:endParaRPr>
+            </a:p>
+          </p:txBody>
+        </p:sp>
+      </p:grpSp>
+      <p:grpSp>
+        <p:nvGrpSpPr>
+          <p:cNvPr id="10" name="群組 9">
+            <a:extLst>
+              <a:ext uri="{FF2B5EF4-FFF2-40B4-BE49-F238E27FC236}">
+                <a16:creationId xmlns:a16="http://schemas.microsoft.com/office/drawing/2014/main" id="{87EE98CB-6FE5-0138-BAF7-D2DD37F16ADE}"/>
+              </a:ext>
+            </a:extLst>
+          </p:cNvPr>
+          <p:cNvGrpSpPr/>
+          <p:nvPr/>
+        </p:nvGrpSpPr>
+        <p:grpSpPr>
+          <a:xfrm>
+            <a:off x="4555993" y="2833927"/>
+            <a:ext cx="1685151" cy="664015"/>
+            <a:chOff x="7688062" y="4473437"/>
+            <a:chExt cx="2123034" cy="711122"/>
+          </a:xfrm>
+        </p:grpSpPr>
+        <p:sp>
+          <p:nvSpPr>
+            <p:cNvPr id="11" name="矩形 10">
               <a:extLst>
                 <a:ext uri="{FF2B5EF4-FFF2-40B4-BE49-F238E27FC236}">
-                  <a16:creationId xmlns:a16="http://schemas.microsoft.com/office/drawing/2014/main" id="{32F369C7-05F9-7B5B-C9B5-94215FE304DB}"/>
+                  <a16:creationId xmlns:a16="http://schemas.microsoft.com/office/drawing/2014/main" id="{B0CB904D-92EE-6E74-2063-80B4A0BA5703}"/>
                 </a:ext>
               </a:extLst>
             </p:cNvPr>
-            <p:cNvGrpSpPr/>
+            <p:cNvSpPr/>
             <p:nvPr/>
-          </p:nvGrpSpPr>
-          <p:grpSpPr>
+          </p:nvSpPr>
+          <p:spPr>
             <a:xfrm>
-              <a:off x="5606267" y="3607905"/>
-              <a:ext cx="1737383" cy="767921"/>
-              <a:chOff x="7688062" y="4473437"/>
-              <a:chExt cx="2108579" cy="711122"/>
+              <a:off x="7688062" y="4500979"/>
+              <a:ext cx="2041726" cy="683580"/>
             </a:xfrm>
-          </p:grpSpPr>
-          <p:sp>
-            <p:nvSpPr>
-              <p:cNvPr id="11" name="矩形 10">
-                <a:extLst>
-                  <a:ext uri="{FF2B5EF4-FFF2-40B4-BE49-F238E27FC236}">
-                    <a16:creationId xmlns:a16="http://schemas.microsoft.com/office/drawing/2014/main" id="{1DCEEAA0-3D59-C6F2-544B-468C29669FDD}"/>
-                  </a:ext>
-                </a:extLst>
-              </p:cNvPr>
-              <p:cNvSpPr/>
-              <p:nvPr/>
-            </p:nvSpPr>
-            <p:spPr>
-              <a:xfrm>
-                <a:off x="7688062" y="4500979"/>
-                <a:ext cx="2041726" cy="683580"/>
-              </a:xfrm>
-              <a:prstGeom prst="rect">
-                <a:avLst/>
-              </a:prstGeom>
-              <a:noFill/>
-              <a:ln>
-                <a:solidFill>
-                  <a:srgbClr val="FF0000"/>
-                </a:solidFill>
-              </a:ln>
-            </p:spPr>
-            <p:style>
-              <a:lnRef idx="2">
-                <a:schemeClr val="accent1">
-                  <a:shade val="50000"/>
-                </a:schemeClr>
-              </a:lnRef>
-              <a:fillRef idx="1">
-                <a:schemeClr val="accent1"/>
-              </a:fillRef>
-              <a:effectRef idx="0">
-                <a:schemeClr val="accent1"/>
-              </a:effectRef>
-              <a:fontRef idx="minor">
-                <a:schemeClr val="lt1"/>
-              </a:fontRef>
-            </p:style>
-            <p:txBody>
-              <a:bodyPr rtlCol="0" anchor="ctr"/>
-              <a:lstStyle/>
-              <a:p>
-                <a:pPr algn="ctr"/>
-                <a:endParaRPr lang="zh-TW" altLang="en-US" sz="1400" b="1" dirty="0"/>
-              </a:p>
-            </p:txBody>
-          </p:sp>
-          <p:sp>
-            <p:nvSpPr>
-              <p:cNvPr id="12" name="文字方塊 11">
-                <a:extLst>
-                  <a:ext uri="{FF2B5EF4-FFF2-40B4-BE49-F238E27FC236}">
-                    <a16:creationId xmlns:a16="http://schemas.microsoft.com/office/drawing/2014/main" id="{11951813-B9EF-D7FD-B2C3-510394065010}"/>
-                  </a:ext>
-                </a:extLst>
-              </p:cNvPr>
-              <p:cNvSpPr txBox="1"/>
-              <p:nvPr/>
-            </p:nvSpPr>
-            <p:spPr>
-              <a:xfrm>
-                <a:off x="9416882" y="4473437"/>
-                <a:ext cx="379759" cy="342014"/>
-              </a:xfrm>
-              <a:prstGeom prst="rect">
-                <a:avLst/>
-              </a:prstGeom>
-              <a:noFill/>
-            </p:spPr>
-            <p:txBody>
-              <a:bodyPr wrap="none" rtlCol="0">
-                <a:spAutoFit/>
-              </a:bodyPr>
-              <a:lstStyle/>
-              <a:p>
-                <a:r>
-                  <a:rPr lang="en-US" altLang="zh-TW" b="1" dirty="0">
-                    <a:solidFill>
-                      <a:srgbClr val="FF0000"/>
-                    </a:solidFill>
-                  </a:rPr>
-                  <a:t>2</a:t>
-                </a:r>
-                <a:endParaRPr lang="zh-TW" altLang="en-US" b="1" dirty="0">
+            <a:prstGeom prst="rect">
+              <a:avLst/>
+            </a:prstGeom>
+            <a:noFill/>
+            <a:ln>
+              <a:solidFill>
+                <a:srgbClr val="FF0000"/>
+              </a:solidFill>
+            </a:ln>
+          </p:spPr>
+          <p:style>
+            <a:lnRef idx="2">
+              <a:schemeClr val="accent1">
+                <a:shade val="50000"/>
+              </a:schemeClr>
+            </a:lnRef>
+            <a:fillRef idx="1">
+              <a:schemeClr val="accent1"/>
+            </a:fillRef>
+            <a:effectRef idx="0">
+              <a:schemeClr val="accent1"/>
+            </a:effectRef>
+            <a:fontRef idx="minor">
+              <a:schemeClr val="lt1"/>
+            </a:fontRef>
+          </p:style>
+          <p:txBody>
+            <a:bodyPr rtlCol="0" anchor="ctr"/>
+            <a:lstStyle/>
+            <a:p>
+              <a:pPr algn="ctr"/>
+              <a:endParaRPr lang="zh-TW" altLang="en-US" sz="1400" b="1" dirty="0"/>
+            </a:p>
+          </p:txBody>
+        </p:sp>
+        <p:sp>
+          <p:nvSpPr>
+            <p:cNvPr id="12" name="文字方塊 11">
+              <a:extLst>
+                <a:ext uri="{FF2B5EF4-FFF2-40B4-BE49-F238E27FC236}">
+                  <a16:creationId xmlns:a16="http://schemas.microsoft.com/office/drawing/2014/main" id="{8EC89D72-D5F4-2366-E2C3-77F01BB3F798}"/>
+                </a:ext>
+              </a:extLst>
+            </p:cNvPr>
+            <p:cNvSpPr txBox="1"/>
+            <p:nvPr/>
+          </p:nvSpPr>
+          <p:spPr>
+            <a:xfrm>
+              <a:off x="9416882" y="4473437"/>
+              <a:ext cx="394214" cy="395533"/>
+            </a:xfrm>
+            <a:prstGeom prst="rect">
+              <a:avLst/>
+            </a:prstGeom>
+            <a:noFill/>
+          </p:spPr>
+          <p:txBody>
+            <a:bodyPr wrap="none" rtlCol="0">
+              <a:spAutoFit/>
+            </a:bodyPr>
+            <a:lstStyle/>
+            <a:p>
+              <a:r>
+                <a:rPr lang="en-US" altLang="zh-TW" b="1" dirty="0">
                   <a:solidFill>
                     <a:srgbClr val="FF0000"/>
                   </a:solidFill>
-                </a:endParaRPr>
-              </a:p>
-            </p:txBody>
-          </p:sp>
-        </p:grpSp>
+                </a:rPr>
+                <a:t>2</a:t>
+              </a:r>
+              <a:endParaRPr lang="zh-TW" altLang="en-US" b="1" dirty="0">
+                <a:solidFill>
+                  <a:srgbClr val="FF0000"/>
+                </a:solidFill>
+              </a:endParaRPr>
+            </a:p>
+          </p:txBody>
+        </p:sp>
       </p:grpSp>
     </p:spTree>
     <p:extLst>
       <p:ext uri="{BB962C8B-B14F-4D97-AF65-F5344CB8AC3E}">
-        <p14:creationId xmlns:p14="http://schemas.microsoft.com/office/powerpoint/2010/main" val="3848321853"/>
-      </p:ext>
-    </p:extLst>
-  </p:cSld>
-  <p:clrMapOvr>
-    <a:masterClrMapping/>
-  </p:clrMapOvr>
-</p:sld>
-</file>
-
-<file path=ppt/slides/slide9.xml><?xml version="1.0" encoding="utf-8"?>
-<p:sld xmlns:a="http://schemas.openxmlformats.org/drawingml/2006/main" xmlns:r="http://schemas.openxmlformats.org/officeDocument/2006/relationships" xmlns:p="http://schemas.openxmlformats.org/presentationml/2006/main">
-  <p:cSld>
-    <p:spTree>
-      <p:nvGrpSpPr>
-        <p:cNvPr id="1" name="">
-          <a:extLst>
-            <a:ext uri="{FF2B5EF4-FFF2-40B4-BE49-F238E27FC236}">
-              <a16:creationId xmlns:a16="http://schemas.microsoft.com/office/drawing/2014/main" id="{58E51442-6BD6-C6F0-1F69-EC6F14626D62}"/>
-            </a:ext>
-          </a:extLst>
-        </p:cNvPr>
-        <p:cNvGrpSpPr/>
-        <p:nvPr/>
-      </p:nvGrpSpPr>
-      <p:grpSpPr>
-        <a:xfrm>
-          <a:off x="0" y="0"/>
-          <a:ext cx="0" cy="0"/>
-          <a:chOff x="0" y="0"/>
-          <a:chExt cx="0" cy="0"/>
-        </a:xfrm>
-      </p:grpSpPr>
-      <p:sp>
-        <p:nvSpPr>
-          <p:cNvPr id="3" name="標題 2">
-            <a:extLst>
-              <a:ext uri="{FF2B5EF4-FFF2-40B4-BE49-F238E27FC236}">
-                <a16:creationId xmlns:a16="http://schemas.microsoft.com/office/drawing/2014/main" id="{F0EA1FF4-D808-25AD-DB91-0D15317D4E6F}"/>
-              </a:ext>
-            </a:extLst>
-          </p:cNvPr>
-          <p:cNvSpPr>
-            <a:spLocks noGrp="1"/>
-          </p:cNvSpPr>
-          <p:nvPr>
-            <p:ph type="title"/>
-          </p:nvPr>
-        </p:nvSpPr>
-        <p:spPr>
-          <a:xfrm>
-            <a:off x="319892" y="107816"/>
-            <a:ext cx="11379200" cy="461659"/>
-          </a:xfrm>
-        </p:spPr>
-        <p:txBody>
-          <a:bodyPr>
-            <a:noAutofit/>
-          </a:bodyPr>
-          <a:lstStyle/>
-          <a:p>
-            <a:r>
-              <a:rPr lang="en-US" altLang="zh-TW" sz="2800" dirty="0" err="1"/>
-              <a:t>Überwachung</a:t>
-            </a:r>
-            <a:r>
-              <a:rPr lang="en-US" altLang="zh-TW" sz="2800" dirty="0"/>
-              <a:t> des </a:t>
-            </a:r>
-            <a:r>
-              <a:rPr lang="en-US" altLang="zh-TW" sz="2800" dirty="0" err="1"/>
-              <a:t>niedrigen</a:t>
-            </a:r>
-            <a:r>
-              <a:rPr lang="en-US" altLang="zh-TW" sz="2800" dirty="0"/>
-              <a:t> </a:t>
-            </a:r>
-            <a:r>
-              <a:rPr lang="en-US" altLang="zh-TW" sz="2800" dirty="0" err="1"/>
-              <a:t>Sicherheitsbestands</a:t>
-            </a:r>
-            <a:endParaRPr lang="en-US" altLang="zh-TW" sz="2800" dirty="0"/>
-          </a:p>
-        </p:txBody>
-      </p:sp>
-      <p:sp>
-        <p:nvSpPr>
-          <p:cNvPr id="53" name="標題 2">
-            <a:extLst>
-              <a:ext uri="{FF2B5EF4-FFF2-40B4-BE49-F238E27FC236}">
-                <a16:creationId xmlns:a16="http://schemas.microsoft.com/office/drawing/2014/main" id="{69CA39BF-1A32-AAD9-66FB-E7B28B423FD4}"/>
-              </a:ext>
-            </a:extLst>
-          </p:cNvPr>
-          <p:cNvSpPr txBox="1">
-            <a:spLocks/>
-          </p:cNvSpPr>
-          <p:nvPr/>
-        </p:nvSpPr>
-        <p:spPr>
-          <a:xfrm>
-            <a:off x="217952" y="1200293"/>
-            <a:ext cx="5511319" cy="461659"/>
-          </a:xfrm>
-          <a:prstGeom prst="rect">
-            <a:avLst/>
-          </a:prstGeom>
-        </p:spPr>
-        <p:txBody>
-          <a:bodyPr vert="horz" lIns="0" tIns="45720" rIns="0" bIns="45720" rtlCol="0" anchor="t">
-            <a:noAutofit/>
-          </a:bodyPr>
-          <a:lstStyle>
-            <a:lvl1pPr algn="ctr" defTabSz="685783" rtl="0" eaLnBrk="1" latinLnBrk="0" hangingPunct="1">
-              <a:lnSpc>
-                <a:spcPct val="90000"/>
-              </a:lnSpc>
-              <a:spcBef>
-                <a:spcPct val="0"/>
-              </a:spcBef>
-              <a:buNone/>
-              <a:defRPr sz="2400" b="1" kern="1200">
-                <a:solidFill>
-                  <a:schemeClr val="tx2"/>
-                </a:solidFill>
-                <a:latin typeface="+mj-lt"/>
-                <a:ea typeface="+mj-ea"/>
-                <a:cs typeface="+mj-cs"/>
-              </a:defRPr>
-            </a:lvl1pPr>
-          </a:lstStyle>
-          <a:p>
-            <a:pPr algn="l"/>
-            <a:r>
-              <a:rPr lang="en-US" altLang="zh-TW" sz="1800" dirty="0">
-                <a:solidFill>
-                  <a:srgbClr val="0000FF"/>
-                </a:solidFill>
-              </a:rPr>
-              <a:t>1. Alarm für </a:t>
-            </a:r>
-            <a:r>
-              <a:rPr lang="en-US" altLang="zh-TW" sz="1800" dirty="0" err="1">
-                <a:solidFill>
-                  <a:srgbClr val="0000FF"/>
-                </a:solidFill>
-              </a:rPr>
-              <a:t>niedrigen</a:t>
-            </a:r>
-            <a:r>
-              <a:rPr lang="en-US" altLang="zh-TW" sz="1800" dirty="0">
-                <a:solidFill>
-                  <a:srgbClr val="0000FF"/>
-                </a:solidFill>
-              </a:rPr>
-              <a:t> </a:t>
-            </a:r>
-            <a:r>
-              <a:rPr lang="en-US" altLang="zh-TW" sz="1800" dirty="0" err="1">
-                <a:solidFill>
-                  <a:srgbClr val="0000FF"/>
-                </a:solidFill>
-              </a:rPr>
-              <a:t>Sicherheitsbestand</a:t>
-            </a:r>
-            <a:endParaRPr lang="zh-TW" altLang="en-US" sz="1800" dirty="0">
-              <a:solidFill>
-                <a:srgbClr val="0000FF"/>
-              </a:solidFill>
-            </a:endParaRPr>
-          </a:p>
-        </p:txBody>
-      </p:sp>
-      <p:sp>
-        <p:nvSpPr>
-          <p:cNvPr id="22" name="標題 2">
-            <a:extLst>
-              <a:ext uri="{FF2B5EF4-FFF2-40B4-BE49-F238E27FC236}">
-                <a16:creationId xmlns:a16="http://schemas.microsoft.com/office/drawing/2014/main" id="{883D75F4-F8CB-CCBB-9215-C21AF251BD35}"/>
-              </a:ext>
-            </a:extLst>
-          </p:cNvPr>
-          <p:cNvSpPr txBox="1">
-            <a:spLocks/>
-          </p:cNvSpPr>
-          <p:nvPr/>
-        </p:nvSpPr>
-        <p:spPr>
-          <a:xfrm>
-            <a:off x="537039" y="1661951"/>
-            <a:ext cx="6712173" cy="1137801"/>
-          </a:xfrm>
-          <a:prstGeom prst="rect">
-            <a:avLst/>
-          </a:prstGeom>
-        </p:spPr>
-        <p:txBody>
-          <a:bodyPr vert="horz" lIns="0" tIns="45720" rIns="0" bIns="45720" rtlCol="0" anchor="t">
-            <a:noAutofit/>
-          </a:bodyPr>
-          <a:lstStyle>
-            <a:lvl1pPr algn="ctr" defTabSz="685783" rtl="0" eaLnBrk="1" latinLnBrk="0" hangingPunct="1">
-              <a:lnSpc>
-                <a:spcPct val="90000"/>
-              </a:lnSpc>
-              <a:spcBef>
-                <a:spcPct val="0"/>
-              </a:spcBef>
-              <a:buNone/>
-              <a:defRPr sz="2400" b="1" kern="1200">
-                <a:solidFill>
-                  <a:schemeClr val="tx2"/>
-                </a:solidFill>
-                <a:latin typeface="+mj-lt"/>
-                <a:ea typeface="+mj-ea"/>
-                <a:cs typeface="+mj-cs"/>
-              </a:defRPr>
-            </a:lvl1pPr>
-          </a:lstStyle>
-          <a:p>
-            <a:pPr marL="285750" indent="-285750" algn="l">
-              <a:buFont typeface="Wingdings" panose="05000000000000000000" pitchFamily="2" charset="2"/>
-              <a:buChar char="u"/>
-            </a:pPr>
-            <a:r>
-              <a:rPr lang="de-DE" altLang="zh-TW" sz="1800" dirty="0">
-                <a:solidFill>
-                  <a:srgbClr val="002060"/>
-                </a:solidFill>
-              </a:rPr>
-              <a:t>Wenn der verbleibende Bestand nach einer Materialausgabe unter den Sicherheitsbestand fällt, wird ein roter Warnhinweis (Alarm) auf dem Bildschirm ausgegeben. Klicken Sie zur Bestätigung auf Bestätigen.</a:t>
-            </a:r>
-            <a:endParaRPr lang="en-US" altLang="zh-TW" sz="1800" dirty="0">
-              <a:solidFill>
-                <a:srgbClr val="002060"/>
-              </a:solidFill>
-            </a:endParaRPr>
-          </a:p>
-        </p:txBody>
-      </p:sp>
-      <p:sp>
-        <p:nvSpPr>
-          <p:cNvPr id="35" name="標題 2">
-            <a:extLst>
-              <a:ext uri="{FF2B5EF4-FFF2-40B4-BE49-F238E27FC236}">
-                <a16:creationId xmlns:a16="http://schemas.microsoft.com/office/drawing/2014/main" id="{414A5CC3-D0FF-379E-B150-99D2AAA1AA1B}"/>
-              </a:ext>
-            </a:extLst>
-          </p:cNvPr>
-          <p:cNvSpPr txBox="1">
-            <a:spLocks/>
-          </p:cNvSpPr>
-          <p:nvPr/>
-        </p:nvSpPr>
-        <p:spPr>
-          <a:xfrm>
-            <a:off x="217952" y="2799753"/>
-            <a:ext cx="5511319" cy="461659"/>
-          </a:xfrm>
-          <a:prstGeom prst="rect">
-            <a:avLst/>
-          </a:prstGeom>
-        </p:spPr>
-        <p:txBody>
-          <a:bodyPr vert="horz" lIns="0" tIns="45720" rIns="0" bIns="45720" rtlCol="0" anchor="t">
-            <a:noAutofit/>
-          </a:bodyPr>
-          <a:lstStyle>
-            <a:lvl1pPr algn="ctr" defTabSz="685783" rtl="0" eaLnBrk="1" latinLnBrk="0" hangingPunct="1">
-              <a:lnSpc>
-                <a:spcPct val="90000"/>
-              </a:lnSpc>
-              <a:spcBef>
-                <a:spcPct val="0"/>
-              </a:spcBef>
-              <a:buNone/>
-              <a:defRPr sz="2400" b="1" kern="1200">
-                <a:solidFill>
-                  <a:schemeClr val="tx2"/>
-                </a:solidFill>
-                <a:latin typeface="+mj-lt"/>
-                <a:ea typeface="+mj-ea"/>
-                <a:cs typeface="+mj-cs"/>
-              </a:defRPr>
-            </a:lvl1pPr>
-          </a:lstStyle>
-          <a:p>
-            <a:pPr algn="l"/>
-            <a:r>
-              <a:rPr lang="en-US" altLang="zh-TW" sz="1800" dirty="0">
-                <a:solidFill>
-                  <a:srgbClr val="0000FF"/>
-                </a:solidFill>
-              </a:rPr>
-              <a:t>2. </a:t>
-            </a:r>
-            <a:r>
-              <a:rPr lang="en-US" altLang="zh-TW" sz="1800" dirty="0" err="1">
-                <a:solidFill>
-                  <a:srgbClr val="0000FF"/>
-                </a:solidFill>
-              </a:rPr>
-              <a:t>Werks</a:t>
-            </a:r>
-            <a:r>
-              <a:rPr lang="en-US" altLang="zh-TW" sz="1800" dirty="0">
-                <a:solidFill>
-                  <a:srgbClr val="0000FF"/>
-                </a:solidFill>
-              </a:rPr>
-              <a:t>-</a:t>
-            </a:r>
-            <a:r>
-              <a:rPr lang="en-US" altLang="zh-TW" sz="1800" dirty="0" err="1">
-                <a:solidFill>
-                  <a:srgbClr val="0000FF"/>
-                </a:solidFill>
-              </a:rPr>
-              <a:t>Sicherheitsbestand</a:t>
-            </a:r>
-            <a:r>
-              <a:rPr lang="en-US" altLang="zh-TW" sz="1800" dirty="0">
-                <a:solidFill>
-                  <a:srgbClr val="0000FF"/>
-                </a:solidFill>
-              </a:rPr>
-              <a:t>-Dashboard</a:t>
-            </a:r>
-            <a:endParaRPr lang="zh-TW" altLang="en-US" sz="1800" dirty="0">
-              <a:solidFill>
-                <a:srgbClr val="0000FF"/>
-              </a:solidFill>
-            </a:endParaRPr>
-          </a:p>
-        </p:txBody>
-      </p:sp>
-      <p:sp>
-        <p:nvSpPr>
-          <p:cNvPr id="43" name="標題 2">
-            <a:extLst>
-              <a:ext uri="{FF2B5EF4-FFF2-40B4-BE49-F238E27FC236}">
-                <a16:creationId xmlns:a16="http://schemas.microsoft.com/office/drawing/2014/main" id="{BE249722-073E-AC22-8A27-BD6475EB42BE}"/>
-              </a:ext>
-            </a:extLst>
-          </p:cNvPr>
-          <p:cNvSpPr txBox="1">
-            <a:spLocks/>
-          </p:cNvSpPr>
-          <p:nvPr/>
-        </p:nvSpPr>
-        <p:spPr>
-          <a:xfrm>
-            <a:off x="537039" y="3261412"/>
-            <a:ext cx="6712173" cy="1005790"/>
-          </a:xfrm>
-          <a:prstGeom prst="rect">
-            <a:avLst/>
-          </a:prstGeom>
-        </p:spPr>
-        <p:txBody>
-          <a:bodyPr vert="horz" lIns="0" tIns="45720" rIns="0" bIns="45720" rtlCol="0" anchor="t">
-            <a:noAutofit/>
-          </a:bodyPr>
-          <a:lstStyle>
-            <a:lvl1pPr algn="ctr" defTabSz="685783" rtl="0" eaLnBrk="1" latinLnBrk="0" hangingPunct="1">
-              <a:lnSpc>
-                <a:spcPct val="90000"/>
-              </a:lnSpc>
-              <a:spcBef>
-                <a:spcPct val="0"/>
-              </a:spcBef>
-              <a:buNone/>
-              <a:defRPr sz="2400" b="1" kern="1200">
-                <a:solidFill>
-                  <a:schemeClr val="tx2"/>
-                </a:solidFill>
-                <a:latin typeface="+mj-lt"/>
-                <a:ea typeface="+mj-ea"/>
-                <a:cs typeface="+mj-cs"/>
-              </a:defRPr>
-            </a:lvl1pPr>
-          </a:lstStyle>
-          <a:p>
-            <a:pPr marL="285750" indent="-285750" algn="l">
-              <a:buFont typeface="Wingdings" panose="05000000000000000000" pitchFamily="2" charset="2"/>
-              <a:buChar char="u"/>
-            </a:pPr>
-            <a:r>
-              <a:rPr lang="de-DE" altLang="zh-TW" sz="1800" dirty="0">
-                <a:solidFill>
-                  <a:srgbClr val="002060"/>
-                </a:solidFill>
-              </a:rPr>
-              <a:t>Öffnen Sie dieses Dashboard, um alle Materialien zu sehen, deren aktueller Bestand (Bestand) unter dem Sicherheitsbestand (Sicherheitsbestand) liegt.</a:t>
-            </a:r>
-            <a:endParaRPr lang="en-US" altLang="zh-TW" sz="1800" dirty="0">
-              <a:solidFill>
-                <a:srgbClr val="002060"/>
-              </a:solidFill>
-            </a:endParaRPr>
-          </a:p>
-        </p:txBody>
-      </p:sp>
-      <p:sp>
-        <p:nvSpPr>
-          <p:cNvPr id="2" name="標題 2">
-            <a:extLst>
-              <a:ext uri="{FF2B5EF4-FFF2-40B4-BE49-F238E27FC236}">
-                <a16:creationId xmlns:a16="http://schemas.microsoft.com/office/drawing/2014/main" id="{95F584EF-6D8A-328D-8364-D6A254D4972F}"/>
-              </a:ext>
-            </a:extLst>
-          </p:cNvPr>
-          <p:cNvSpPr txBox="1">
-            <a:spLocks/>
-          </p:cNvSpPr>
-          <p:nvPr/>
-        </p:nvSpPr>
-        <p:spPr>
-          <a:xfrm>
-            <a:off x="537039" y="546476"/>
-            <a:ext cx="11162053" cy="1005790"/>
-          </a:xfrm>
-          <a:prstGeom prst="rect">
-            <a:avLst/>
-          </a:prstGeom>
-        </p:spPr>
-        <p:txBody>
-          <a:bodyPr vert="horz" lIns="0" tIns="45720" rIns="0" bIns="45720" rtlCol="0" anchor="t">
-            <a:noAutofit/>
-          </a:bodyPr>
-          <a:lstStyle>
-            <a:lvl1pPr algn="ctr" defTabSz="685783" rtl="0" eaLnBrk="1" latinLnBrk="0" hangingPunct="1">
-              <a:lnSpc>
-                <a:spcPct val="90000"/>
-              </a:lnSpc>
-              <a:spcBef>
-                <a:spcPct val="0"/>
-              </a:spcBef>
-              <a:buNone/>
-              <a:defRPr sz="2400" b="1" kern="1200">
-                <a:solidFill>
-                  <a:schemeClr val="tx2"/>
-                </a:solidFill>
-                <a:latin typeface="+mj-lt"/>
-                <a:ea typeface="+mj-ea"/>
-                <a:cs typeface="+mj-cs"/>
-              </a:defRPr>
-            </a:lvl1pPr>
-          </a:lstStyle>
-          <a:p>
-            <a:pPr marL="285750" indent="-285750" algn="l">
-              <a:buFont typeface="Wingdings" panose="05000000000000000000" pitchFamily="2" charset="2"/>
-              <a:buChar char="u"/>
-            </a:pPr>
-            <a:r>
-              <a:rPr lang="de-DE" altLang="zh-TW" sz="1800" dirty="0">
-                <a:solidFill>
-                  <a:srgbClr val="002060"/>
-                </a:solidFill>
-              </a:rPr>
-              <a:t>Dient zur Überwachung von Materialien, deren Bestand unter den Sicherheitsbestand gefallen ist.</a:t>
-            </a:r>
-            <a:endParaRPr lang="en-US" altLang="zh-TW" sz="1800" dirty="0">
-              <a:solidFill>
-                <a:srgbClr val="002060"/>
-              </a:solidFill>
-            </a:endParaRPr>
-          </a:p>
-        </p:txBody>
-      </p:sp>
-      <p:pic>
-        <p:nvPicPr>
-          <p:cNvPr id="13" name="圖片 12" descr="The stock in the warehouse is only 2 units, and the safety level (5) has been reached, please notify purchasing.&#10;&#10;AI 產生的內容可能不正確。">
-            <a:extLst>
-              <a:ext uri="{FF2B5EF4-FFF2-40B4-BE49-F238E27FC236}">
-                <a16:creationId xmlns:a16="http://schemas.microsoft.com/office/drawing/2014/main" id="{5D48B64B-2920-1F8E-3BE7-760800C9B567}"/>
-              </a:ext>
-            </a:extLst>
-          </p:cNvPr>
-          <p:cNvPicPr>
-            <a:picLocks noChangeAspect="1"/>
-          </p:cNvPicPr>
-          <p:nvPr/>
-        </p:nvPicPr>
-        <p:blipFill>
-          <a:blip r:embed="rId3"/>
-          <a:stretch>
-            <a:fillRect/>
-          </a:stretch>
-        </p:blipFill>
-        <p:spPr>
-          <a:xfrm>
-            <a:off x="7318167" y="1031134"/>
-            <a:ext cx="3989539" cy="2659693"/>
-          </a:xfrm>
-          <a:prstGeom prst="rect">
-            <a:avLst/>
-          </a:prstGeom>
-        </p:spPr>
-      </p:pic>
-      <p:pic>
-        <p:nvPicPr>
-          <p:cNvPr id="15" name="圖片 14" descr="The image is a dashboard interface showing a table with columns for Teilenummer (Part Number), Materialname (Material Name), Spezifikation (Specification), Bestand (Inventory), and Sicherheitsbestand (Safety Stock), with an entry for part number 2000-001-3637.A and material code M.&#10;&#10;AI 產生的內容可能不正確。">
-            <a:extLst>
-              <a:ext uri="{FF2B5EF4-FFF2-40B4-BE49-F238E27FC236}">
-                <a16:creationId xmlns:a16="http://schemas.microsoft.com/office/drawing/2014/main" id="{B9840452-ADC9-75B0-1125-89E66687BB2C}"/>
-              </a:ext>
-            </a:extLst>
-          </p:cNvPr>
-          <p:cNvPicPr>
-            <a:picLocks noChangeAspect="1"/>
-          </p:cNvPicPr>
-          <p:nvPr/>
-        </p:nvPicPr>
-        <p:blipFill>
-          <a:blip r:embed="rId4"/>
-          <a:stretch>
-            <a:fillRect/>
-          </a:stretch>
-        </p:blipFill>
-        <p:spPr>
-          <a:xfrm>
-            <a:off x="689344" y="4152486"/>
-            <a:ext cx="10079854" cy="2536763"/>
-          </a:xfrm>
-          <a:prstGeom prst="rect">
-            <a:avLst/>
-          </a:prstGeom>
-        </p:spPr>
-      </p:pic>
-    </p:spTree>
-    <p:extLst>
-      <p:ext uri="{BB962C8B-B14F-4D97-AF65-F5344CB8AC3E}">
-        <p14:creationId xmlns:p14="http://schemas.microsoft.com/office/powerpoint/2010/main" val="3320506873"/>
+        <p14:creationId xmlns:p14="http://schemas.microsoft.com/office/powerpoint/2010/main" val="2960327121"/>
       </p:ext>
     </p:extLst>
   </p:cSld>
